--- a/output/status_report.pptx
+++ b/output/status_report.pptx
@@ -8,9 +8,10 @@
     <p:sldId id="256" r:id="rId2"/>
     <p:sldId id="257" r:id="rId3"/>
     <p:sldId id="258" r:id="rId4"/>
+    <p:sldId id="259" r:id="rId5"/>
   </p:sldIdLst>
   <p:notesMasterIdLst>
-    <p:notesMasterId r:id="rId5"/>
+    <p:notesMasterId r:id="rId6"/>
   </p:notesMasterIdLst>
   <p:sldSz cx="12192000" cy="6858000"/>
   <p:notesSz cx="6858000" cy="12192000"/>
@@ -722,6 +723,94 @@
 </p:notes>
 </file>
 
+<file path=ppt/notesSlides/notesSlide4.xml><?xml version="1.0" encoding="utf-8"?>
+<p:notes xmlns:a="http://schemas.openxmlformats.org/drawingml/2006/main" xmlns:r="http://schemas.openxmlformats.org/officeDocument/2006/relationships" xmlns:p="http://schemas.openxmlformats.org/presentationml/2006/main">
+  <p:cSld>
+    <p:spTree>
+      <p:nvGrpSpPr>
+        <p:cNvPr id="1" name=""/>
+        <p:cNvGrpSpPr/>
+        <p:nvPr/>
+      </p:nvGrpSpPr>
+      <p:grpSpPr>
+        <a:xfrm>
+          <a:off x="0" y="0"/>
+          <a:ext cx="0" cy="0"/>
+          <a:chOff x="0" y="0"/>
+          <a:chExt cx="0" cy="0"/>
+        </a:xfrm>
+      </p:grpSpPr>
+      <p:sp>
+        <p:nvSpPr>
+          <p:cNvPr id="2" name="Slide Image Placeholder 1"/>
+          <p:cNvSpPr>
+            <a:spLocks noGrp="1" noRot="1" noChangeAspect="1"/>
+          </p:cNvSpPr>
+          <p:nvPr>
+            <p:ph type="sldImg"/>
+          </p:nvPr>
+        </p:nvSpPr>
+        <p:spPr/>
+      </p:sp>
+      <p:sp>
+        <p:nvSpPr>
+          <p:cNvPr id="3" name="Notes Placeholder 2"/>
+          <p:cNvSpPr>
+            <a:spLocks noGrp="1"/>
+          </p:cNvSpPr>
+          <p:nvPr>
+            <p:ph type="body" idx="1"/>
+          </p:nvPr>
+        </p:nvSpPr>
+        <p:spPr/>
+        <p:txBody>
+          <a:bodyPr/>
+          <a:lstStyle/>
+          <a:p>
+            <a:r>
+              <a:rPr lang="en-US" dirty="0"/>
+              <a:t/>
+            </a:r>
+            <a:endParaRPr lang="en-US" dirty="0"/>
+          </a:p>
+        </p:txBody>
+      </p:sp>
+      <p:sp>
+        <p:nvSpPr>
+          <p:cNvPr id="4" name="Slide Number Placeholder 3"/>
+          <p:cNvSpPr>
+            <a:spLocks noGrp="1"/>
+          </p:cNvSpPr>
+          <p:nvPr>
+            <p:ph type="sldNum" sz="quarter" idx="10"/>
+          </p:nvPr>
+        </p:nvSpPr>
+        <p:spPr/>
+        <p:txBody>
+          <a:bodyPr/>
+          <a:lstStyle/>
+          <a:p>
+            <a:fld id="{F7021451-1387-4CA6-816F-3879F97B5CBC}" type="slidenum">
+              <a:rPr lang="en-US"/>
+              <a:t>4</a:t>
+            </a:fld>
+            <a:endParaRPr lang="en-US"/>
+          </a:p>
+        </p:txBody>
+      </p:sp>
+    </p:spTree>
+    <p:extLst>
+      <p:ext uri="{BB962C8B-B14F-4D97-AF65-F5344CB8AC3E}">
+        <p14:creationId xmlns:p14="http://schemas.microsoft.com/office/powerpoint/2010/main" val="1024086991"/>
+      </p:ext>
+    </p:extLst>
+  </p:cSld>
+  <p:clrMapOvr>
+    <a:masterClrMapping/>
+  </p:clrMapOvr>
+</p:notes>
+</file>
+
 <file path=ppt/slideLayouts/slideLayout1.xml><?xml version="1.0" encoding="utf-8"?>
 <p:sldLayout xmlns:a="http://schemas.openxmlformats.org/drawingml/2006/main" xmlns:r="http://schemas.openxmlformats.org/officeDocument/2006/relationships" xmlns:p="http://schemas.openxmlformats.org/presentationml/2006/main" preserve="1">
   <p:cSld name="DEFAULT">
@@ -1202,7 +1291,7 @@
                 <a:ea typeface="Arial" pitchFamily="34" charset="-122"/>
                 <a:cs typeface="Arial" pitchFamily="34" charset="-120"/>
               </a:rPr>
-              <a:t>Roadmap de Projetos e Melhorias Funil de Vendas - Livre (1/3)</a:t>
+              <a:t>Roadmap de Projetos e Melhorias Funil de Vendas - Livre (1/4)</a:t>
             </a:r>
             <a:endParaRPr lang="en-US" sz="1500" dirty="0"/>
           </a:p>
@@ -1241,7 +1330,7 @@
                 <a:ea typeface="Arial" pitchFamily="34" charset="-122"/>
                 <a:cs typeface="Arial" pitchFamily="34" charset="-120"/>
               </a:rPr>
-              <a:t>Atualizado em 11/08</a:t>
+              <a:t>Atualizado em 13/08</a:t>
             </a:r>
             <a:endParaRPr lang="en-US" sz="1000" dirty="0"/>
           </a:p>
@@ -1255,7 +1344,7 @@
         </p:nvSpPr>
         <p:spPr>
           <a:xfrm>
-            <a:off x="320040" y="548640"/>
+            <a:off x="320040" y="530352"/>
             <a:ext cx="1188720" cy="201168"/>
           </a:xfrm>
           <a:prstGeom prst="rect">
@@ -1294,7 +1383,7 @@
         </p:nvSpPr>
         <p:spPr>
           <a:xfrm>
-            <a:off x="320040" y="777240"/>
+            <a:off x="320040" y="676656"/>
             <a:ext cx="137160" cy="137160"/>
           </a:xfrm>
           <a:prstGeom prst="ellipse">
@@ -1319,7 +1408,7 @@
         </p:nvSpPr>
         <p:spPr>
           <a:xfrm>
-            <a:off x="475488" y="749808"/>
+            <a:off x="475488" y="649224"/>
             <a:ext cx="858073" cy="201168"/>
           </a:xfrm>
           <a:prstGeom prst="rect">
@@ -1358,7 +1447,7 @@
         </p:nvSpPr>
         <p:spPr>
           <a:xfrm>
-            <a:off x="1443289" y="777240"/>
+            <a:off x="1443289" y="676656"/>
             <a:ext cx="137160" cy="137160"/>
           </a:xfrm>
           <a:prstGeom prst="ellipse">
@@ -1383,7 +1472,7 @@
         </p:nvSpPr>
         <p:spPr>
           <a:xfrm>
-            <a:off x="1598737" y="749808"/>
+            <a:off x="1598737" y="649224"/>
             <a:ext cx="572049" cy="201168"/>
           </a:xfrm>
           <a:prstGeom prst="rect">
@@ -1422,7 +1511,7 @@
         </p:nvSpPr>
         <p:spPr>
           <a:xfrm>
-            <a:off x="2280514" y="777240"/>
+            <a:off x="2280514" y="676656"/>
             <a:ext cx="137160" cy="137160"/>
           </a:xfrm>
           <a:prstGeom prst="ellipse">
@@ -1447,7 +1536,7 @@
         </p:nvSpPr>
         <p:spPr>
           <a:xfrm>
-            <a:off x="2435962" y="749808"/>
+            <a:off x="2435962" y="649224"/>
             <a:ext cx="1072591" cy="201168"/>
           </a:xfrm>
           <a:prstGeom prst="rect">
@@ -1486,7 +1575,7 @@
         </p:nvSpPr>
         <p:spPr>
           <a:xfrm>
-            <a:off x="3618281" y="777240"/>
+            <a:off x="3618281" y="676656"/>
             <a:ext cx="137160" cy="137160"/>
           </a:xfrm>
           <a:prstGeom prst="ellipse">
@@ -1511,7 +1600,7 @@
         </p:nvSpPr>
         <p:spPr>
           <a:xfrm>
-            <a:off x="3773729" y="749808"/>
+            <a:off x="3773729" y="649224"/>
             <a:ext cx="429036" cy="201168"/>
           </a:xfrm>
           <a:prstGeom prst="rect">
@@ -1550,7 +1639,7 @@
         </p:nvSpPr>
         <p:spPr>
           <a:xfrm>
-            <a:off x="4312493" y="777240"/>
+            <a:off x="4312493" y="676656"/>
             <a:ext cx="137160" cy="137160"/>
           </a:xfrm>
           <a:prstGeom prst="ellipse">
@@ -1575,7 +1664,7 @@
         </p:nvSpPr>
         <p:spPr>
           <a:xfrm>
-            <a:off x="4467941" y="749808"/>
+            <a:off x="4467941" y="649224"/>
             <a:ext cx="500543" cy="201168"/>
           </a:xfrm>
           <a:prstGeom prst="rect">
@@ -1614,7 +1703,7 @@
         </p:nvSpPr>
         <p:spPr>
           <a:xfrm>
-            <a:off x="5215372" y="548640"/>
+            <a:off x="5215372" y="530352"/>
             <a:ext cx="1417320" cy="201168"/>
           </a:xfrm>
           <a:prstGeom prst="rect">
@@ -1653,7 +1742,7 @@
         </p:nvSpPr>
         <p:spPr>
           <a:xfrm rot="5400000">
-            <a:off x="5215372" y="768096"/>
+            <a:off x="5215372" y="667512"/>
             <a:ext cx="137160" cy="137160"/>
           </a:xfrm>
           <a:prstGeom prst="triangle">
@@ -1678,7 +1767,7 @@
         </p:nvSpPr>
         <p:spPr>
           <a:xfrm>
-            <a:off x="5379964" y="749808"/>
+            <a:off x="5379964" y="649224"/>
             <a:ext cx="429036" cy="201168"/>
           </a:xfrm>
           <a:prstGeom prst="rect">
@@ -1717,7 +1806,7 @@
         </p:nvSpPr>
         <p:spPr>
           <a:xfrm>
-            <a:off x="5918728" y="768096"/>
+            <a:off x="5918728" y="667512"/>
             <a:ext cx="155448" cy="155448"/>
           </a:xfrm>
           <a:prstGeom prst="ellipse">
@@ -1742,7 +1831,7 @@
         </p:nvSpPr>
         <p:spPr>
           <a:xfrm>
-            <a:off x="5918728" y="754380"/>
+            <a:off x="5918728" y="653796"/>
             <a:ext cx="155448" cy="155448"/>
           </a:xfrm>
           <a:prstGeom prst="rect">
@@ -1781,7 +1870,7 @@
         </p:nvSpPr>
         <p:spPr>
           <a:xfrm>
-            <a:off x="6092464" y="731520"/>
+            <a:off x="6092464" y="630936"/>
             <a:ext cx="572049" cy="274320"/>
           </a:xfrm>
           <a:prstGeom prst="rect">
@@ -1820,7 +1909,7 @@
         </p:nvSpPr>
         <p:spPr>
           <a:xfrm>
-            <a:off x="6774241" y="768096"/>
+            <a:off x="6774241" y="667512"/>
             <a:ext cx="155448" cy="155448"/>
           </a:xfrm>
           <a:prstGeom prst="ellipse">
@@ -1845,7 +1934,7 @@
         </p:nvSpPr>
         <p:spPr>
           <a:xfrm>
-            <a:off x="6774241" y="754380"/>
+            <a:off x="6774241" y="653796"/>
             <a:ext cx="155448" cy="155448"/>
           </a:xfrm>
           <a:prstGeom prst="rect">
@@ -1884,7 +1973,7 @@
         </p:nvSpPr>
         <p:spPr>
           <a:xfrm>
-            <a:off x="6947977" y="731520"/>
+            <a:off x="6947977" y="630936"/>
             <a:ext cx="1287109" cy="274320"/>
           </a:xfrm>
           <a:prstGeom prst="rect">
@@ -1923,7 +2012,7 @@
         </p:nvSpPr>
         <p:spPr>
           <a:xfrm>
-            <a:off x="8344814" y="768096"/>
+            <a:off x="8344814" y="667512"/>
             <a:ext cx="155448" cy="155448"/>
           </a:xfrm>
           <a:prstGeom prst="ellipse">
@@ -1948,7 +2037,7 @@
         </p:nvSpPr>
         <p:spPr>
           <a:xfrm>
-            <a:off x="8344814" y="754380"/>
+            <a:off x="8344814" y="653796"/>
             <a:ext cx="155448" cy="155448"/>
           </a:xfrm>
           <a:prstGeom prst="rect">
@@ -1987,7 +2076,7 @@
         </p:nvSpPr>
         <p:spPr>
           <a:xfrm>
-            <a:off x="8518550" y="731520"/>
+            <a:off x="8518550" y="630936"/>
             <a:ext cx="1430122" cy="274320"/>
           </a:xfrm>
           <a:prstGeom prst="rect">
@@ -3653,8 +3742,8 @@
         </p:nvSpPr>
         <p:spPr>
           <a:xfrm>
-            <a:off x="4709160" y="1906524"/>
-            <a:ext cx="1018903" cy="192024"/>
+            <a:off x="4818328" y="1906524"/>
+            <a:ext cx="502174" cy="192024"/>
           </a:xfrm>
           <a:prstGeom prst="rect">
             <a:avLst/>
@@ -3678,14 +3767,14 @@
         </p:nvSpPr>
         <p:spPr>
           <a:xfrm>
-            <a:off x="5645767" y="1920240"/>
+            <a:off x="5238206" y="1920240"/>
             <a:ext cx="164592" cy="164592"/>
           </a:xfrm>
           <a:prstGeom prst="ellipse">
             <a:avLst/>
           </a:prstGeom>
           <a:solidFill>
-            <a:srgbClr val="E67E22"/>
+            <a:srgbClr val="4CAF50"/>
           </a:solidFill>
           <a:ln w="9525">
             <a:solidFill>
@@ -3703,7 +3792,7 @@
         </p:nvSpPr>
         <p:spPr>
           <a:xfrm>
-            <a:off x="5645767" y="1911096"/>
+            <a:off x="5238206" y="1911096"/>
             <a:ext cx="164592" cy="164592"/>
           </a:xfrm>
           <a:prstGeom prst="rect">
@@ -3736,7 +3825,46 @@
       </p:sp>
       <p:sp>
         <p:nvSpPr>
-          <p:cNvPr id="85" name="Shape 83"/>
+          <p:cNvPr id="85" name="Text 83"/>
+          <p:cNvSpPr/>
+          <p:nvPr/>
+        </p:nvSpPr>
+        <p:spPr>
+          <a:xfrm>
+            <a:off x="5430230" y="1773936"/>
+            <a:ext cx="1005840" cy="457200"/>
+          </a:xfrm>
+          <a:prstGeom prst="rect">
+            <a:avLst/>
+          </a:prstGeom>
+          <a:noFill/>
+          <a:ln/>
+        </p:spPr>
+        <p:txBody>
+          <a:bodyPr wrap="square" lIns="0" tIns="0" rIns="0" bIns="0" rtlCol="0" anchor="ctr"/>
+          <a:lstStyle/>
+          <a:p>
+            <a:pPr indent="0" marL="0">
+              <a:buNone/>
+            </a:pPr>
+            <a:r>
+              <a:rPr lang="en-US" sz="750" dirty="0">
+                <a:solidFill>
+                  <a:srgbClr val="1A1A1A"/>
+                </a:solidFill>
+                <a:latin typeface="Arial" pitchFamily="34" charset="0"/>
+                <a:ea typeface="Arial" pitchFamily="34" charset="-122"/>
+                <a:cs typeface="Arial" pitchFamily="34" charset="-120"/>
+              </a:rPr>
+              <a:t>19/05</a:t>
+            </a:r>
+            <a:endParaRPr lang="en-US" sz="750" dirty="0"/>
+          </a:p>
+        </p:txBody>
+      </p:sp>
+      <p:sp>
+        <p:nvSpPr>
+          <p:cNvPr id="86" name="Shape 84"/>
           <p:cNvSpPr/>
           <p:nvPr/>
         </p:nvSpPr>
@@ -3761,7 +3889,7 @@
       </p:sp>
       <p:sp>
         <p:nvSpPr>
-          <p:cNvPr id="86" name="Text 84"/>
+          <p:cNvPr id="87" name="Text 85"/>
           <p:cNvSpPr/>
           <p:nvPr/>
         </p:nvSpPr>
@@ -3802,7 +3930,7 @@
       </p:sp>
       <p:sp>
         <p:nvSpPr>
-          <p:cNvPr id="87" name="Shape 85"/>
+          <p:cNvPr id="88" name="Shape 86"/>
           <p:cNvSpPr/>
           <p:nvPr/>
         </p:nvSpPr>
@@ -3827,14 +3955,14 @@
       </p:sp>
       <p:sp>
         <p:nvSpPr>
-          <p:cNvPr id="88" name="Shape 86"/>
-          <p:cNvSpPr/>
-          <p:nvPr/>
-        </p:nvSpPr>
-        <p:spPr>
-          <a:xfrm>
-            <a:off x="5218611" y="2363724"/>
-            <a:ext cx="1018903" cy="192024"/>
+          <p:cNvPr id="89" name="Shape 87"/>
+          <p:cNvSpPr/>
+          <p:nvPr/>
+        </p:nvSpPr>
+        <p:spPr>
+          <a:xfrm>
+            <a:off x="5286538" y="2363724"/>
+            <a:ext cx="732640" cy="192024"/>
           </a:xfrm>
           <a:prstGeom prst="rect">
             <a:avLst/>
@@ -3852,13 +3980,13 @@
       </p:sp>
       <p:sp>
         <p:nvSpPr>
-          <p:cNvPr id="89" name="Shape 87"/>
-          <p:cNvSpPr/>
-          <p:nvPr/>
-        </p:nvSpPr>
-        <p:spPr>
-          <a:xfrm>
-            <a:off x="6155218" y="2377440"/>
+          <p:cNvPr id="90" name="Shape 88"/>
+          <p:cNvSpPr/>
+          <p:nvPr/>
+        </p:nvSpPr>
+        <p:spPr>
+          <a:xfrm>
+            <a:off x="5936882" y="2377440"/>
             <a:ext cx="164592" cy="164592"/>
           </a:xfrm>
           <a:prstGeom prst="ellipse">
@@ -3877,13 +4005,13 @@
       </p:sp>
       <p:sp>
         <p:nvSpPr>
-          <p:cNvPr id="90" name="Text 88"/>
-          <p:cNvSpPr/>
-          <p:nvPr/>
-        </p:nvSpPr>
-        <p:spPr>
-          <a:xfrm>
-            <a:off x="6155218" y="2368296"/>
+          <p:cNvPr id="91" name="Text 89"/>
+          <p:cNvSpPr/>
+          <p:nvPr/>
+        </p:nvSpPr>
+        <p:spPr>
+          <a:xfrm>
+            <a:off x="5936882" y="2368296"/>
             <a:ext cx="164592" cy="164592"/>
           </a:xfrm>
           <a:prstGeom prst="rect">
@@ -3916,7 +4044,60 @@
       </p:sp>
       <p:sp>
         <p:nvSpPr>
-          <p:cNvPr id="91" name="Shape 89"/>
+          <p:cNvPr id="92" name="Text 90"/>
+          <p:cNvSpPr/>
+          <p:nvPr/>
+        </p:nvSpPr>
+        <p:spPr>
+          <a:xfrm>
+            <a:off x="6128906" y="2231136"/>
+            <a:ext cx="1005840" cy="457200"/>
+          </a:xfrm>
+          <a:prstGeom prst="rect">
+            <a:avLst/>
+          </a:prstGeom>
+          <a:noFill/>
+          <a:ln/>
+        </p:spPr>
+        <p:txBody>
+          <a:bodyPr wrap="square" lIns="0" tIns="0" rIns="0" bIns="0" rtlCol="0" anchor="ctr"/>
+          <a:lstStyle/>
+          <a:p>
+            <a:pPr indent="0" marL="0">
+              <a:buNone/>
+            </a:pPr>
+            <a:r>
+              <a:rPr lang="en-US" sz="750" strike="sngStrike" dirty="0">
+                <a:solidFill>
+                  <a:srgbClr val="9E9E9E"/>
+                </a:solidFill>
+                <a:latin typeface="Arial" pitchFamily="34" charset="0"/>
+                <a:ea typeface="Arial" pitchFamily="34" charset="-122"/>
+                <a:cs typeface="Arial" pitchFamily="34" charset="-120"/>
+              </a:rPr>
+              <a:t>02/06  </a:t>
+            </a:r>
+            <a:pPr indent="0" marL="0">
+              <a:buNone/>
+            </a:pPr>
+            <a:r>
+              <a:rPr lang="en-US" sz="750" dirty="0">
+                <a:solidFill>
+                  <a:srgbClr val="1A1A1A"/>
+                </a:solidFill>
+                <a:latin typeface="Arial" pitchFamily="34" charset="0"/>
+                <a:ea typeface="Arial" pitchFamily="34" charset="-122"/>
+                <a:cs typeface="Arial" pitchFamily="34" charset="-120"/>
+              </a:rPr>
+              <a:t>09/06</a:t>
+            </a:r>
+            <a:endParaRPr lang="en-US" sz="750" dirty="0"/>
+          </a:p>
+        </p:txBody>
+      </p:sp>
+      <p:sp>
+        <p:nvSpPr>
+          <p:cNvPr id="93" name="Shape 91"/>
           <p:cNvSpPr/>
           <p:nvPr/>
         </p:nvSpPr>
@@ -3941,7 +4122,7 @@
       </p:sp>
       <p:sp>
         <p:nvSpPr>
-          <p:cNvPr id="92" name="Text 90"/>
+          <p:cNvPr id="94" name="Text 92"/>
           <p:cNvSpPr/>
           <p:nvPr/>
         </p:nvSpPr>
@@ -3982,7 +4163,7 @@
       </p:sp>
       <p:sp>
         <p:nvSpPr>
-          <p:cNvPr id="93" name="Shape 91"/>
+          <p:cNvPr id="95" name="Shape 93"/>
           <p:cNvSpPr/>
           <p:nvPr/>
         </p:nvSpPr>
@@ -4007,14 +4188,14 @@
       </p:sp>
       <p:sp>
         <p:nvSpPr>
-          <p:cNvPr id="94" name="Shape 92"/>
-          <p:cNvSpPr/>
-          <p:nvPr/>
-        </p:nvSpPr>
-        <p:spPr>
-          <a:xfrm>
-            <a:off x="5218611" y="2820924"/>
-            <a:ext cx="509451" cy="192024"/>
+          <p:cNvPr id="96" name="Shape 94"/>
+          <p:cNvSpPr/>
+          <p:nvPr/>
+        </p:nvSpPr>
+        <p:spPr>
+          <a:xfrm>
+            <a:off x="5286538" y="2820924"/>
+            <a:ext cx="135854" cy="192024"/>
           </a:xfrm>
           <a:prstGeom prst="rect">
             <a:avLst/>
@@ -4032,13 +4213,13 @@
       </p:sp>
       <p:sp>
         <p:nvSpPr>
-          <p:cNvPr id="95" name="Shape 93"/>
-          <p:cNvSpPr/>
-          <p:nvPr/>
-        </p:nvSpPr>
-        <p:spPr>
-          <a:xfrm>
-            <a:off x="5645767" y="2834640"/>
+          <p:cNvPr id="97" name="Shape 95"/>
+          <p:cNvSpPr/>
+          <p:nvPr/>
+        </p:nvSpPr>
+        <p:spPr>
+          <a:xfrm>
+            <a:off x="5340096" y="2834640"/>
             <a:ext cx="164592" cy="164592"/>
           </a:xfrm>
           <a:prstGeom prst="ellipse">
@@ -4057,13 +4238,13 @@
       </p:sp>
       <p:sp>
         <p:nvSpPr>
-          <p:cNvPr id="96" name="Text 94"/>
-          <p:cNvSpPr/>
-          <p:nvPr/>
-        </p:nvSpPr>
-        <p:spPr>
-          <a:xfrm>
-            <a:off x="5645767" y="2825496"/>
+          <p:cNvPr id="98" name="Text 96"/>
+          <p:cNvSpPr/>
+          <p:nvPr/>
+        </p:nvSpPr>
+        <p:spPr>
+          <a:xfrm>
+            <a:off x="5340096" y="2825496"/>
             <a:ext cx="164592" cy="164592"/>
           </a:xfrm>
           <a:prstGeom prst="rect">
@@ -4096,7 +4277,46 @@
       </p:sp>
       <p:sp>
         <p:nvSpPr>
-          <p:cNvPr id="97" name="Shape 95"/>
+          <p:cNvPr id="99" name="Text 97"/>
+          <p:cNvSpPr/>
+          <p:nvPr/>
+        </p:nvSpPr>
+        <p:spPr>
+          <a:xfrm>
+            <a:off x="5532120" y="2688336"/>
+            <a:ext cx="1005840" cy="457200"/>
+          </a:xfrm>
+          <a:prstGeom prst="rect">
+            <a:avLst/>
+          </a:prstGeom>
+          <a:noFill/>
+          <a:ln/>
+        </p:spPr>
+        <p:txBody>
+          <a:bodyPr wrap="square" lIns="0" tIns="0" rIns="0" bIns="0" rtlCol="0" anchor="ctr"/>
+          <a:lstStyle/>
+          <a:p>
+            <a:pPr indent="0" marL="0">
+              <a:buNone/>
+            </a:pPr>
+            <a:r>
+              <a:rPr lang="en-US" sz="750" dirty="0">
+                <a:solidFill>
+                  <a:srgbClr val="1A1A1A"/>
+                </a:solidFill>
+                <a:latin typeface="Arial" pitchFamily="34" charset="0"/>
+                <a:ea typeface="Arial" pitchFamily="34" charset="-122"/>
+                <a:cs typeface="Arial" pitchFamily="34" charset="-120"/>
+              </a:rPr>
+              <a:t>21/05</a:t>
+            </a:r>
+            <a:endParaRPr lang="en-US" sz="750" dirty="0"/>
+          </a:p>
+        </p:txBody>
+      </p:sp>
+      <p:sp>
+        <p:nvSpPr>
+          <p:cNvPr id="100" name="Shape 98"/>
           <p:cNvSpPr/>
           <p:nvPr/>
         </p:nvSpPr>
@@ -4121,7 +4341,7 @@
       </p:sp>
       <p:sp>
         <p:nvSpPr>
-          <p:cNvPr id="98" name="Text 96"/>
+          <p:cNvPr id="101" name="Text 99"/>
           <p:cNvSpPr/>
           <p:nvPr/>
         </p:nvSpPr>
@@ -4162,7 +4382,7 @@
       </p:sp>
       <p:sp>
         <p:nvSpPr>
-          <p:cNvPr id="99" name="Shape 97"/>
+          <p:cNvPr id="102" name="Shape 100"/>
           <p:cNvSpPr/>
           <p:nvPr/>
         </p:nvSpPr>
@@ -4187,14 +4407,14 @@
       </p:sp>
       <p:sp>
         <p:nvSpPr>
-          <p:cNvPr id="100" name="Shape 98"/>
-          <p:cNvSpPr/>
-          <p:nvPr/>
-        </p:nvSpPr>
-        <p:spPr>
-          <a:xfrm>
-            <a:off x="5218611" y="3278124"/>
-            <a:ext cx="509451" cy="192024"/>
+          <p:cNvPr id="103" name="Shape 101"/>
+          <p:cNvSpPr/>
+          <p:nvPr/>
+        </p:nvSpPr>
+        <p:spPr>
+          <a:xfrm>
+            <a:off x="5286538" y="3278124"/>
+            <a:ext cx="373598" cy="192024"/>
           </a:xfrm>
           <a:prstGeom prst="rect">
             <a:avLst/>
@@ -4212,20 +4432,20 @@
       </p:sp>
       <p:sp>
         <p:nvSpPr>
-          <p:cNvPr id="101" name="Shape 99"/>
-          <p:cNvSpPr/>
-          <p:nvPr/>
-        </p:nvSpPr>
-        <p:spPr>
-          <a:xfrm>
-            <a:off x="5645767" y="3291840"/>
+          <p:cNvPr id="104" name="Shape 102"/>
+          <p:cNvSpPr/>
+          <p:nvPr/>
+        </p:nvSpPr>
+        <p:spPr>
+          <a:xfrm>
+            <a:off x="5577840" y="3291840"/>
             <a:ext cx="164592" cy="164592"/>
           </a:xfrm>
           <a:prstGeom prst="ellipse">
             <a:avLst/>
           </a:prstGeom>
           <a:solidFill>
-            <a:srgbClr val="E67E22"/>
+            <a:srgbClr val="4CAF50"/>
           </a:solidFill>
           <a:ln w="9525">
             <a:solidFill>
@@ -4237,13 +4457,13 @@
       </p:sp>
       <p:sp>
         <p:nvSpPr>
-          <p:cNvPr id="102" name="Text 100"/>
-          <p:cNvSpPr/>
-          <p:nvPr/>
-        </p:nvSpPr>
-        <p:spPr>
-          <a:xfrm>
-            <a:off x="5645767" y="3282696"/>
+          <p:cNvPr id="105" name="Text 103"/>
+          <p:cNvSpPr/>
+          <p:nvPr/>
+        </p:nvSpPr>
+        <p:spPr>
+          <a:xfrm>
+            <a:off x="5577840" y="3282696"/>
             <a:ext cx="164592" cy="164592"/>
           </a:xfrm>
           <a:prstGeom prst="rect">
@@ -4276,7 +4496,46 @@
       </p:sp>
       <p:sp>
         <p:nvSpPr>
-          <p:cNvPr id="103" name="Shape 101"/>
+          <p:cNvPr id="106" name="Text 104"/>
+          <p:cNvSpPr/>
+          <p:nvPr/>
+        </p:nvSpPr>
+        <p:spPr>
+          <a:xfrm>
+            <a:off x="5769864" y="3145536"/>
+            <a:ext cx="1005840" cy="457200"/>
+          </a:xfrm>
+          <a:prstGeom prst="rect">
+            <a:avLst/>
+          </a:prstGeom>
+          <a:noFill/>
+          <a:ln/>
+        </p:spPr>
+        <p:txBody>
+          <a:bodyPr wrap="square" lIns="0" tIns="0" rIns="0" bIns="0" rtlCol="0" anchor="ctr"/>
+          <a:lstStyle/>
+          <a:p>
+            <a:pPr indent="0" marL="0">
+              <a:buNone/>
+            </a:pPr>
+            <a:r>
+              <a:rPr lang="en-US" sz="750" dirty="0">
+                <a:solidFill>
+                  <a:srgbClr val="1A1A1A"/>
+                </a:solidFill>
+                <a:latin typeface="Arial" pitchFamily="34" charset="0"/>
+                <a:ea typeface="Arial" pitchFamily="34" charset="-122"/>
+                <a:cs typeface="Arial" pitchFamily="34" charset="-120"/>
+              </a:rPr>
+              <a:t>28/05</a:t>
+            </a:r>
+            <a:endParaRPr lang="en-US" sz="750" dirty="0"/>
+          </a:p>
+        </p:txBody>
+      </p:sp>
+      <p:sp>
+        <p:nvSpPr>
+          <p:cNvPr id="107" name="Shape 105"/>
           <p:cNvSpPr/>
           <p:nvPr/>
         </p:nvSpPr>
@@ -4301,7 +4560,7 @@
       </p:sp>
       <p:sp>
         <p:nvSpPr>
-          <p:cNvPr id="104" name="Text 102"/>
+          <p:cNvPr id="108" name="Text 106"/>
           <p:cNvSpPr/>
           <p:nvPr/>
         </p:nvSpPr>
@@ -4342,7 +4601,7 @@
       </p:sp>
       <p:sp>
         <p:nvSpPr>
-          <p:cNvPr id="105" name="Shape 103"/>
+          <p:cNvPr id="109" name="Shape 107"/>
           <p:cNvSpPr/>
           <p:nvPr/>
         </p:nvSpPr>
@@ -4367,14 +4626,14 @@
       </p:sp>
       <p:sp>
         <p:nvSpPr>
-          <p:cNvPr id="106" name="Shape 104"/>
-          <p:cNvSpPr/>
-          <p:nvPr/>
-        </p:nvSpPr>
-        <p:spPr>
-          <a:xfrm>
-            <a:off x="5218611" y="3735324"/>
-            <a:ext cx="509451" cy="192024"/>
+          <p:cNvPr id="110" name="Shape 108"/>
+          <p:cNvSpPr/>
+          <p:nvPr/>
+        </p:nvSpPr>
+        <p:spPr>
+          <a:xfrm>
+            <a:off x="5286538" y="3735324"/>
+            <a:ext cx="101890" cy="192024"/>
           </a:xfrm>
           <a:prstGeom prst="rect">
             <a:avLst/>
@@ -4392,13 +4651,13 @@
       </p:sp>
       <p:sp>
         <p:nvSpPr>
-          <p:cNvPr id="107" name="Shape 105"/>
-          <p:cNvSpPr/>
-          <p:nvPr/>
-        </p:nvSpPr>
-        <p:spPr>
-          <a:xfrm>
-            <a:off x="5645767" y="3749040"/>
+          <p:cNvPr id="111" name="Shape 109"/>
+          <p:cNvSpPr/>
+          <p:nvPr/>
+        </p:nvSpPr>
+        <p:spPr>
+          <a:xfrm>
+            <a:off x="5306133" y="3749040"/>
             <a:ext cx="164592" cy="164592"/>
           </a:xfrm>
           <a:prstGeom prst="ellipse">
@@ -4417,13 +4676,13 @@
       </p:sp>
       <p:sp>
         <p:nvSpPr>
-          <p:cNvPr id="108" name="Text 106"/>
-          <p:cNvSpPr/>
-          <p:nvPr/>
-        </p:nvSpPr>
-        <p:spPr>
-          <a:xfrm>
-            <a:off x="5645767" y="3739896"/>
+          <p:cNvPr id="112" name="Text 110"/>
+          <p:cNvSpPr/>
+          <p:nvPr/>
+        </p:nvSpPr>
+        <p:spPr>
+          <a:xfrm>
+            <a:off x="5306133" y="3739896"/>
             <a:ext cx="164592" cy="164592"/>
           </a:xfrm>
           <a:prstGeom prst="rect">
@@ -4456,7 +4715,46 @@
       </p:sp>
       <p:sp>
         <p:nvSpPr>
-          <p:cNvPr id="109" name="Shape 107"/>
+          <p:cNvPr id="113" name="Text 111"/>
+          <p:cNvSpPr/>
+          <p:nvPr/>
+        </p:nvSpPr>
+        <p:spPr>
+          <a:xfrm>
+            <a:off x="5498157" y="3602736"/>
+            <a:ext cx="1005840" cy="457200"/>
+          </a:xfrm>
+          <a:prstGeom prst="rect">
+            <a:avLst/>
+          </a:prstGeom>
+          <a:noFill/>
+          <a:ln/>
+        </p:spPr>
+        <p:txBody>
+          <a:bodyPr wrap="square" lIns="0" tIns="0" rIns="0" bIns="0" rtlCol="0" anchor="ctr"/>
+          <a:lstStyle/>
+          <a:p>
+            <a:pPr indent="0" marL="0">
+              <a:buNone/>
+            </a:pPr>
+            <a:r>
+              <a:rPr lang="en-US" sz="750" dirty="0">
+                <a:solidFill>
+                  <a:srgbClr val="1A1A1A"/>
+                </a:solidFill>
+                <a:latin typeface="Arial" pitchFamily="34" charset="0"/>
+                <a:ea typeface="Arial" pitchFamily="34" charset="-122"/>
+                <a:cs typeface="Arial" pitchFamily="34" charset="-120"/>
+              </a:rPr>
+              <a:t>21/05</a:t>
+            </a:r>
+            <a:endParaRPr lang="en-US" sz="750" dirty="0"/>
+          </a:p>
+        </p:txBody>
+      </p:sp>
+      <p:sp>
+        <p:nvSpPr>
+          <p:cNvPr id="114" name="Shape 112"/>
           <p:cNvSpPr/>
           <p:nvPr/>
         </p:nvSpPr>
@@ -4481,7 +4779,7 @@
       </p:sp>
       <p:sp>
         <p:nvSpPr>
-          <p:cNvPr id="110" name="Text 108"/>
+          <p:cNvPr id="115" name="Text 113"/>
           <p:cNvSpPr/>
           <p:nvPr/>
         </p:nvSpPr>
@@ -4522,7 +4820,7 @@
       </p:sp>
       <p:sp>
         <p:nvSpPr>
-          <p:cNvPr id="111" name="Shape 109"/>
+          <p:cNvPr id="116" name="Shape 114"/>
           <p:cNvSpPr/>
           <p:nvPr/>
         </p:nvSpPr>
@@ -4547,14 +4845,14 @@
       </p:sp>
       <p:sp>
         <p:nvSpPr>
-          <p:cNvPr id="112" name="Shape 110"/>
-          <p:cNvSpPr/>
-          <p:nvPr/>
-        </p:nvSpPr>
-        <p:spPr>
-          <a:xfrm>
-            <a:off x="5218611" y="4192524"/>
-            <a:ext cx="1018903" cy="192024"/>
+          <p:cNvPr id="117" name="Shape 115"/>
+          <p:cNvSpPr/>
+          <p:nvPr/>
+        </p:nvSpPr>
+        <p:spPr>
+          <a:xfrm>
+            <a:off x="5286538" y="4192524"/>
+            <a:ext cx="732640" cy="192024"/>
           </a:xfrm>
           <a:prstGeom prst="rect">
             <a:avLst/>
@@ -4572,13 +4870,13 @@
       </p:sp>
       <p:sp>
         <p:nvSpPr>
-          <p:cNvPr id="113" name="Shape 111"/>
-          <p:cNvSpPr/>
-          <p:nvPr/>
-        </p:nvSpPr>
-        <p:spPr>
-          <a:xfrm>
-            <a:off x="6155218" y="4206240"/>
+          <p:cNvPr id="118" name="Shape 116"/>
+          <p:cNvSpPr/>
+          <p:nvPr/>
+        </p:nvSpPr>
+        <p:spPr>
+          <a:xfrm>
+            <a:off x="5936882" y="4206240"/>
             <a:ext cx="164592" cy="164592"/>
           </a:xfrm>
           <a:prstGeom prst="ellipse">
@@ -4597,13 +4895,13 @@
       </p:sp>
       <p:sp>
         <p:nvSpPr>
-          <p:cNvPr id="114" name="Text 112"/>
-          <p:cNvSpPr/>
-          <p:nvPr/>
-        </p:nvSpPr>
-        <p:spPr>
-          <a:xfrm>
-            <a:off x="6155218" y="4197096"/>
+          <p:cNvPr id="119" name="Text 117"/>
+          <p:cNvSpPr/>
+          <p:nvPr/>
+        </p:nvSpPr>
+        <p:spPr>
+          <a:xfrm>
+            <a:off x="5936882" y="4197096"/>
             <a:ext cx="164592" cy="164592"/>
           </a:xfrm>
           <a:prstGeom prst="rect">
@@ -4636,7 +4934,60 @@
       </p:sp>
       <p:sp>
         <p:nvSpPr>
-          <p:cNvPr id="115" name="Shape 113"/>
+          <p:cNvPr id="120" name="Text 118"/>
+          <p:cNvSpPr/>
+          <p:nvPr/>
+        </p:nvSpPr>
+        <p:spPr>
+          <a:xfrm>
+            <a:off x="6128906" y="4059936"/>
+            <a:ext cx="1005840" cy="457200"/>
+          </a:xfrm>
+          <a:prstGeom prst="rect">
+            <a:avLst/>
+          </a:prstGeom>
+          <a:noFill/>
+          <a:ln/>
+        </p:spPr>
+        <p:txBody>
+          <a:bodyPr wrap="square" lIns="0" tIns="0" rIns="0" bIns="0" rtlCol="0" anchor="ctr"/>
+          <a:lstStyle/>
+          <a:p>
+            <a:pPr indent="0" marL="0">
+              <a:buNone/>
+            </a:pPr>
+            <a:r>
+              <a:rPr lang="en-US" sz="750" strike="sngStrike" dirty="0">
+                <a:solidFill>
+                  <a:srgbClr val="9E9E9E"/>
+                </a:solidFill>
+                <a:latin typeface="Arial" pitchFamily="34" charset="0"/>
+                <a:ea typeface="Arial" pitchFamily="34" charset="-122"/>
+                <a:cs typeface="Arial" pitchFamily="34" charset="-120"/>
+              </a:rPr>
+              <a:t>02/06  </a:t>
+            </a:r>
+            <a:pPr indent="0" marL="0">
+              <a:buNone/>
+            </a:pPr>
+            <a:r>
+              <a:rPr lang="en-US" sz="750" dirty="0">
+                <a:solidFill>
+                  <a:srgbClr val="1A1A1A"/>
+                </a:solidFill>
+                <a:latin typeface="Arial" pitchFamily="34" charset="0"/>
+                <a:ea typeface="Arial" pitchFamily="34" charset="-122"/>
+                <a:cs typeface="Arial" pitchFamily="34" charset="-120"/>
+              </a:rPr>
+              <a:t>09/06</a:t>
+            </a:r>
+            <a:endParaRPr lang="en-US" sz="750" dirty="0"/>
+          </a:p>
+        </p:txBody>
+      </p:sp>
+      <p:sp>
+        <p:nvSpPr>
+          <p:cNvPr id="121" name="Shape 119"/>
           <p:cNvSpPr/>
           <p:nvPr/>
         </p:nvSpPr>
@@ -4661,7 +5012,7 @@
       </p:sp>
       <p:sp>
         <p:nvSpPr>
-          <p:cNvPr id="116" name="Text 114"/>
+          <p:cNvPr id="122" name="Text 120"/>
           <p:cNvSpPr/>
           <p:nvPr/>
         </p:nvSpPr>
@@ -4702,7 +5053,7 @@
       </p:sp>
       <p:sp>
         <p:nvSpPr>
-          <p:cNvPr id="117" name="Shape 115"/>
+          <p:cNvPr id="123" name="Shape 121"/>
           <p:cNvSpPr/>
           <p:nvPr/>
         </p:nvSpPr>
@@ -4727,14 +5078,14 @@
       </p:sp>
       <p:sp>
         <p:nvSpPr>
-          <p:cNvPr id="118" name="Shape 116"/>
-          <p:cNvSpPr/>
-          <p:nvPr/>
-        </p:nvSpPr>
-        <p:spPr>
-          <a:xfrm>
-            <a:off x="5218611" y="4649724"/>
-            <a:ext cx="1018903" cy="192024"/>
+          <p:cNvPr id="124" name="Shape 122"/>
+          <p:cNvSpPr/>
+          <p:nvPr/>
+        </p:nvSpPr>
+        <p:spPr>
+          <a:xfrm>
+            <a:off x="5286538" y="4649724"/>
+            <a:ext cx="732640" cy="192024"/>
           </a:xfrm>
           <a:prstGeom prst="rect">
             <a:avLst/>
@@ -4752,13 +5103,13 @@
       </p:sp>
       <p:sp>
         <p:nvSpPr>
-          <p:cNvPr id="119" name="Shape 117"/>
-          <p:cNvSpPr/>
-          <p:nvPr/>
-        </p:nvSpPr>
-        <p:spPr>
-          <a:xfrm>
-            <a:off x="6155218" y="4663440"/>
+          <p:cNvPr id="125" name="Shape 123"/>
+          <p:cNvSpPr/>
+          <p:nvPr/>
+        </p:nvSpPr>
+        <p:spPr>
+          <a:xfrm>
+            <a:off x="5936882" y="4663440"/>
             <a:ext cx="164592" cy="164592"/>
           </a:xfrm>
           <a:prstGeom prst="ellipse">
@@ -4777,13 +5128,13 @@
       </p:sp>
       <p:sp>
         <p:nvSpPr>
-          <p:cNvPr id="120" name="Text 118"/>
-          <p:cNvSpPr/>
-          <p:nvPr/>
-        </p:nvSpPr>
-        <p:spPr>
-          <a:xfrm>
-            <a:off x="6155218" y="4654296"/>
+          <p:cNvPr id="126" name="Text 124"/>
+          <p:cNvSpPr/>
+          <p:nvPr/>
+        </p:nvSpPr>
+        <p:spPr>
+          <a:xfrm>
+            <a:off x="5936882" y="4654296"/>
             <a:ext cx="164592" cy="164592"/>
           </a:xfrm>
           <a:prstGeom prst="rect">
@@ -4816,7 +5167,60 @@
       </p:sp>
       <p:sp>
         <p:nvSpPr>
-          <p:cNvPr id="121" name="Shape 119"/>
+          <p:cNvPr id="127" name="Text 125"/>
+          <p:cNvSpPr/>
+          <p:nvPr/>
+        </p:nvSpPr>
+        <p:spPr>
+          <a:xfrm>
+            <a:off x="6128906" y="4517136"/>
+            <a:ext cx="1005840" cy="457200"/>
+          </a:xfrm>
+          <a:prstGeom prst="rect">
+            <a:avLst/>
+          </a:prstGeom>
+          <a:noFill/>
+          <a:ln/>
+        </p:spPr>
+        <p:txBody>
+          <a:bodyPr wrap="square" lIns="0" tIns="0" rIns="0" bIns="0" rtlCol="0" anchor="ctr"/>
+          <a:lstStyle/>
+          <a:p>
+            <a:pPr indent="0" marL="0">
+              <a:buNone/>
+            </a:pPr>
+            <a:r>
+              <a:rPr lang="en-US" sz="750" strike="sngStrike" dirty="0">
+                <a:solidFill>
+                  <a:srgbClr val="9E9E9E"/>
+                </a:solidFill>
+                <a:latin typeface="Arial" pitchFamily="34" charset="0"/>
+                <a:ea typeface="Arial" pitchFamily="34" charset="-122"/>
+                <a:cs typeface="Arial" pitchFamily="34" charset="-120"/>
+              </a:rPr>
+              <a:t>02/06  </a:t>
+            </a:r>
+            <a:pPr indent="0" marL="0">
+              <a:buNone/>
+            </a:pPr>
+            <a:r>
+              <a:rPr lang="en-US" sz="750" dirty="0">
+                <a:solidFill>
+                  <a:srgbClr val="1A1A1A"/>
+                </a:solidFill>
+                <a:latin typeface="Arial" pitchFamily="34" charset="0"/>
+                <a:ea typeface="Arial" pitchFamily="34" charset="-122"/>
+                <a:cs typeface="Arial" pitchFamily="34" charset="-120"/>
+              </a:rPr>
+              <a:t>09/06</a:t>
+            </a:r>
+            <a:endParaRPr lang="en-US" sz="750" dirty="0"/>
+          </a:p>
+        </p:txBody>
+      </p:sp>
+      <p:sp>
+        <p:nvSpPr>
+          <p:cNvPr id="128" name="Shape 126"/>
           <p:cNvSpPr/>
           <p:nvPr/>
         </p:nvSpPr>
@@ -4841,7 +5245,7 @@
       </p:sp>
       <p:sp>
         <p:nvSpPr>
-          <p:cNvPr id="122" name="Text 120"/>
+          <p:cNvPr id="129" name="Text 127"/>
           <p:cNvSpPr/>
           <p:nvPr/>
         </p:nvSpPr>
@@ -4882,7 +5286,7 @@
       </p:sp>
       <p:sp>
         <p:nvSpPr>
-          <p:cNvPr id="123" name="Shape 121"/>
+          <p:cNvPr id="130" name="Shape 128"/>
           <p:cNvSpPr/>
           <p:nvPr/>
         </p:nvSpPr>
@@ -4907,14 +5311,14 @@
       </p:sp>
       <p:sp>
         <p:nvSpPr>
-          <p:cNvPr id="124" name="Shape 122"/>
+          <p:cNvPr id="131" name="Shape 129"/>
           <p:cNvSpPr/>
           <p:nvPr/>
         </p:nvSpPr>
         <p:spPr>
           <a:xfrm>
             <a:off x="5728063" y="5106924"/>
-            <a:ext cx="1018903" cy="192024"/>
+            <a:ext cx="764177" cy="192024"/>
           </a:xfrm>
           <a:prstGeom prst="rect">
             <a:avLst/>
@@ -4932,13 +5336,13 @@
       </p:sp>
       <p:sp>
         <p:nvSpPr>
-          <p:cNvPr id="125" name="Shape 123"/>
-          <p:cNvSpPr/>
-          <p:nvPr/>
-        </p:nvSpPr>
-        <p:spPr>
-          <a:xfrm>
-            <a:off x="6664670" y="5120640"/>
+          <p:cNvPr id="132" name="Shape 130"/>
+          <p:cNvSpPr/>
+          <p:nvPr/>
+        </p:nvSpPr>
+        <p:spPr>
+          <a:xfrm>
+            <a:off x="6409944" y="5120640"/>
             <a:ext cx="164592" cy="164592"/>
           </a:xfrm>
           <a:prstGeom prst="ellipse">
@@ -4957,13 +5361,13 @@
       </p:sp>
       <p:sp>
         <p:nvSpPr>
-          <p:cNvPr id="126" name="Text 124"/>
-          <p:cNvSpPr/>
-          <p:nvPr/>
-        </p:nvSpPr>
-        <p:spPr>
-          <a:xfrm>
-            <a:off x="6664670" y="5111496"/>
+          <p:cNvPr id="133" name="Text 131"/>
+          <p:cNvSpPr/>
+          <p:nvPr/>
+        </p:nvSpPr>
+        <p:spPr>
+          <a:xfrm>
+            <a:off x="6409944" y="5111496"/>
             <a:ext cx="164592" cy="164592"/>
           </a:xfrm>
           <a:prstGeom prst="rect">
@@ -4996,7 +5400,60 @@
       </p:sp>
       <p:sp>
         <p:nvSpPr>
-          <p:cNvPr id="127" name="Shape 125"/>
+          <p:cNvPr id="134" name="Text 132"/>
+          <p:cNvSpPr/>
+          <p:nvPr/>
+        </p:nvSpPr>
+        <p:spPr>
+          <a:xfrm>
+            <a:off x="6601968" y="4974336"/>
+            <a:ext cx="1005840" cy="457200"/>
+          </a:xfrm>
+          <a:prstGeom prst="rect">
+            <a:avLst/>
+          </a:prstGeom>
+          <a:noFill/>
+          <a:ln/>
+        </p:spPr>
+        <p:txBody>
+          <a:bodyPr wrap="square" lIns="0" tIns="0" rIns="0" bIns="0" rtlCol="0" anchor="ctr"/>
+          <a:lstStyle/>
+          <a:p>
+            <a:pPr indent="0" marL="0">
+              <a:buNone/>
+            </a:pPr>
+            <a:r>
+              <a:rPr lang="en-US" sz="750" strike="sngStrike" dirty="0">
+                <a:solidFill>
+                  <a:srgbClr val="9E9E9E"/>
+                </a:solidFill>
+                <a:latin typeface="Arial" pitchFamily="34" charset="0"/>
+                <a:ea typeface="Arial" pitchFamily="34" charset="-122"/>
+                <a:cs typeface="Arial" pitchFamily="34" charset="-120"/>
+              </a:rPr>
+              <a:t>16/06  </a:t>
+            </a:r>
+            <a:pPr indent="0" marL="0">
+              <a:buNone/>
+            </a:pPr>
+            <a:r>
+              <a:rPr lang="en-US" sz="750" dirty="0">
+                <a:solidFill>
+                  <a:srgbClr val="1A1A1A"/>
+                </a:solidFill>
+                <a:latin typeface="Arial" pitchFamily="34" charset="0"/>
+                <a:ea typeface="Arial" pitchFamily="34" charset="-122"/>
+                <a:cs typeface="Arial" pitchFamily="34" charset="-120"/>
+              </a:rPr>
+              <a:t>23/06</a:t>
+            </a:r>
+            <a:endParaRPr lang="en-US" sz="750" dirty="0"/>
+          </a:p>
+        </p:txBody>
+      </p:sp>
+      <p:sp>
+        <p:nvSpPr>
+          <p:cNvPr id="135" name="Shape 133"/>
           <p:cNvSpPr/>
           <p:nvPr/>
         </p:nvSpPr>
@@ -5021,7 +5478,7 @@
       </p:sp>
       <p:sp>
         <p:nvSpPr>
-          <p:cNvPr id="128" name="Text 126"/>
+          <p:cNvPr id="136" name="Text 134"/>
           <p:cNvSpPr/>
           <p:nvPr/>
         </p:nvSpPr>
@@ -5062,7 +5519,7 @@
       </p:sp>
       <p:sp>
         <p:nvSpPr>
-          <p:cNvPr id="129" name="Shape 127"/>
+          <p:cNvPr id="137" name="Shape 135"/>
           <p:cNvSpPr/>
           <p:nvPr/>
         </p:nvSpPr>
@@ -5087,14 +5544,14 @@
       </p:sp>
       <p:sp>
         <p:nvSpPr>
-          <p:cNvPr id="130" name="Shape 128"/>
+          <p:cNvPr id="138" name="Shape 136"/>
           <p:cNvSpPr/>
           <p:nvPr/>
         </p:nvSpPr>
         <p:spPr>
           <a:xfrm>
             <a:off x="5728063" y="5564124"/>
-            <a:ext cx="509451" cy="192024"/>
+            <a:ext cx="400283" cy="192024"/>
           </a:xfrm>
           <a:prstGeom prst="rect">
             <a:avLst/>
@@ -5112,20 +5569,20 @@
       </p:sp>
       <p:sp>
         <p:nvSpPr>
-          <p:cNvPr id="131" name="Shape 129"/>
-          <p:cNvSpPr/>
-          <p:nvPr/>
-        </p:nvSpPr>
-        <p:spPr>
-          <a:xfrm>
-            <a:off x="6155218" y="5577840"/>
+          <p:cNvPr id="139" name="Shape 137"/>
+          <p:cNvSpPr/>
+          <p:nvPr/>
+        </p:nvSpPr>
+        <p:spPr>
+          <a:xfrm>
+            <a:off x="6046050" y="5577840"/>
             <a:ext cx="164592" cy="164592"/>
           </a:xfrm>
           <a:prstGeom prst="ellipse">
             <a:avLst/>
           </a:prstGeom>
           <a:solidFill>
-            <a:srgbClr val="E67E22"/>
+            <a:srgbClr val="4CAF50"/>
           </a:solidFill>
           <a:ln w="9525">
             <a:solidFill>
@@ -5137,13 +5594,13 @@
       </p:sp>
       <p:sp>
         <p:nvSpPr>
-          <p:cNvPr id="132" name="Text 130"/>
-          <p:cNvSpPr/>
-          <p:nvPr/>
-        </p:nvSpPr>
-        <p:spPr>
-          <a:xfrm>
-            <a:off x="6155218" y="5568696"/>
+          <p:cNvPr id="140" name="Text 138"/>
+          <p:cNvSpPr/>
+          <p:nvPr/>
+        </p:nvSpPr>
+        <p:spPr>
+          <a:xfrm>
+            <a:off x="6046050" y="5568696"/>
             <a:ext cx="164592" cy="164592"/>
           </a:xfrm>
           <a:prstGeom prst="rect">
@@ -5176,7 +5633,46 @@
       </p:sp>
       <p:sp>
         <p:nvSpPr>
-          <p:cNvPr id="133" name="Shape 131"/>
+          <p:cNvPr id="141" name="Text 139"/>
+          <p:cNvSpPr/>
+          <p:nvPr/>
+        </p:nvSpPr>
+        <p:spPr>
+          <a:xfrm>
+            <a:off x="6238074" y="5431536"/>
+            <a:ext cx="1005840" cy="457200"/>
+          </a:xfrm>
+          <a:prstGeom prst="rect">
+            <a:avLst/>
+          </a:prstGeom>
+          <a:noFill/>
+          <a:ln/>
+        </p:spPr>
+        <p:txBody>
+          <a:bodyPr wrap="square" lIns="0" tIns="0" rIns="0" bIns="0" rtlCol="0" anchor="ctr"/>
+          <a:lstStyle/>
+          <a:p>
+            <a:pPr indent="0" marL="0">
+              <a:buNone/>
+            </a:pPr>
+            <a:r>
+              <a:rPr lang="en-US" sz="750" dirty="0">
+                <a:solidFill>
+                  <a:srgbClr val="1A1A1A"/>
+                </a:solidFill>
+                <a:latin typeface="Arial" pitchFamily="34" charset="0"/>
+                <a:ea typeface="Arial" pitchFamily="34" charset="-122"/>
+                <a:cs typeface="Arial" pitchFamily="34" charset="-120"/>
+              </a:rPr>
+              <a:t>11/06</a:t>
+            </a:r>
+            <a:endParaRPr lang="en-US" sz="750" dirty="0"/>
+          </a:p>
+        </p:txBody>
+      </p:sp>
+      <p:sp>
+        <p:nvSpPr>
+          <p:cNvPr id="142" name="Shape 140"/>
           <p:cNvSpPr/>
           <p:nvPr/>
         </p:nvSpPr>
@@ -5201,7 +5697,7 @@
       </p:sp>
       <p:sp>
         <p:nvSpPr>
-          <p:cNvPr id="134" name="Text 132"/>
+          <p:cNvPr id="143" name="Text 141"/>
           <p:cNvSpPr/>
           <p:nvPr/>
         </p:nvSpPr>
@@ -5242,7 +5738,7 @@
       </p:sp>
       <p:sp>
         <p:nvSpPr>
-          <p:cNvPr id="135" name="Shape 133"/>
+          <p:cNvPr id="144" name="Shape 142"/>
           <p:cNvSpPr/>
           <p:nvPr/>
         </p:nvSpPr>
@@ -5267,14 +5763,14 @@
       </p:sp>
       <p:sp>
         <p:nvSpPr>
-          <p:cNvPr id="136" name="Shape 134"/>
-          <p:cNvSpPr/>
-          <p:nvPr/>
-        </p:nvSpPr>
-        <p:spPr>
-          <a:xfrm>
-            <a:off x="5728063" y="6021324"/>
-            <a:ext cx="1528354" cy="192024"/>
+          <p:cNvPr id="145" name="Shape 143"/>
+          <p:cNvSpPr/>
+          <p:nvPr/>
+        </p:nvSpPr>
+        <p:spPr>
+          <a:xfrm>
+            <a:off x="6237514" y="6021324"/>
+            <a:ext cx="764177" cy="192024"/>
           </a:xfrm>
           <a:prstGeom prst="rect">
             <a:avLst/>
@@ -5292,13 +5788,13 @@
       </p:sp>
       <p:sp>
         <p:nvSpPr>
-          <p:cNvPr id="137" name="Shape 135"/>
-          <p:cNvSpPr/>
-          <p:nvPr/>
-        </p:nvSpPr>
-        <p:spPr>
-          <a:xfrm>
-            <a:off x="7174121" y="6035040"/>
+          <p:cNvPr id="146" name="Shape 144"/>
+          <p:cNvSpPr/>
+          <p:nvPr/>
+        </p:nvSpPr>
+        <p:spPr>
+          <a:xfrm>
+            <a:off x="6919395" y="6035040"/>
             <a:ext cx="164592" cy="164592"/>
           </a:xfrm>
           <a:prstGeom prst="ellipse">
@@ -5317,13 +5813,13 @@
       </p:sp>
       <p:sp>
         <p:nvSpPr>
-          <p:cNvPr id="138" name="Text 136"/>
-          <p:cNvSpPr/>
-          <p:nvPr/>
-        </p:nvSpPr>
-        <p:spPr>
-          <a:xfrm>
-            <a:off x="7174121" y="6025896"/>
+          <p:cNvPr id="147" name="Text 145"/>
+          <p:cNvSpPr/>
+          <p:nvPr/>
+        </p:nvSpPr>
+        <p:spPr>
+          <a:xfrm>
+            <a:off x="6919395" y="6025896"/>
             <a:ext cx="164592" cy="164592"/>
           </a:xfrm>
           <a:prstGeom prst="rect">
@@ -5356,13 +5852,66 @@
       </p:sp>
       <p:sp>
         <p:nvSpPr>
-          <p:cNvPr id="139" name="Shape 137"/>
-          <p:cNvSpPr/>
-          <p:nvPr/>
-        </p:nvSpPr>
-        <p:spPr>
-          <a:xfrm>
-            <a:off x="8129762" y="1115568"/>
+          <p:cNvPr id="148" name="Text 146"/>
+          <p:cNvSpPr/>
+          <p:nvPr/>
+        </p:nvSpPr>
+        <p:spPr>
+          <a:xfrm>
+            <a:off x="7111419" y="5888736"/>
+            <a:ext cx="1005840" cy="457200"/>
+          </a:xfrm>
+          <a:prstGeom prst="rect">
+            <a:avLst/>
+          </a:prstGeom>
+          <a:noFill/>
+          <a:ln/>
+        </p:spPr>
+        <p:txBody>
+          <a:bodyPr wrap="square" lIns="0" tIns="0" rIns="0" bIns="0" rtlCol="0" anchor="ctr"/>
+          <a:lstStyle/>
+          <a:p>
+            <a:pPr indent="0" marL="0">
+              <a:buNone/>
+            </a:pPr>
+            <a:r>
+              <a:rPr lang="en-US" sz="750" strike="sngStrike" dirty="0">
+                <a:solidFill>
+                  <a:srgbClr val="9E9E9E"/>
+                </a:solidFill>
+                <a:latin typeface="Arial" pitchFamily="34" charset="0"/>
+                <a:ea typeface="Arial" pitchFamily="34" charset="-122"/>
+                <a:cs typeface="Arial" pitchFamily="34" charset="-120"/>
+              </a:rPr>
+              <a:t>30/06  </a:t>
+            </a:r>
+            <a:pPr indent="0" marL="0">
+              <a:buNone/>
+            </a:pPr>
+            <a:r>
+              <a:rPr lang="en-US" sz="750" dirty="0">
+                <a:solidFill>
+                  <a:srgbClr val="1A1A1A"/>
+                </a:solidFill>
+                <a:latin typeface="Arial" pitchFamily="34" charset="0"/>
+                <a:ea typeface="Arial" pitchFamily="34" charset="-122"/>
+                <a:cs typeface="Arial" pitchFamily="34" charset="-120"/>
+              </a:rPr>
+              <a:t>07/07</a:t>
+            </a:r>
+            <a:endParaRPr lang="en-US" sz="750" dirty="0"/>
+          </a:p>
+        </p:txBody>
+      </p:sp>
+      <p:sp>
+        <p:nvSpPr>
+          <p:cNvPr id="149" name="Shape 147"/>
+          <p:cNvSpPr/>
+          <p:nvPr/>
+        </p:nvSpPr>
+        <p:spPr>
+          <a:xfrm>
+            <a:off x="8202541" y="1115568"/>
             <a:ext cx="0" cy="5230368"/>
           </a:xfrm>
           <a:prstGeom prst="line">
@@ -5379,13 +5928,13 @@
       </p:sp>
       <p:sp>
         <p:nvSpPr>
-          <p:cNvPr id="140" name="Shape 138"/>
-          <p:cNvSpPr/>
-          <p:nvPr/>
-        </p:nvSpPr>
-        <p:spPr>
-          <a:xfrm>
-            <a:off x="8093186" y="6309360"/>
+          <p:cNvPr id="150" name="Shape 148"/>
+          <p:cNvSpPr/>
+          <p:nvPr/>
+        </p:nvSpPr>
+        <p:spPr>
+          <a:xfrm>
+            <a:off x="8165965" y="6309360"/>
             <a:ext cx="73152" cy="73152"/>
           </a:xfrm>
           <a:prstGeom prst="ellipse">
@@ -5404,7 +5953,7 @@
       </p:sp>
       <p:sp>
         <p:nvSpPr>
-          <p:cNvPr id="141" name="Shape 139"/>
+          <p:cNvPr id="151" name="Shape 149"/>
           <p:cNvSpPr/>
           <p:nvPr/>
         </p:nvSpPr>
@@ -5605,7 +6154,7 @@
                 <a:ea typeface="Arial" pitchFamily="34" charset="-122"/>
                 <a:cs typeface="Arial" pitchFamily="34" charset="-120"/>
               </a:rPr>
-              <a:t>Roadmap de Projetos e Melhorias Funil de Vendas - Livre (2/3)</a:t>
+              <a:t>Roadmap de Projetos e Melhorias Funil de Vendas - Livre (2/4)</a:t>
             </a:r>
             <a:endParaRPr lang="en-US" sz="1500" dirty="0"/>
           </a:p>
@@ -5644,7 +6193,7 @@
                 <a:ea typeface="Arial" pitchFamily="34" charset="-122"/>
                 <a:cs typeface="Arial" pitchFamily="34" charset="-120"/>
               </a:rPr>
-              <a:t>Atualizado em 11/08</a:t>
+              <a:t>Atualizado em 13/08</a:t>
             </a:r>
             <a:endParaRPr lang="en-US" sz="1000" dirty="0"/>
           </a:p>
@@ -5658,7 +6207,7 @@
         </p:nvSpPr>
         <p:spPr>
           <a:xfrm>
-            <a:off x="320040" y="548640"/>
+            <a:off x="320040" y="530352"/>
             <a:ext cx="1188720" cy="201168"/>
           </a:xfrm>
           <a:prstGeom prst="rect">
@@ -5697,7 +6246,7 @@
         </p:nvSpPr>
         <p:spPr>
           <a:xfrm>
-            <a:off x="320040" y="777240"/>
+            <a:off x="320040" y="676656"/>
             <a:ext cx="137160" cy="137160"/>
           </a:xfrm>
           <a:prstGeom prst="ellipse">
@@ -5722,7 +6271,7 @@
         </p:nvSpPr>
         <p:spPr>
           <a:xfrm>
-            <a:off x="475488" y="749808"/>
+            <a:off x="475488" y="649224"/>
             <a:ext cx="858073" cy="201168"/>
           </a:xfrm>
           <a:prstGeom prst="rect">
@@ -5761,7 +6310,7 @@
         </p:nvSpPr>
         <p:spPr>
           <a:xfrm>
-            <a:off x="1443289" y="777240"/>
+            <a:off x="1443289" y="676656"/>
             <a:ext cx="137160" cy="137160"/>
           </a:xfrm>
           <a:prstGeom prst="ellipse">
@@ -5786,7 +6335,7 @@
         </p:nvSpPr>
         <p:spPr>
           <a:xfrm>
-            <a:off x="1598737" y="749808"/>
+            <a:off x="1598737" y="649224"/>
             <a:ext cx="572049" cy="201168"/>
           </a:xfrm>
           <a:prstGeom prst="rect">
@@ -5825,7 +6374,7 @@
         </p:nvSpPr>
         <p:spPr>
           <a:xfrm>
-            <a:off x="2280514" y="777240"/>
+            <a:off x="2280514" y="676656"/>
             <a:ext cx="137160" cy="137160"/>
           </a:xfrm>
           <a:prstGeom prst="ellipse">
@@ -5850,7 +6399,7 @@
         </p:nvSpPr>
         <p:spPr>
           <a:xfrm>
-            <a:off x="2435962" y="749808"/>
+            <a:off x="2435962" y="649224"/>
             <a:ext cx="1072591" cy="201168"/>
           </a:xfrm>
           <a:prstGeom prst="rect">
@@ -5889,7 +6438,7 @@
         </p:nvSpPr>
         <p:spPr>
           <a:xfrm>
-            <a:off x="3618281" y="777240"/>
+            <a:off x="3618281" y="676656"/>
             <a:ext cx="137160" cy="137160"/>
           </a:xfrm>
           <a:prstGeom prst="ellipse">
@@ -5914,7 +6463,7 @@
         </p:nvSpPr>
         <p:spPr>
           <a:xfrm>
-            <a:off x="3773729" y="749808"/>
+            <a:off x="3773729" y="649224"/>
             <a:ext cx="429036" cy="201168"/>
           </a:xfrm>
           <a:prstGeom prst="rect">
@@ -5953,7 +6502,7 @@
         </p:nvSpPr>
         <p:spPr>
           <a:xfrm>
-            <a:off x="4312493" y="777240"/>
+            <a:off x="4312493" y="676656"/>
             <a:ext cx="137160" cy="137160"/>
           </a:xfrm>
           <a:prstGeom prst="ellipse">
@@ -5978,7 +6527,7 @@
         </p:nvSpPr>
         <p:spPr>
           <a:xfrm>
-            <a:off x="4467941" y="749808"/>
+            <a:off x="4467941" y="649224"/>
             <a:ext cx="500543" cy="201168"/>
           </a:xfrm>
           <a:prstGeom prst="rect">
@@ -6017,7 +6566,7 @@
         </p:nvSpPr>
         <p:spPr>
           <a:xfrm>
-            <a:off x="5215372" y="548640"/>
+            <a:off x="5215372" y="530352"/>
             <a:ext cx="1417320" cy="201168"/>
           </a:xfrm>
           <a:prstGeom prst="rect">
@@ -6056,7 +6605,7 @@
         </p:nvSpPr>
         <p:spPr>
           <a:xfrm rot="5400000">
-            <a:off x="5215372" y="768096"/>
+            <a:off x="5215372" y="667512"/>
             <a:ext cx="137160" cy="137160"/>
           </a:xfrm>
           <a:prstGeom prst="triangle">
@@ -6081,7 +6630,7 @@
         </p:nvSpPr>
         <p:spPr>
           <a:xfrm>
-            <a:off x="5379964" y="749808"/>
+            <a:off x="5379964" y="649224"/>
             <a:ext cx="429036" cy="201168"/>
           </a:xfrm>
           <a:prstGeom prst="rect">
@@ -6120,7 +6669,7 @@
         </p:nvSpPr>
         <p:spPr>
           <a:xfrm>
-            <a:off x="5918728" y="768096"/>
+            <a:off x="5918728" y="667512"/>
             <a:ext cx="155448" cy="155448"/>
           </a:xfrm>
           <a:prstGeom prst="ellipse">
@@ -6145,7 +6694,7 @@
         </p:nvSpPr>
         <p:spPr>
           <a:xfrm>
-            <a:off x="5918728" y="754380"/>
+            <a:off x="5918728" y="653796"/>
             <a:ext cx="155448" cy="155448"/>
           </a:xfrm>
           <a:prstGeom prst="rect">
@@ -6184,7 +6733,7 @@
         </p:nvSpPr>
         <p:spPr>
           <a:xfrm>
-            <a:off x="6092464" y="731520"/>
+            <a:off x="6092464" y="630936"/>
             <a:ext cx="572049" cy="274320"/>
           </a:xfrm>
           <a:prstGeom prst="rect">
@@ -6223,7 +6772,7 @@
         </p:nvSpPr>
         <p:spPr>
           <a:xfrm>
-            <a:off x="6774241" y="768096"/>
+            <a:off x="6774241" y="667512"/>
             <a:ext cx="155448" cy="155448"/>
           </a:xfrm>
           <a:prstGeom prst="ellipse">
@@ -6248,7 +6797,7 @@
         </p:nvSpPr>
         <p:spPr>
           <a:xfrm>
-            <a:off x="6774241" y="754380"/>
+            <a:off x="6774241" y="653796"/>
             <a:ext cx="155448" cy="155448"/>
           </a:xfrm>
           <a:prstGeom prst="rect">
@@ -6287,7 +6836,7 @@
         </p:nvSpPr>
         <p:spPr>
           <a:xfrm>
-            <a:off x="6947977" y="731520"/>
+            <a:off x="6947977" y="630936"/>
             <a:ext cx="1287109" cy="274320"/>
           </a:xfrm>
           <a:prstGeom prst="rect">
@@ -6326,7 +6875,7 @@
         </p:nvSpPr>
         <p:spPr>
           <a:xfrm>
-            <a:off x="8344814" y="768096"/>
+            <a:off x="8344814" y="667512"/>
             <a:ext cx="155448" cy="155448"/>
           </a:xfrm>
           <a:prstGeom prst="ellipse">
@@ -6351,7 +6900,7 @@
         </p:nvSpPr>
         <p:spPr>
           <a:xfrm>
-            <a:off x="8344814" y="754380"/>
+            <a:off x="8344814" y="653796"/>
             <a:ext cx="155448" cy="155448"/>
           </a:xfrm>
           <a:prstGeom prst="rect">
@@ -6390,7 +6939,7 @@
         </p:nvSpPr>
         <p:spPr>
           <a:xfrm>
-            <a:off x="8518550" y="731520"/>
+            <a:off x="8518550" y="630936"/>
             <a:ext cx="1430122" cy="274320"/>
           </a:xfrm>
           <a:prstGeom prst="rect">
@@ -8056,8 +8605,8 @@
         </p:nvSpPr>
         <p:spPr>
           <a:xfrm>
-            <a:off x="5728063" y="1906524"/>
-            <a:ext cx="1528354" cy="192024"/>
+            <a:off x="6237514" y="1906524"/>
+            <a:ext cx="764177" cy="192024"/>
           </a:xfrm>
           <a:prstGeom prst="rect">
             <a:avLst/>
@@ -8081,7 +8630,7 @@
         </p:nvSpPr>
         <p:spPr>
           <a:xfrm>
-            <a:off x="7174121" y="1920240"/>
+            <a:off x="6919395" y="1920240"/>
             <a:ext cx="164592" cy="164592"/>
           </a:xfrm>
           <a:prstGeom prst="ellipse">
@@ -8106,7 +8655,7 @@
         </p:nvSpPr>
         <p:spPr>
           <a:xfrm>
-            <a:off x="7174121" y="1911096"/>
+            <a:off x="6919395" y="1911096"/>
             <a:ext cx="164592" cy="164592"/>
           </a:xfrm>
           <a:prstGeom prst="rect">
@@ -8139,7 +8688,60 @@
       </p:sp>
       <p:sp>
         <p:nvSpPr>
-          <p:cNvPr id="85" name="Shape 83"/>
+          <p:cNvPr id="85" name="Text 83"/>
+          <p:cNvSpPr/>
+          <p:nvPr/>
+        </p:nvSpPr>
+        <p:spPr>
+          <a:xfrm>
+            <a:off x="7111419" y="1773936"/>
+            <a:ext cx="1005840" cy="457200"/>
+          </a:xfrm>
+          <a:prstGeom prst="rect">
+            <a:avLst/>
+          </a:prstGeom>
+          <a:noFill/>
+          <a:ln/>
+        </p:spPr>
+        <p:txBody>
+          <a:bodyPr wrap="square" lIns="0" tIns="0" rIns="0" bIns="0" rtlCol="0" anchor="ctr"/>
+          <a:lstStyle/>
+          <a:p>
+            <a:pPr indent="0" marL="0">
+              <a:buNone/>
+            </a:pPr>
+            <a:r>
+              <a:rPr lang="en-US" sz="750" strike="sngStrike" dirty="0">
+                <a:solidFill>
+                  <a:srgbClr val="9E9E9E"/>
+                </a:solidFill>
+                <a:latin typeface="Arial" pitchFamily="34" charset="0"/>
+                <a:ea typeface="Arial" pitchFamily="34" charset="-122"/>
+                <a:cs typeface="Arial" pitchFamily="34" charset="-120"/>
+              </a:rPr>
+              <a:t>30/06  </a:t>
+            </a:r>
+            <a:pPr indent="0" marL="0">
+              <a:buNone/>
+            </a:pPr>
+            <a:r>
+              <a:rPr lang="en-US" sz="750" dirty="0">
+                <a:solidFill>
+                  <a:srgbClr val="1A1A1A"/>
+                </a:solidFill>
+                <a:latin typeface="Arial" pitchFamily="34" charset="0"/>
+                <a:ea typeface="Arial" pitchFamily="34" charset="-122"/>
+                <a:cs typeface="Arial" pitchFamily="34" charset="-120"/>
+              </a:rPr>
+              <a:t>07/07</a:t>
+            </a:r>
+            <a:endParaRPr lang="en-US" sz="750" dirty="0"/>
+          </a:p>
+        </p:txBody>
+      </p:sp>
+      <p:sp>
+        <p:nvSpPr>
+          <p:cNvPr id="86" name="Shape 84"/>
           <p:cNvSpPr/>
           <p:nvPr/>
         </p:nvSpPr>
@@ -8164,7 +8766,7 @@
       </p:sp>
       <p:sp>
         <p:nvSpPr>
-          <p:cNvPr id="86" name="Text 84"/>
+          <p:cNvPr id="87" name="Text 85"/>
           <p:cNvSpPr/>
           <p:nvPr/>
         </p:nvSpPr>
@@ -8205,7 +8807,7 @@
       </p:sp>
       <p:sp>
         <p:nvSpPr>
-          <p:cNvPr id="87" name="Shape 85"/>
+          <p:cNvPr id="88" name="Shape 86"/>
           <p:cNvSpPr/>
           <p:nvPr/>
         </p:nvSpPr>
@@ -8230,14 +8832,14 @@
       </p:sp>
       <p:sp>
         <p:nvSpPr>
-          <p:cNvPr id="88" name="Shape 86"/>
-          <p:cNvSpPr/>
-          <p:nvPr/>
-        </p:nvSpPr>
-        <p:spPr>
-          <a:xfrm>
-            <a:off x="5728063" y="2363724"/>
-            <a:ext cx="1528354" cy="192024"/>
+          <p:cNvPr id="89" name="Shape 87"/>
+          <p:cNvSpPr/>
+          <p:nvPr/>
+        </p:nvSpPr>
+        <p:spPr>
+          <a:xfrm>
+            <a:off x="6237514" y="2363724"/>
+            <a:ext cx="764177" cy="192024"/>
           </a:xfrm>
           <a:prstGeom prst="rect">
             <a:avLst/>
@@ -8255,13 +8857,13 @@
       </p:sp>
       <p:sp>
         <p:nvSpPr>
-          <p:cNvPr id="89" name="Shape 87"/>
-          <p:cNvSpPr/>
-          <p:nvPr/>
-        </p:nvSpPr>
-        <p:spPr>
-          <a:xfrm>
-            <a:off x="7174121" y="2377440"/>
+          <p:cNvPr id="90" name="Shape 88"/>
+          <p:cNvSpPr/>
+          <p:nvPr/>
+        </p:nvSpPr>
+        <p:spPr>
+          <a:xfrm>
+            <a:off x="6919395" y="2377440"/>
             <a:ext cx="164592" cy="164592"/>
           </a:xfrm>
           <a:prstGeom prst="ellipse">
@@ -8280,13 +8882,13 @@
       </p:sp>
       <p:sp>
         <p:nvSpPr>
-          <p:cNvPr id="90" name="Text 88"/>
-          <p:cNvSpPr/>
-          <p:nvPr/>
-        </p:nvSpPr>
-        <p:spPr>
-          <a:xfrm>
-            <a:off x="7174121" y="2368296"/>
+          <p:cNvPr id="91" name="Text 89"/>
+          <p:cNvSpPr/>
+          <p:nvPr/>
+        </p:nvSpPr>
+        <p:spPr>
+          <a:xfrm>
+            <a:off x="6919395" y="2368296"/>
             <a:ext cx="164592" cy="164592"/>
           </a:xfrm>
           <a:prstGeom prst="rect">
@@ -8319,7 +8921,60 @@
       </p:sp>
       <p:sp>
         <p:nvSpPr>
-          <p:cNvPr id="91" name="Shape 89"/>
+          <p:cNvPr id="92" name="Text 90"/>
+          <p:cNvSpPr/>
+          <p:nvPr/>
+        </p:nvSpPr>
+        <p:spPr>
+          <a:xfrm>
+            <a:off x="7111419" y="2231136"/>
+            <a:ext cx="1005840" cy="457200"/>
+          </a:xfrm>
+          <a:prstGeom prst="rect">
+            <a:avLst/>
+          </a:prstGeom>
+          <a:noFill/>
+          <a:ln/>
+        </p:spPr>
+        <p:txBody>
+          <a:bodyPr wrap="square" lIns="0" tIns="0" rIns="0" bIns="0" rtlCol="0" anchor="ctr"/>
+          <a:lstStyle/>
+          <a:p>
+            <a:pPr indent="0" marL="0">
+              <a:buNone/>
+            </a:pPr>
+            <a:r>
+              <a:rPr lang="en-US" sz="750" strike="sngStrike" dirty="0">
+                <a:solidFill>
+                  <a:srgbClr val="9E9E9E"/>
+                </a:solidFill>
+                <a:latin typeface="Arial" pitchFamily="34" charset="0"/>
+                <a:ea typeface="Arial" pitchFamily="34" charset="-122"/>
+                <a:cs typeface="Arial" pitchFamily="34" charset="-120"/>
+              </a:rPr>
+              <a:t>30/06  </a:t>
+            </a:r>
+            <a:pPr indent="0" marL="0">
+              <a:buNone/>
+            </a:pPr>
+            <a:r>
+              <a:rPr lang="en-US" sz="750" dirty="0">
+                <a:solidFill>
+                  <a:srgbClr val="1A1A1A"/>
+                </a:solidFill>
+                <a:latin typeface="Arial" pitchFamily="34" charset="0"/>
+                <a:ea typeface="Arial" pitchFamily="34" charset="-122"/>
+                <a:cs typeface="Arial" pitchFamily="34" charset="-120"/>
+              </a:rPr>
+              <a:t>07/07</a:t>
+            </a:r>
+            <a:endParaRPr lang="en-US" sz="750" dirty="0"/>
+          </a:p>
+        </p:txBody>
+      </p:sp>
+      <p:sp>
+        <p:nvSpPr>
+          <p:cNvPr id="93" name="Shape 91"/>
           <p:cNvSpPr/>
           <p:nvPr/>
         </p:nvSpPr>
@@ -8344,7 +8999,7 @@
       </p:sp>
       <p:sp>
         <p:nvSpPr>
-          <p:cNvPr id="92" name="Text 90"/>
+          <p:cNvPr id="94" name="Text 92"/>
           <p:cNvSpPr/>
           <p:nvPr/>
         </p:nvSpPr>
@@ -8385,7 +9040,7 @@
       </p:sp>
       <p:sp>
         <p:nvSpPr>
-          <p:cNvPr id="93" name="Shape 91"/>
+          <p:cNvPr id="95" name="Shape 93"/>
           <p:cNvSpPr/>
           <p:nvPr/>
         </p:nvSpPr>
@@ -8410,14 +9065,14 @@
       </p:sp>
       <p:sp>
         <p:nvSpPr>
-          <p:cNvPr id="94" name="Shape 92"/>
-          <p:cNvSpPr/>
-          <p:nvPr/>
-        </p:nvSpPr>
-        <p:spPr>
-          <a:xfrm>
-            <a:off x="5728063" y="2820924"/>
-            <a:ext cx="1528354" cy="192024"/>
+          <p:cNvPr id="96" name="Shape 94"/>
+          <p:cNvSpPr/>
+          <p:nvPr/>
+        </p:nvSpPr>
+        <p:spPr>
+          <a:xfrm>
+            <a:off x="6237514" y="2820924"/>
+            <a:ext cx="764177" cy="192024"/>
           </a:xfrm>
           <a:prstGeom prst="rect">
             <a:avLst/>
@@ -8435,13 +9090,13 @@
       </p:sp>
       <p:sp>
         <p:nvSpPr>
-          <p:cNvPr id="95" name="Shape 93"/>
-          <p:cNvSpPr/>
-          <p:nvPr/>
-        </p:nvSpPr>
-        <p:spPr>
-          <a:xfrm>
-            <a:off x="7174121" y="2834640"/>
+          <p:cNvPr id="97" name="Shape 95"/>
+          <p:cNvSpPr/>
+          <p:nvPr/>
+        </p:nvSpPr>
+        <p:spPr>
+          <a:xfrm>
+            <a:off x="6919395" y="2834640"/>
             <a:ext cx="164592" cy="164592"/>
           </a:xfrm>
           <a:prstGeom prst="ellipse">
@@ -8460,13 +9115,13 @@
       </p:sp>
       <p:sp>
         <p:nvSpPr>
-          <p:cNvPr id="96" name="Text 94"/>
-          <p:cNvSpPr/>
-          <p:nvPr/>
-        </p:nvSpPr>
-        <p:spPr>
-          <a:xfrm>
-            <a:off x="7174121" y="2825496"/>
+          <p:cNvPr id="98" name="Text 96"/>
+          <p:cNvSpPr/>
+          <p:nvPr/>
+        </p:nvSpPr>
+        <p:spPr>
+          <a:xfrm>
+            <a:off x="6919395" y="2825496"/>
             <a:ext cx="164592" cy="164592"/>
           </a:xfrm>
           <a:prstGeom prst="rect">
@@ -8499,7 +9154,60 @@
       </p:sp>
       <p:sp>
         <p:nvSpPr>
-          <p:cNvPr id="97" name="Shape 95"/>
+          <p:cNvPr id="99" name="Text 97"/>
+          <p:cNvSpPr/>
+          <p:nvPr/>
+        </p:nvSpPr>
+        <p:spPr>
+          <a:xfrm>
+            <a:off x="7111419" y="2688336"/>
+            <a:ext cx="1005840" cy="457200"/>
+          </a:xfrm>
+          <a:prstGeom prst="rect">
+            <a:avLst/>
+          </a:prstGeom>
+          <a:noFill/>
+          <a:ln/>
+        </p:spPr>
+        <p:txBody>
+          <a:bodyPr wrap="square" lIns="0" tIns="0" rIns="0" bIns="0" rtlCol="0" anchor="ctr"/>
+          <a:lstStyle/>
+          <a:p>
+            <a:pPr indent="0" marL="0">
+              <a:buNone/>
+            </a:pPr>
+            <a:r>
+              <a:rPr lang="en-US" sz="750" strike="sngStrike" dirty="0">
+                <a:solidFill>
+                  <a:srgbClr val="9E9E9E"/>
+                </a:solidFill>
+                <a:latin typeface="Arial" pitchFamily="34" charset="0"/>
+                <a:ea typeface="Arial" pitchFamily="34" charset="-122"/>
+                <a:cs typeface="Arial" pitchFamily="34" charset="-120"/>
+              </a:rPr>
+              <a:t>30/06  </a:t>
+            </a:r>
+            <a:pPr indent="0" marL="0">
+              <a:buNone/>
+            </a:pPr>
+            <a:r>
+              <a:rPr lang="en-US" sz="750" dirty="0">
+                <a:solidFill>
+                  <a:srgbClr val="1A1A1A"/>
+                </a:solidFill>
+                <a:latin typeface="Arial" pitchFamily="34" charset="0"/>
+                <a:ea typeface="Arial" pitchFamily="34" charset="-122"/>
+                <a:cs typeface="Arial" pitchFamily="34" charset="-120"/>
+              </a:rPr>
+              <a:t>07/07</a:t>
+            </a:r>
+            <a:endParaRPr lang="en-US" sz="750" dirty="0"/>
+          </a:p>
+        </p:txBody>
+      </p:sp>
+      <p:sp>
+        <p:nvSpPr>
+          <p:cNvPr id="100" name="Shape 98"/>
           <p:cNvSpPr/>
           <p:nvPr/>
         </p:nvSpPr>
@@ -8524,7 +9232,7 @@
       </p:sp>
       <p:sp>
         <p:nvSpPr>
-          <p:cNvPr id="98" name="Text 96"/>
+          <p:cNvPr id="101" name="Text 99"/>
           <p:cNvSpPr/>
           <p:nvPr/>
         </p:nvSpPr>
@@ -8565,7 +9273,7 @@
       </p:sp>
       <p:sp>
         <p:nvSpPr>
-          <p:cNvPr id="99" name="Shape 97"/>
+          <p:cNvPr id="102" name="Shape 100"/>
           <p:cNvSpPr/>
           <p:nvPr/>
         </p:nvSpPr>
@@ -8590,14 +9298,14 @@
       </p:sp>
       <p:sp>
         <p:nvSpPr>
-          <p:cNvPr id="100" name="Shape 98"/>
-          <p:cNvSpPr/>
-          <p:nvPr/>
-        </p:nvSpPr>
-        <p:spPr>
-          <a:xfrm>
-            <a:off x="5728063" y="3278124"/>
-            <a:ext cx="1528354" cy="192024"/>
+          <p:cNvPr id="103" name="Shape 101"/>
+          <p:cNvSpPr/>
+          <p:nvPr/>
+        </p:nvSpPr>
+        <p:spPr>
+          <a:xfrm>
+            <a:off x="6237514" y="3278124"/>
+            <a:ext cx="800567" cy="192024"/>
           </a:xfrm>
           <a:prstGeom prst="rect">
             <a:avLst/>
@@ -8615,13 +9323,13 @@
       </p:sp>
       <p:sp>
         <p:nvSpPr>
-          <p:cNvPr id="101" name="Shape 99"/>
-          <p:cNvSpPr/>
-          <p:nvPr/>
-        </p:nvSpPr>
-        <p:spPr>
-          <a:xfrm>
-            <a:off x="7174121" y="3291840"/>
+          <p:cNvPr id="104" name="Shape 102"/>
+          <p:cNvSpPr/>
+          <p:nvPr/>
+        </p:nvSpPr>
+        <p:spPr>
+          <a:xfrm>
+            <a:off x="6955785" y="3291840"/>
             <a:ext cx="164592" cy="164592"/>
           </a:xfrm>
           <a:prstGeom prst="ellipse">
@@ -8640,13 +9348,13 @@
       </p:sp>
       <p:sp>
         <p:nvSpPr>
-          <p:cNvPr id="102" name="Text 100"/>
-          <p:cNvSpPr/>
-          <p:nvPr/>
-        </p:nvSpPr>
-        <p:spPr>
-          <a:xfrm>
-            <a:off x="7174121" y="3282696"/>
+          <p:cNvPr id="105" name="Text 103"/>
+          <p:cNvSpPr/>
+          <p:nvPr/>
+        </p:nvSpPr>
+        <p:spPr>
+          <a:xfrm>
+            <a:off x="6955785" y="3282696"/>
             <a:ext cx="164592" cy="164592"/>
           </a:xfrm>
           <a:prstGeom prst="rect">
@@ -8679,7 +9387,60 @@
       </p:sp>
       <p:sp>
         <p:nvSpPr>
-          <p:cNvPr id="103" name="Shape 101"/>
+          <p:cNvPr id="106" name="Text 104"/>
+          <p:cNvSpPr/>
+          <p:nvPr/>
+        </p:nvSpPr>
+        <p:spPr>
+          <a:xfrm>
+            <a:off x="7147809" y="3145536"/>
+            <a:ext cx="1005840" cy="457200"/>
+          </a:xfrm>
+          <a:prstGeom prst="rect">
+            <a:avLst/>
+          </a:prstGeom>
+          <a:noFill/>
+          <a:ln/>
+        </p:spPr>
+        <p:txBody>
+          <a:bodyPr wrap="square" lIns="0" tIns="0" rIns="0" bIns="0" rtlCol="0" anchor="ctr"/>
+          <a:lstStyle/>
+          <a:p>
+            <a:pPr indent="0" marL="0">
+              <a:buNone/>
+            </a:pPr>
+            <a:r>
+              <a:rPr lang="en-US" sz="750" strike="sngStrike" dirty="0">
+                <a:solidFill>
+                  <a:srgbClr val="9E9E9E"/>
+                </a:solidFill>
+                <a:latin typeface="Arial" pitchFamily="34" charset="0"/>
+                <a:ea typeface="Arial" pitchFamily="34" charset="-122"/>
+                <a:cs typeface="Arial" pitchFamily="34" charset="-120"/>
+              </a:rPr>
+              <a:t>30/06  </a:t>
+            </a:r>
+            <a:pPr indent="0" marL="0">
+              <a:buNone/>
+            </a:pPr>
+            <a:r>
+              <a:rPr lang="en-US" sz="750" dirty="0">
+                <a:solidFill>
+                  <a:srgbClr val="1A1A1A"/>
+                </a:solidFill>
+                <a:latin typeface="Arial" pitchFamily="34" charset="0"/>
+                <a:ea typeface="Arial" pitchFamily="34" charset="-122"/>
+                <a:cs typeface="Arial" pitchFamily="34" charset="-120"/>
+              </a:rPr>
+              <a:t>09/07</a:t>
+            </a:r>
+            <a:endParaRPr lang="en-US" sz="750" dirty="0"/>
+          </a:p>
+        </p:txBody>
+      </p:sp>
+      <p:sp>
+        <p:nvSpPr>
+          <p:cNvPr id="107" name="Shape 105"/>
           <p:cNvSpPr/>
           <p:nvPr/>
         </p:nvSpPr>
@@ -8704,7 +9465,7 @@
       </p:sp>
       <p:sp>
         <p:nvSpPr>
-          <p:cNvPr id="104" name="Text 102"/>
+          <p:cNvPr id="108" name="Text 106"/>
           <p:cNvSpPr/>
           <p:nvPr/>
         </p:nvSpPr>
@@ -8745,7 +9506,7 @@
       </p:sp>
       <p:sp>
         <p:nvSpPr>
-          <p:cNvPr id="105" name="Shape 103"/>
+          <p:cNvPr id="109" name="Shape 107"/>
           <p:cNvSpPr/>
           <p:nvPr/>
         </p:nvSpPr>
@@ -8770,14 +9531,14 @@
       </p:sp>
       <p:sp>
         <p:nvSpPr>
-          <p:cNvPr id="106" name="Shape 104"/>
-          <p:cNvSpPr/>
-          <p:nvPr/>
-        </p:nvSpPr>
-        <p:spPr>
-          <a:xfrm>
-            <a:off x="6237514" y="3735324"/>
-            <a:ext cx="1018903" cy="192024"/>
+          <p:cNvPr id="110" name="Shape 108"/>
+          <p:cNvSpPr/>
+          <p:nvPr/>
+        </p:nvSpPr>
+        <p:spPr>
+          <a:xfrm>
+            <a:off x="6710576" y="3735324"/>
+            <a:ext cx="545841" cy="192024"/>
           </a:xfrm>
           <a:prstGeom prst="rect">
             <a:avLst/>
@@ -8795,7 +9556,7 @@
       </p:sp>
       <p:sp>
         <p:nvSpPr>
-          <p:cNvPr id="107" name="Shape 105"/>
+          <p:cNvPr id="111" name="Shape 109"/>
           <p:cNvSpPr/>
           <p:nvPr/>
         </p:nvSpPr>
@@ -8808,7 +9569,7 @@
             <a:avLst/>
           </a:prstGeom>
           <a:solidFill>
-            <a:srgbClr val="E67E22"/>
+            <a:srgbClr val="4CAF50"/>
           </a:solidFill>
           <a:ln w="9525">
             <a:solidFill>
@@ -8820,7 +9581,7 @@
       </p:sp>
       <p:sp>
         <p:nvSpPr>
-          <p:cNvPr id="108" name="Text 106"/>
+          <p:cNvPr id="112" name="Text 110"/>
           <p:cNvSpPr/>
           <p:nvPr/>
         </p:nvSpPr>
@@ -8859,7 +9620,46 @@
       </p:sp>
       <p:sp>
         <p:nvSpPr>
-          <p:cNvPr id="109" name="Shape 107"/>
+          <p:cNvPr id="113" name="Text 111"/>
+          <p:cNvSpPr/>
+          <p:nvPr/>
+        </p:nvSpPr>
+        <p:spPr>
+          <a:xfrm>
+            <a:off x="7366145" y="3602736"/>
+            <a:ext cx="1005840" cy="457200"/>
+          </a:xfrm>
+          <a:prstGeom prst="rect">
+            <a:avLst/>
+          </a:prstGeom>
+          <a:noFill/>
+          <a:ln/>
+        </p:spPr>
+        <p:txBody>
+          <a:bodyPr wrap="square" lIns="0" tIns="0" rIns="0" bIns="0" rtlCol="0" anchor="ctr"/>
+          <a:lstStyle/>
+          <a:p>
+            <a:pPr indent="0" marL="0">
+              <a:buNone/>
+            </a:pPr>
+            <a:r>
+              <a:rPr lang="en-US" sz="750" dirty="0">
+                <a:solidFill>
+                  <a:srgbClr val="1A1A1A"/>
+                </a:solidFill>
+                <a:latin typeface="Arial" pitchFamily="34" charset="0"/>
+                <a:ea typeface="Arial" pitchFamily="34" charset="-122"/>
+                <a:cs typeface="Arial" pitchFamily="34" charset="-120"/>
+              </a:rPr>
+              <a:t>14/07</a:t>
+            </a:r>
+            <a:endParaRPr lang="en-US" sz="750" dirty="0"/>
+          </a:p>
+        </p:txBody>
+      </p:sp>
+      <p:sp>
+        <p:nvSpPr>
+          <p:cNvPr id="114" name="Shape 112"/>
           <p:cNvSpPr/>
           <p:nvPr/>
         </p:nvSpPr>
@@ -8884,7 +9684,7 @@
       </p:sp>
       <p:sp>
         <p:nvSpPr>
-          <p:cNvPr id="110" name="Text 108"/>
+          <p:cNvPr id="115" name="Text 113"/>
           <p:cNvSpPr/>
           <p:nvPr/>
         </p:nvSpPr>
@@ -8925,7 +9725,7 @@
       </p:sp>
       <p:sp>
         <p:nvSpPr>
-          <p:cNvPr id="111" name="Shape 109"/>
+          <p:cNvPr id="116" name="Shape 114"/>
           <p:cNvSpPr/>
           <p:nvPr/>
         </p:nvSpPr>
@@ -8950,14 +9750,14 @@
       </p:sp>
       <p:sp>
         <p:nvSpPr>
-          <p:cNvPr id="112" name="Shape 110"/>
-          <p:cNvSpPr/>
-          <p:nvPr/>
-        </p:nvSpPr>
-        <p:spPr>
-          <a:xfrm>
-            <a:off x="6237514" y="4192524"/>
-            <a:ext cx="1018903" cy="192024"/>
+          <p:cNvPr id="117" name="Shape 115"/>
+          <p:cNvSpPr/>
+          <p:nvPr/>
+        </p:nvSpPr>
+        <p:spPr>
+          <a:xfrm>
+            <a:off x="6710576" y="4192524"/>
+            <a:ext cx="545841" cy="192024"/>
           </a:xfrm>
           <a:prstGeom prst="rect">
             <a:avLst/>
@@ -8975,7 +9775,7 @@
       </p:sp>
       <p:sp>
         <p:nvSpPr>
-          <p:cNvPr id="113" name="Shape 111"/>
+          <p:cNvPr id="118" name="Shape 116"/>
           <p:cNvSpPr/>
           <p:nvPr/>
         </p:nvSpPr>
@@ -8988,7 +9788,7 @@
             <a:avLst/>
           </a:prstGeom>
           <a:solidFill>
-            <a:srgbClr val="E67E22"/>
+            <a:srgbClr val="4CAF50"/>
           </a:solidFill>
           <a:ln w="9525">
             <a:solidFill>
@@ -9000,7 +9800,7 @@
       </p:sp>
       <p:sp>
         <p:nvSpPr>
-          <p:cNvPr id="114" name="Text 112"/>
+          <p:cNvPr id="119" name="Text 117"/>
           <p:cNvSpPr/>
           <p:nvPr/>
         </p:nvSpPr>
@@ -9039,7 +9839,46 @@
       </p:sp>
       <p:sp>
         <p:nvSpPr>
-          <p:cNvPr id="115" name="Shape 113"/>
+          <p:cNvPr id="120" name="Text 118"/>
+          <p:cNvSpPr/>
+          <p:nvPr/>
+        </p:nvSpPr>
+        <p:spPr>
+          <a:xfrm>
+            <a:off x="7366145" y="4059936"/>
+            <a:ext cx="1005840" cy="457200"/>
+          </a:xfrm>
+          <a:prstGeom prst="rect">
+            <a:avLst/>
+          </a:prstGeom>
+          <a:noFill/>
+          <a:ln/>
+        </p:spPr>
+        <p:txBody>
+          <a:bodyPr wrap="square" lIns="0" tIns="0" rIns="0" bIns="0" rtlCol="0" anchor="ctr"/>
+          <a:lstStyle/>
+          <a:p>
+            <a:pPr indent="0" marL="0">
+              <a:buNone/>
+            </a:pPr>
+            <a:r>
+              <a:rPr lang="en-US" sz="750" dirty="0">
+                <a:solidFill>
+                  <a:srgbClr val="1A1A1A"/>
+                </a:solidFill>
+                <a:latin typeface="Arial" pitchFamily="34" charset="0"/>
+                <a:ea typeface="Arial" pitchFamily="34" charset="-122"/>
+                <a:cs typeface="Arial" pitchFamily="34" charset="-120"/>
+              </a:rPr>
+              <a:t>14/07</a:t>
+            </a:r>
+            <a:endParaRPr lang="en-US" sz="750" dirty="0"/>
+          </a:p>
+        </p:txBody>
+      </p:sp>
+      <p:sp>
+        <p:nvSpPr>
+          <p:cNvPr id="121" name="Shape 119"/>
           <p:cNvSpPr/>
           <p:nvPr/>
         </p:nvSpPr>
@@ -9064,7 +9903,7 @@
       </p:sp>
       <p:sp>
         <p:nvSpPr>
-          <p:cNvPr id="116" name="Text 114"/>
+          <p:cNvPr id="122" name="Text 120"/>
           <p:cNvSpPr/>
           <p:nvPr/>
         </p:nvSpPr>
@@ -9105,7 +9944,7 @@
       </p:sp>
       <p:sp>
         <p:nvSpPr>
-          <p:cNvPr id="117" name="Shape 115"/>
+          <p:cNvPr id="123" name="Shape 121"/>
           <p:cNvSpPr/>
           <p:nvPr/>
         </p:nvSpPr>
@@ -9130,14 +9969,14 @@
       </p:sp>
       <p:sp>
         <p:nvSpPr>
-          <p:cNvPr id="118" name="Shape 116"/>
-          <p:cNvSpPr/>
-          <p:nvPr/>
-        </p:nvSpPr>
-        <p:spPr>
-          <a:xfrm>
-            <a:off x="6237514" y="4649724"/>
-            <a:ext cx="1018903" cy="192024"/>
+          <p:cNvPr id="124" name="Shape 122"/>
+          <p:cNvSpPr/>
+          <p:nvPr/>
+        </p:nvSpPr>
+        <p:spPr>
+          <a:xfrm>
+            <a:off x="6710576" y="4649724"/>
+            <a:ext cx="545841" cy="192024"/>
           </a:xfrm>
           <a:prstGeom prst="rect">
             <a:avLst/>
@@ -9155,7 +9994,7 @@
       </p:sp>
       <p:sp>
         <p:nvSpPr>
-          <p:cNvPr id="119" name="Shape 117"/>
+          <p:cNvPr id="125" name="Shape 123"/>
           <p:cNvSpPr/>
           <p:nvPr/>
         </p:nvSpPr>
@@ -9168,7 +10007,7 @@
             <a:avLst/>
           </a:prstGeom>
           <a:solidFill>
-            <a:srgbClr val="E67E22"/>
+            <a:srgbClr val="4CAF50"/>
           </a:solidFill>
           <a:ln w="9525">
             <a:solidFill>
@@ -9180,7 +10019,7 @@
       </p:sp>
       <p:sp>
         <p:nvSpPr>
-          <p:cNvPr id="120" name="Text 118"/>
+          <p:cNvPr id="126" name="Text 124"/>
           <p:cNvSpPr/>
           <p:nvPr/>
         </p:nvSpPr>
@@ -9219,7 +10058,46 @@
       </p:sp>
       <p:sp>
         <p:nvSpPr>
-          <p:cNvPr id="121" name="Shape 119"/>
+          <p:cNvPr id="127" name="Text 125"/>
+          <p:cNvSpPr/>
+          <p:nvPr/>
+        </p:nvSpPr>
+        <p:spPr>
+          <a:xfrm>
+            <a:off x="7366145" y="4517136"/>
+            <a:ext cx="1005840" cy="457200"/>
+          </a:xfrm>
+          <a:prstGeom prst="rect">
+            <a:avLst/>
+          </a:prstGeom>
+          <a:noFill/>
+          <a:ln/>
+        </p:spPr>
+        <p:txBody>
+          <a:bodyPr wrap="square" lIns="0" tIns="0" rIns="0" bIns="0" rtlCol="0" anchor="ctr"/>
+          <a:lstStyle/>
+          <a:p>
+            <a:pPr indent="0" marL="0">
+              <a:buNone/>
+            </a:pPr>
+            <a:r>
+              <a:rPr lang="en-US" sz="750" dirty="0">
+                <a:solidFill>
+                  <a:srgbClr val="1A1A1A"/>
+                </a:solidFill>
+                <a:latin typeface="Arial" pitchFamily="34" charset="0"/>
+                <a:ea typeface="Arial" pitchFamily="34" charset="-122"/>
+                <a:cs typeface="Arial" pitchFamily="34" charset="-120"/>
+              </a:rPr>
+              <a:t>14/07</a:t>
+            </a:r>
+            <a:endParaRPr lang="en-US" sz="750" dirty="0"/>
+          </a:p>
+        </p:txBody>
+      </p:sp>
+      <p:sp>
+        <p:nvSpPr>
+          <p:cNvPr id="128" name="Shape 126"/>
           <p:cNvSpPr/>
           <p:nvPr/>
         </p:nvSpPr>
@@ -9244,7 +10122,7 @@
       </p:sp>
       <p:sp>
         <p:nvSpPr>
-          <p:cNvPr id="122" name="Text 120"/>
+          <p:cNvPr id="129" name="Text 127"/>
           <p:cNvSpPr/>
           <p:nvPr/>
         </p:nvSpPr>
@@ -9285,7 +10163,7 @@
       </p:sp>
       <p:sp>
         <p:nvSpPr>
-          <p:cNvPr id="123" name="Shape 121"/>
+          <p:cNvPr id="130" name="Shape 128"/>
           <p:cNvSpPr/>
           <p:nvPr/>
         </p:nvSpPr>
@@ -9310,14 +10188,14 @@
       </p:sp>
       <p:sp>
         <p:nvSpPr>
-          <p:cNvPr id="124" name="Shape 122"/>
-          <p:cNvSpPr/>
-          <p:nvPr/>
-        </p:nvSpPr>
-        <p:spPr>
-          <a:xfrm>
-            <a:off x="6237514" y="5106924"/>
-            <a:ext cx="1528354" cy="192024"/>
+          <p:cNvPr id="131" name="Shape 129"/>
+          <p:cNvSpPr/>
+          <p:nvPr/>
+        </p:nvSpPr>
+        <p:spPr>
+          <a:xfrm>
+            <a:off x="6710576" y="5106924"/>
+            <a:ext cx="545841" cy="192024"/>
           </a:xfrm>
           <a:prstGeom prst="rect">
             <a:avLst/>
@@ -9335,13 +10213,13 @@
       </p:sp>
       <p:sp>
         <p:nvSpPr>
-          <p:cNvPr id="125" name="Shape 123"/>
-          <p:cNvSpPr/>
-          <p:nvPr/>
-        </p:nvSpPr>
-        <p:spPr>
-          <a:xfrm>
-            <a:off x="7683573" y="5120640"/>
+          <p:cNvPr id="132" name="Shape 130"/>
+          <p:cNvSpPr/>
+          <p:nvPr/>
+        </p:nvSpPr>
+        <p:spPr>
+          <a:xfrm>
+            <a:off x="7174121" y="5120640"/>
             <a:ext cx="164592" cy="164592"/>
           </a:xfrm>
           <a:prstGeom prst="ellipse">
@@ -9360,13 +10238,13 @@
       </p:sp>
       <p:sp>
         <p:nvSpPr>
-          <p:cNvPr id="126" name="Text 124"/>
-          <p:cNvSpPr/>
-          <p:nvPr/>
-        </p:nvSpPr>
-        <p:spPr>
-          <a:xfrm>
-            <a:off x="7683573" y="5111496"/>
+          <p:cNvPr id="133" name="Text 131"/>
+          <p:cNvSpPr/>
+          <p:nvPr/>
+        </p:nvSpPr>
+        <p:spPr>
+          <a:xfrm>
+            <a:off x="7174121" y="5111496"/>
             <a:ext cx="164592" cy="164592"/>
           </a:xfrm>
           <a:prstGeom prst="rect">
@@ -9399,7 +10277,60 @@
       </p:sp>
       <p:sp>
         <p:nvSpPr>
-          <p:cNvPr id="127" name="Shape 125"/>
+          <p:cNvPr id="134" name="Text 132"/>
+          <p:cNvSpPr/>
+          <p:nvPr/>
+        </p:nvSpPr>
+        <p:spPr>
+          <a:xfrm>
+            <a:off x="7366145" y="4974336"/>
+            <a:ext cx="1005840" cy="457200"/>
+          </a:xfrm>
+          <a:prstGeom prst="rect">
+            <a:avLst/>
+          </a:prstGeom>
+          <a:noFill/>
+          <a:ln/>
+        </p:spPr>
+        <p:txBody>
+          <a:bodyPr wrap="square" lIns="0" tIns="0" rIns="0" bIns="0" rtlCol="0" anchor="ctr"/>
+          <a:lstStyle/>
+          <a:p>
+            <a:pPr indent="0" marL="0">
+              <a:buNone/>
+            </a:pPr>
+            <a:r>
+              <a:rPr lang="en-US" sz="750" strike="sngStrike" dirty="0">
+                <a:solidFill>
+                  <a:srgbClr val="9E9E9E"/>
+                </a:solidFill>
+                <a:latin typeface="Arial" pitchFamily="34" charset="0"/>
+                <a:ea typeface="Arial" pitchFamily="34" charset="-122"/>
+                <a:cs typeface="Arial" pitchFamily="34" charset="-120"/>
+              </a:rPr>
+              <a:t>14/07  </a:t>
+            </a:r>
+            <a:pPr indent="0" marL="0">
+              <a:buNone/>
+            </a:pPr>
+            <a:r>
+              <a:rPr lang="en-US" sz="750" dirty="0">
+                <a:solidFill>
+                  <a:srgbClr val="1A1A1A"/>
+                </a:solidFill>
+                <a:latin typeface="Arial" pitchFamily="34" charset="0"/>
+                <a:ea typeface="Arial" pitchFamily="34" charset="-122"/>
+                <a:cs typeface="Arial" pitchFamily="34" charset="-120"/>
+              </a:rPr>
+              <a:t>16/07</a:t>
+            </a:r>
+            <a:endParaRPr lang="en-US" sz="750" dirty="0"/>
+          </a:p>
+        </p:txBody>
+      </p:sp>
+      <p:sp>
+        <p:nvSpPr>
+          <p:cNvPr id="135" name="Shape 133"/>
           <p:cNvSpPr/>
           <p:nvPr/>
         </p:nvSpPr>
@@ -9424,7 +10355,7 @@
       </p:sp>
       <p:sp>
         <p:nvSpPr>
-          <p:cNvPr id="128" name="Text 126"/>
+          <p:cNvPr id="136" name="Text 134"/>
           <p:cNvSpPr/>
           <p:nvPr/>
         </p:nvSpPr>
@@ -9465,7 +10396,7 @@
       </p:sp>
       <p:sp>
         <p:nvSpPr>
-          <p:cNvPr id="129" name="Shape 127"/>
+          <p:cNvPr id="137" name="Shape 135"/>
           <p:cNvSpPr/>
           <p:nvPr/>
         </p:nvSpPr>
@@ -9490,14 +10421,14 @@
       </p:sp>
       <p:sp>
         <p:nvSpPr>
-          <p:cNvPr id="130" name="Shape 128"/>
-          <p:cNvSpPr/>
-          <p:nvPr/>
-        </p:nvSpPr>
-        <p:spPr>
-          <a:xfrm>
-            <a:off x="6746966" y="5564124"/>
-            <a:ext cx="1528354" cy="192024"/>
+          <p:cNvPr id="138" name="Shape 136"/>
+          <p:cNvSpPr/>
+          <p:nvPr/>
+        </p:nvSpPr>
+        <p:spPr>
+          <a:xfrm>
+            <a:off x="7183638" y="5564124"/>
+            <a:ext cx="691398" cy="192024"/>
           </a:xfrm>
           <a:prstGeom prst="rect">
             <a:avLst/>
@@ -9515,13 +10446,13 @@
       </p:sp>
       <p:sp>
         <p:nvSpPr>
-          <p:cNvPr id="131" name="Shape 129"/>
-          <p:cNvSpPr/>
-          <p:nvPr/>
-        </p:nvSpPr>
-        <p:spPr>
-          <a:xfrm>
-            <a:off x="8193024" y="5577840"/>
+          <p:cNvPr id="139" name="Shape 137"/>
+          <p:cNvSpPr/>
+          <p:nvPr/>
+        </p:nvSpPr>
+        <p:spPr>
+          <a:xfrm>
+            <a:off x="7792741" y="5577840"/>
             <a:ext cx="164592" cy="164592"/>
           </a:xfrm>
           <a:prstGeom prst="ellipse">
@@ -9540,13 +10471,13 @@
       </p:sp>
       <p:sp>
         <p:nvSpPr>
-          <p:cNvPr id="132" name="Text 130"/>
-          <p:cNvSpPr/>
-          <p:nvPr/>
-        </p:nvSpPr>
-        <p:spPr>
-          <a:xfrm>
-            <a:off x="8193024" y="5568696"/>
+          <p:cNvPr id="140" name="Text 138"/>
+          <p:cNvSpPr/>
+          <p:nvPr/>
+        </p:nvSpPr>
+        <p:spPr>
+          <a:xfrm>
+            <a:off x="7792741" y="5568696"/>
             <a:ext cx="164592" cy="164592"/>
           </a:xfrm>
           <a:prstGeom prst="rect">
@@ -9579,7 +10510,60 @@
       </p:sp>
       <p:sp>
         <p:nvSpPr>
-          <p:cNvPr id="133" name="Shape 131"/>
+          <p:cNvPr id="141" name="Text 139"/>
+          <p:cNvSpPr/>
+          <p:nvPr/>
+        </p:nvSpPr>
+        <p:spPr>
+          <a:xfrm>
+            <a:off x="7984765" y="5431536"/>
+            <a:ext cx="1005840" cy="457200"/>
+          </a:xfrm>
+          <a:prstGeom prst="rect">
+            <a:avLst/>
+          </a:prstGeom>
+          <a:noFill/>
+          <a:ln/>
+        </p:spPr>
+        <p:txBody>
+          <a:bodyPr wrap="square" lIns="0" tIns="0" rIns="0" bIns="0" rtlCol="0" anchor="ctr"/>
+          <a:lstStyle/>
+          <a:p>
+            <a:pPr indent="0" marL="0">
+              <a:buNone/>
+            </a:pPr>
+            <a:r>
+              <a:rPr lang="en-US" sz="750" strike="sngStrike" dirty="0">
+                <a:solidFill>
+                  <a:srgbClr val="9E9E9E"/>
+                </a:solidFill>
+                <a:latin typeface="Arial" pitchFamily="34" charset="0"/>
+                <a:ea typeface="Arial" pitchFamily="34" charset="-122"/>
+                <a:cs typeface="Arial" pitchFamily="34" charset="-120"/>
+              </a:rPr>
+              <a:t>28/07  </a:t>
+            </a:r>
+            <a:pPr indent="0" marL="0">
+              <a:buNone/>
+            </a:pPr>
+            <a:r>
+              <a:rPr lang="en-US" sz="750" dirty="0">
+                <a:solidFill>
+                  <a:srgbClr val="1A1A1A"/>
+                </a:solidFill>
+                <a:latin typeface="Arial" pitchFamily="34" charset="0"/>
+                <a:ea typeface="Arial" pitchFamily="34" charset="-122"/>
+                <a:cs typeface="Arial" pitchFamily="34" charset="-120"/>
+              </a:rPr>
+              <a:t>04/08</a:t>
+            </a:r>
+            <a:endParaRPr lang="en-US" sz="750" dirty="0"/>
+          </a:p>
+        </p:txBody>
+      </p:sp>
+      <p:sp>
+        <p:nvSpPr>
+          <p:cNvPr id="142" name="Shape 140"/>
           <p:cNvSpPr/>
           <p:nvPr/>
         </p:nvSpPr>
@@ -9604,7 +10588,7 @@
       </p:sp>
       <p:sp>
         <p:nvSpPr>
-          <p:cNvPr id="134" name="Text 132"/>
+          <p:cNvPr id="143" name="Text 141"/>
           <p:cNvSpPr/>
           <p:nvPr/>
         </p:nvSpPr>
@@ -9645,7 +10629,7 @@
       </p:sp>
       <p:sp>
         <p:nvSpPr>
-          <p:cNvPr id="135" name="Shape 133"/>
+          <p:cNvPr id="144" name="Shape 142"/>
           <p:cNvSpPr/>
           <p:nvPr/>
         </p:nvSpPr>
@@ -9670,14 +10654,14 @@
       </p:sp>
       <p:sp>
         <p:nvSpPr>
-          <p:cNvPr id="136" name="Shape 134"/>
-          <p:cNvSpPr/>
-          <p:nvPr/>
-        </p:nvSpPr>
-        <p:spPr>
-          <a:xfrm>
-            <a:off x="6746966" y="6021324"/>
-            <a:ext cx="1528354" cy="192024"/>
+          <p:cNvPr id="145" name="Shape 143"/>
+          <p:cNvSpPr/>
+          <p:nvPr/>
+        </p:nvSpPr>
+        <p:spPr>
+          <a:xfrm>
+            <a:off x="7183638" y="6021324"/>
+            <a:ext cx="691398" cy="192024"/>
           </a:xfrm>
           <a:prstGeom prst="rect">
             <a:avLst/>
@@ -9695,13 +10679,13 @@
       </p:sp>
       <p:sp>
         <p:nvSpPr>
-          <p:cNvPr id="137" name="Shape 135"/>
-          <p:cNvSpPr/>
-          <p:nvPr/>
-        </p:nvSpPr>
-        <p:spPr>
-          <a:xfrm>
-            <a:off x="8193024" y="6035040"/>
+          <p:cNvPr id="146" name="Shape 144"/>
+          <p:cNvSpPr/>
+          <p:nvPr/>
+        </p:nvSpPr>
+        <p:spPr>
+          <a:xfrm>
+            <a:off x="7792741" y="6035040"/>
             <a:ext cx="164592" cy="164592"/>
           </a:xfrm>
           <a:prstGeom prst="ellipse">
@@ -9720,13 +10704,13 @@
       </p:sp>
       <p:sp>
         <p:nvSpPr>
-          <p:cNvPr id="138" name="Text 136"/>
-          <p:cNvSpPr/>
-          <p:nvPr/>
-        </p:nvSpPr>
-        <p:spPr>
-          <a:xfrm>
-            <a:off x="8193024" y="6025896"/>
+          <p:cNvPr id="147" name="Text 145"/>
+          <p:cNvSpPr/>
+          <p:nvPr/>
+        </p:nvSpPr>
+        <p:spPr>
+          <a:xfrm>
+            <a:off x="7792741" y="6025896"/>
             <a:ext cx="164592" cy="164592"/>
           </a:xfrm>
           <a:prstGeom prst="rect">
@@ -9759,13 +10743,66 @@
       </p:sp>
       <p:sp>
         <p:nvSpPr>
-          <p:cNvPr id="139" name="Shape 137"/>
-          <p:cNvSpPr/>
-          <p:nvPr/>
-        </p:nvSpPr>
-        <p:spPr>
-          <a:xfrm>
-            <a:off x="8129762" y="1115568"/>
+          <p:cNvPr id="148" name="Text 146"/>
+          <p:cNvSpPr/>
+          <p:nvPr/>
+        </p:nvSpPr>
+        <p:spPr>
+          <a:xfrm>
+            <a:off x="7984765" y="5888736"/>
+            <a:ext cx="1005840" cy="457200"/>
+          </a:xfrm>
+          <a:prstGeom prst="rect">
+            <a:avLst/>
+          </a:prstGeom>
+          <a:noFill/>
+          <a:ln/>
+        </p:spPr>
+        <p:txBody>
+          <a:bodyPr wrap="square" lIns="0" tIns="0" rIns="0" bIns="0" rtlCol="0" anchor="ctr"/>
+          <a:lstStyle/>
+          <a:p>
+            <a:pPr indent="0" marL="0">
+              <a:buNone/>
+            </a:pPr>
+            <a:r>
+              <a:rPr lang="en-US" sz="750" strike="sngStrike" dirty="0">
+                <a:solidFill>
+                  <a:srgbClr val="9E9E9E"/>
+                </a:solidFill>
+                <a:latin typeface="Arial" pitchFamily="34" charset="0"/>
+                <a:ea typeface="Arial" pitchFamily="34" charset="-122"/>
+                <a:cs typeface="Arial" pitchFamily="34" charset="-120"/>
+              </a:rPr>
+              <a:t>28/07  </a:t>
+            </a:r>
+            <a:pPr indent="0" marL="0">
+              <a:buNone/>
+            </a:pPr>
+            <a:r>
+              <a:rPr lang="en-US" sz="750" dirty="0">
+                <a:solidFill>
+                  <a:srgbClr val="1A1A1A"/>
+                </a:solidFill>
+                <a:latin typeface="Arial" pitchFamily="34" charset="0"/>
+                <a:ea typeface="Arial" pitchFamily="34" charset="-122"/>
+                <a:cs typeface="Arial" pitchFamily="34" charset="-120"/>
+              </a:rPr>
+              <a:t>04/08</a:t>
+            </a:r>
+            <a:endParaRPr lang="en-US" sz="750" dirty="0"/>
+          </a:p>
+        </p:txBody>
+      </p:sp>
+      <p:sp>
+        <p:nvSpPr>
+          <p:cNvPr id="149" name="Shape 147"/>
+          <p:cNvSpPr/>
+          <p:nvPr/>
+        </p:nvSpPr>
+        <p:spPr>
+          <a:xfrm>
+            <a:off x="8202541" y="1115568"/>
             <a:ext cx="0" cy="5230368"/>
           </a:xfrm>
           <a:prstGeom prst="line">
@@ -9782,13 +10819,13 @@
       </p:sp>
       <p:sp>
         <p:nvSpPr>
-          <p:cNvPr id="140" name="Shape 138"/>
-          <p:cNvSpPr/>
-          <p:nvPr/>
-        </p:nvSpPr>
-        <p:spPr>
-          <a:xfrm>
-            <a:off x="8093186" y="6309360"/>
+          <p:cNvPr id="150" name="Shape 148"/>
+          <p:cNvSpPr/>
+          <p:nvPr/>
+        </p:nvSpPr>
+        <p:spPr>
+          <a:xfrm>
+            <a:off x="8165965" y="6309360"/>
             <a:ext cx="73152" cy="73152"/>
           </a:xfrm>
           <a:prstGeom prst="ellipse">
@@ -9807,7 +10844,7 @@
       </p:sp>
       <p:sp>
         <p:nvSpPr>
-          <p:cNvPr id="141" name="Shape 139"/>
+          <p:cNvPr id="151" name="Shape 149"/>
           <p:cNvSpPr/>
           <p:nvPr/>
         </p:nvSpPr>
@@ -10008,7 +11045,7 @@
                 <a:ea typeface="Arial" pitchFamily="34" charset="-122"/>
                 <a:cs typeface="Arial" pitchFamily="34" charset="-120"/>
               </a:rPr>
-              <a:t>Roadmap de Projetos e Melhorias Funil de Vendas - Livre (3/3)</a:t>
+              <a:t>Roadmap de Projetos e Melhorias Funil de Vendas - Livre (3/4)</a:t>
             </a:r>
             <a:endParaRPr lang="en-US" sz="1500" dirty="0"/>
           </a:p>
@@ -10047,7 +11084,7 @@
                 <a:ea typeface="Arial" pitchFamily="34" charset="-122"/>
                 <a:cs typeface="Arial" pitchFamily="34" charset="-120"/>
               </a:rPr>
-              <a:t>Atualizado em 11/08</a:t>
+              <a:t>Atualizado em 13/08</a:t>
             </a:r>
             <a:endParaRPr lang="en-US" sz="1000" dirty="0"/>
           </a:p>
@@ -10061,7 +11098,7 @@
         </p:nvSpPr>
         <p:spPr>
           <a:xfrm>
-            <a:off x="320040" y="548640"/>
+            <a:off x="320040" y="530352"/>
             <a:ext cx="1188720" cy="201168"/>
           </a:xfrm>
           <a:prstGeom prst="rect">
@@ -10100,7 +11137,7 @@
         </p:nvSpPr>
         <p:spPr>
           <a:xfrm>
-            <a:off x="320040" y="777240"/>
+            <a:off x="320040" y="676656"/>
             <a:ext cx="137160" cy="137160"/>
           </a:xfrm>
           <a:prstGeom prst="ellipse">
@@ -10125,7 +11162,7 @@
         </p:nvSpPr>
         <p:spPr>
           <a:xfrm>
-            <a:off x="475488" y="749808"/>
+            <a:off x="475488" y="649224"/>
             <a:ext cx="858073" cy="201168"/>
           </a:xfrm>
           <a:prstGeom prst="rect">
@@ -10164,7 +11201,7 @@
         </p:nvSpPr>
         <p:spPr>
           <a:xfrm>
-            <a:off x="1443289" y="777240"/>
+            <a:off x="1443289" y="676656"/>
             <a:ext cx="137160" cy="137160"/>
           </a:xfrm>
           <a:prstGeom prst="ellipse">
@@ -10189,7 +11226,7 @@
         </p:nvSpPr>
         <p:spPr>
           <a:xfrm>
-            <a:off x="1598737" y="749808"/>
+            <a:off x="1598737" y="649224"/>
             <a:ext cx="572049" cy="201168"/>
           </a:xfrm>
           <a:prstGeom prst="rect">
@@ -10228,7 +11265,7 @@
         </p:nvSpPr>
         <p:spPr>
           <a:xfrm>
-            <a:off x="2280514" y="777240"/>
+            <a:off x="2280514" y="676656"/>
             <a:ext cx="137160" cy="137160"/>
           </a:xfrm>
           <a:prstGeom prst="ellipse">
@@ -10253,7 +11290,7 @@
         </p:nvSpPr>
         <p:spPr>
           <a:xfrm>
-            <a:off x="2435962" y="749808"/>
+            <a:off x="2435962" y="649224"/>
             <a:ext cx="1072591" cy="201168"/>
           </a:xfrm>
           <a:prstGeom prst="rect">
@@ -10292,7 +11329,7 @@
         </p:nvSpPr>
         <p:spPr>
           <a:xfrm>
-            <a:off x="3618281" y="777240"/>
+            <a:off x="3618281" y="676656"/>
             <a:ext cx="137160" cy="137160"/>
           </a:xfrm>
           <a:prstGeom prst="ellipse">
@@ -10317,7 +11354,7 @@
         </p:nvSpPr>
         <p:spPr>
           <a:xfrm>
-            <a:off x="3773729" y="749808"/>
+            <a:off x="3773729" y="649224"/>
             <a:ext cx="429036" cy="201168"/>
           </a:xfrm>
           <a:prstGeom prst="rect">
@@ -10356,7 +11393,7 @@
         </p:nvSpPr>
         <p:spPr>
           <a:xfrm>
-            <a:off x="4312493" y="777240"/>
+            <a:off x="4312493" y="676656"/>
             <a:ext cx="137160" cy="137160"/>
           </a:xfrm>
           <a:prstGeom prst="ellipse">
@@ -10381,7 +11418,7 @@
         </p:nvSpPr>
         <p:spPr>
           <a:xfrm>
-            <a:off x="4467941" y="749808"/>
+            <a:off x="4467941" y="649224"/>
             <a:ext cx="500543" cy="201168"/>
           </a:xfrm>
           <a:prstGeom prst="rect">
@@ -10420,7 +11457,7 @@
         </p:nvSpPr>
         <p:spPr>
           <a:xfrm>
-            <a:off x="5215372" y="548640"/>
+            <a:off x="5215372" y="530352"/>
             <a:ext cx="1417320" cy="201168"/>
           </a:xfrm>
           <a:prstGeom prst="rect">
@@ -10459,7 +11496,7 @@
         </p:nvSpPr>
         <p:spPr>
           <a:xfrm rot="5400000">
-            <a:off x="5215372" y="768096"/>
+            <a:off x="5215372" y="667512"/>
             <a:ext cx="137160" cy="137160"/>
           </a:xfrm>
           <a:prstGeom prst="triangle">
@@ -10484,7 +11521,7 @@
         </p:nvSpPr>
         <p:spPr>
           <a:xfrm>
-            <a:off x="5379964" y="749808"/>
+            <a:off x="5379964" y="649224"/>
             <a:ext cx="429036" cy="201168"/>
           </a:xfrm>
           <a:prstGeom prst="rect">
@@ -10523,7 +11560,7 @@
         </p:nvSpPr>
         <p:spPr>
           <a:xfrm>
-            <a:off x="5918728" y="768096"/>
+            <a:off x="5918728" y="667512"/>
             <a:ext cx="155448" cy="155448"/>
           </a:xfrm>
           <a:prstGeom prst="ellipse">
@@ -10548,7 +11585,7 @@
         </p:nvSpPr>
         <p:spPr>
           <a:xfrm>
-            <a:off x="5918728" y="754380"/>
+            <a:off x="5918728" y="653796"/>
             <a:ext cx="155448" cy="155448"/>
           </a:xfrm>
           <a:prstGeom prst="rect">
@@ -10587,7 +11624,7 @@
         </p:nvSpPr>
         <p:spPr>
           <a:xfrm>
-            <a:off x="6092464" y="731520"/>
+            <a:off x="6092464" y="630936"/>
             <a:ext cx="572049" cy="274320"/>
           </a:xfrm>
           <a:prstGeom prst="rect">
@@ -10626,7 +11663,7 @@
         </p:nvSpPr>
         <p:spPr>
           <a:xfrm>
-            <a:off x="6774241" y="768096"/>
+            <a:off x="6774241" y="667512"/>
             <a:ext cx="155448" cy="155448"/>
           </a:xfrm>
           <a:prstGeom prst="ellipse">
@@ -10651,7 +11688,7 @@
         </p:nvSpPr>
         <p:spPr>
           <a:xfrm>
-            <a:off x="6774241" y="754380"/>
+            <a:off x="6774241" y="653796"/>
             <a:ext cx="155448" cy="155448"/>
           </a:xfrm>
           <a:prstGeom prst="rect">
@@ -10690,7 +11727,7 @@
         </p:nvSpPr>
         <p:spPr>
           <a:xfrm>
-            <a:off x="6947977" y="731520"/>
+            <a:off x="6947977" y="630936"/>
             <a:ext cx="1287109" cy="274320"/>
           </a:xfrm>
           <a:prstGeom prst="rect">
@@ -10729,7 +11766,7 @@
         </p:nvSpPr>
         <p:spPr>
           <a:xfrm>
-            <a:off x="8344814" y="768096"/>
+            <a:off x="8344814" y="667512"/>
             <a:ext cx="155448" cy="155448"/>
           </a:xfrm>
           <a:prstGeom prst="ellipse">
@@ -10754,7 +11791,7 @@
         </p:nvSpPr>
         <p:spPr>
           <a:xfrm>
-            <a:off x="8344814" y="754380"/>
+            <a:off x="8344814" y="653796"/>
             <a:ext cx="155448" cy="155448"/>
           </a:xfrm>
           <a:prstGeom prst="rect">
@@ -10793,7 +11830,7 @@
         </p:nvSpPr>
         <p:spPr>
           <a:xfrm>
-            <a:off x="8518550" y="731520"/>
+            <a:off x="8518550" y="630936"/>
             <a:ext cx="1430122" cy="274320"/>
           </a:xfrm>
           <a:prstGeom prst="rect">
@@ -12459,8 +13496,8 @@
         </p:nvSpPr>
         <p:spPr>
           <a:xfrm>
-            <a:off x="6746966" y="1906524"/>
-            <a:ext cx="1528354" cy="192024"/>
+            <a:off x="7183638" y="1906524"/>
+            <a:ext cx="691398" cy="192024"/>
           </a:xfrm>
           <a:prstGeom prst="rect">
             <a:avLst/>
@@ -12484,7 +13521,7 @@
         </p:nvSpPr>
         <p:spPr>
           <a:xfrm>
-            <a:off x="8193024" y="1920240"/>
+            <a:off x="7792741" y="1920240"/>
             <a:ext cx="164592" cy="164592"/>
           </a:xfrm>
           <a:prstGeom prst="ellipse">
@@ -12509,7 +13546,7 @@
         </p:nvSpPr>
         <p:spPr>
           <a:xfrm>
-            <a:off x="8193024" y="1911096"/>
+            <a:off x="7792741" y="1911096"/>
             <a:ext cx="164592" cy="164592"/>
           </a:xfrm>
           <a:prstGeom prst="rect">
@@ -12542,7 +13579,60 @@
       </p:sp>
       <p:sp>
         <p:nvSpPr>
-          <p:cNvPr id="85" name="Shape 83"/>
+          <p:cNvPr id="85" name="Text 83"/>
+          <p:cNvSpPr/>
+          <p:nvPr/>
+        </p:nvSpPr>
+        <p:spPr>
+          <a:xfrm>
+            <a:off x="7984765" y="1773936"/>
+            <a:ext cx="1005840" cy="457200"/>
+          </a:xfrm>
+          <a:prstGeom prst="rect">
+            <a:avLst/>
+          </a:prstGeom>
+          <a:noFill/>
+          <a:ln/>
+        </p:spPr>
+        <p:txBody>
+          <a:bodyPr wrap="square" lIns="0" tIns="0" rIns="0" bIns="0" rtlCol="0" anchor="ctr"/>
+          <a:lstStyle/>
+          <a:p>
+            <a:pPr indent="0" marL="0">
+              <a:buNone/>
+            </a:pPr>
+            <a:r>
+              <a:rPr lang="en-US" sz="750" strike="sngStrike" dirty="0">
+                <a:solidFill>
+                  <a:srgbClr val="9E9E9E"/>
+                </a:solidFill>
+                <a:latin typeface="Arial" pitchFamily="34" charset="0"/>
+                <a:ea typeface="Arial" pitchFamily="34" charset="-122"/>
+                <a:cs typeface="Arial" pitchFamily="34" charset="-120"/>
+              </a:rPr>
+              <a:t>28/07  </a:t>
+            </a:r>
+            <a:pPr indent="0" marL="0">
+              <a:buNone/>
+            </a:pPr>
+            <a:r>
+              <a:rPr lang="en-US" sz="750" dirty="0">
+                <a:solidFill>
+                  <a:srgbClr val="1A1A1A"/>
+                </a:solidFill>
+                <a:latin typeface="Arial" pitchFamily="34" charset="0"/>
+                <a:ea typeface="Arial" pitchFamily="34" charset="-122"/>
+                <a:cs typeface="Arial" pitchFamily="34" charset="-120"/>
+              </a:rPr>
+              <a:t>04/08</a:t>
+            </a:r>
+            <a:endParaRPr lang="en-US" sz="750" dirty="0"/>
+          </a:p>
+        </p:txBody>
+      </p:sp>
+      <p:sp>
+        <p:nvSpPr>
+          <p:cNvPr id="86" name="Shape 84"/>
           <p:cNvSpPr/>
           <p:nvPr/>
         </p:nvSpPr>
@@ -12567,7 +13657,7 @@
       </p:sp>
       <p:sp>
         <p:nvSpPr>
-          <p:cNvPr id="86" name="Text 84"/>
+          <p:cNvPr id="87" name="Text 85"/>
           <p:cNvSpPr/>
           <p:nvPr/>
         </p:nvSpPr>
@@ -12608,7 +13698,7 @@
       </p:sp>
       <p:sp>
         <p:nvSpPr>
-          <p:cNvPr id="87" name="Shape 85"/>
+          <p:cNvPr id="88" name="Shape 86"/>
           <p:cNvSpPr/>
           <p:nvPr/>
         </p:nvSpPr>
@@ -12633,14 +13723,14 @@
       </p:sp>
       <p:sp>
         <p:nvSpPr>
-          <p:cNvPr id="88" name="Shape 86"/>
-          <p:cNvSpPr/>
-          <p:nvPr/>
-        </p:nvSpPr>
-        <p:spPr>
-          <a:xfrm>
-            <a:off x="7256417" y="2363724"/>
-            <a:ext cx="1018903" cy="192024"/>
+          <p:cNvPr id="89" name="Shape 87"/>
+          <p:cNvSpPr/>
+          <p:nvPr/>
+        </p:nvSpPr>
+        <p:spPr>
+          <a:xfrm>
+            <a:off x="7630015" y="2363724"/>
+            <a:ext cx="354190" cy="192024"/>
           </a:xfrm>
           <a:prstGeom prst="rect">
             <a:avLst/>
@@ -12658,13 +13748,13 @@
       </p:sp>
       <p:sp>
         <p:nvSpPr>
-          <p:cNvPr id="89" name="Shape 87"/>
-          <p:cNvSpPr/>
-          <p:nvPr/>
-        </p:nvSpPr>
-        <p:spPr>
-          <a:xfrm>
-            <a:off x="8193024" y="2377440"/>
+          <p:cNvPr id="90" name="Shape 88"/>
+          <p:cNvSpPr/>
+          <p:nvPr/>
+        </p:nvSpPr>
+        <p:spPr>
+          <a:xfrm>
+            <a:off x="7901909" y="2377440"/>
             <a:ext cx="164592" cy="164592"/>
           </a:xfrm>
           <a:prstGeom prst="ellipse">
@@ -12683,13 +13773,13 @@
       </p:sp>
       <p:sp>
         <p:nvSpPr>
-          <p:cNvPr id="90" name="Text 88"/>
-          <p:cNvSpPr/>
-          <p:nvPr/>
-        </p:nvSpPr>
-        <p:spPr>
-          <a:xfrm>
-            <a:off x="8193024" y="2368296"/>
+          <p:cNvPr id="91" name="Text 89"/>
+          <p:cNvSpPr/>
+          <p:nvPr/>
+        </p:nvSpPr>
+        <p:spPr>
+          <a:xfrm>
+            <a:off x="7901909" y="2368296"/>
             <a:ext cx="164592" cy="164592"/>
           </a:xfrm>
           <a:prstGeom prst="rect">
@@ -12722,7 +13812,46 @@
       </p:sp>
       <p:sp>
         <p:nvSpPr>
-          <p:cNvPr id="91" name="Shape 89"/>
+          <p:cNvPr id="92" name="Text 90"/>
+          <p:cNvSpPr/>
+          <p:nvPr/>
+        </p:nvSpPr>
+        <p:spPr>
+          <a:xfrm>
+            <a:off x="8093933" y="2231136"/>
+            <a:ext cx="1005840" cy="457200"/>
+          </a:xfrm>
+          <a:prstGeom prst="rect">
+            <a:avLst/>
+          </a:prstGeom>
+          <a:noFill/>
+          <a:ln/>
+        </p:spPr>
+        <p:txBody>
+          <a:bodyPr wrap="square" lIns="0" tIns="0" rIns="0" bIns="0" rtlCol="0" anchor="ctr"/>
+          <a:lstStyle/>
+          <a:p>
+            <a:pPr indent="0" marL="0">
+              <a:buNone/>
+            </a:pPr>
+            <a:r>
+              <a:rPr lang="en-US" sz="750" dirty="0">
+                <a:solidFill>
+                  <a:srgbClr val="1A1A1A"/>
+                </a:solidFill>
+                <a:latin typeface="Arial" pitchFamily="34" charset="0"/>
+                <a:ea typeface="Arial" pitchFamily="34" charset="-122"/>
+                <a:cs typeface="Arial" pitchFamily="34" charset="-120"/>
+              </a:rPr>
+              <a:t>13/08</a:t>
+            </a:r>
+            <a:endParaRPr lang="en-US" sz="750" dirty="0"/>
+          </a:p>
+        </p:txBody>
+      </p:sp>
+      <p:sp>
+        <p:nvSpPr>
+          <p:cNvPr id="93" name="Shape 91"/>
           <p:cNvSpPr/>
           <p:nvPr/>
         </p:nvSpPr>
@@ -12747,7 +13876,7 @@
       </p:sp>
       <p:sp>
         <p:nvSpPr>
-          <p:cNvPr id="92" name="Text 90"/>
+          <p:cNvPr id="94" name="Text 92"/>
           <p:cNvSpPr/>
           <p:nvPr/>
         </p:nvSpPr>
@@ -12788,7 +13917,7 @@
       </p:sp>
       <p:sp>
         <p:nvSpPr>
-          <p:cNvPr id="93" name="Shape 91"/>
+          <p:cNvPr id="95" name="Shape 93"/>
           <p:cNvSpPr/>
           <p:nvPr/>
         </p:nvSpPr>
@@ -12813,14 +13942,14 @@
       </p:sp>
       <p:sp>
         <p:nvSpPr>
-          <p:cNvPr id="94" name="Shape 92"/>
-          <p:cNvSpPr/>
-          <p:nvPr/>
-        </p:nvSpPr>
-        <p:spPr>
-          <a:xfrm>
-            <a:off x="7256417" y="2820924"/>
-            <a:ext cx="1018903" cy="192024"/>
+          <p:cNvPr id="96" name="Shape 94"/>
+          <p:cNvSpPr/>
+          <p:nvPr/>
+        </p:nvSpPr>
+        <p:spPr>
+          <a:xfrm>
+            <a:off x="7630015" y="2820924"/>
+            <a:ext cx="245022" cy="192024"/>
           </a:xfrm>
           <a:prstGeom prst="rect">
             <a:avLst/>
@@ -12838,13 +13967,13 @@
       </p:sp>
       <p:sp>
         <p:nvSpPr>
-          <p:cNvPr id="95" name="Shape 93"/>
-          <p:cNvSpPr/>
-          <p:nvPr/>
-        </p:nvSpPr>
-        <p:spPr>
-          <a:xfrm>
-            <a:off x="8193024" y="2834640"/>
+          <p:cNvPr id="97" name="Shape 95"/>
+          <p:cNvSpPr/>
+          <p:nvPr/>
+        </p:nvSpPr>
+        <p:spPr>
+          <a:xfrm>
+            <a:off x="7792741" y="2834640"/>
             <a:ext cx="164592" cy="164592"/>
           </a:xfrm>
           <a:prstGeom prst="ellipse">
@@ -12863,13 +13992,13 @@
       </p:sp>
       <p:sp>
         <p:nvSpPr>
-          <p:cNvPr id="96" name="Text 94"/>
-          <p:cNvSpPr/>
-          <p:nvPr/>
-        </p:nvSpPr>
-        <p:spPr>
-          <a:xfrm>
-            <a:off x="8193024" y="2825496"/>
+          <p:cNvPr id="98" name="Text 96"/>
+          <p:cNvSpPr/>
+          <p:nvPr/>
+        </p:nvSpPr>
+        <p:spPr>
+          <a:xfrm>
+            <a:off x="7792741" y="2825496"/>
             <a:ext cx="164592" cy="164592"/>
           </a:xfrm>
           <a:prstGeom prst="rect">
@@ -12902,7 +14031,46 @@
       </p:sp>
       <p:sp>
         <p:nvSpPr>
-          <p:cNvPr id="97" name="Shape 95"/>
+          <p:cNvPr id="99" name="Text 97"/>
+          <p:cNvSpPr/>
+          <p:nvPr/>
+        </p:nvSpPr>
+        <p:spPr>
+          <a:xfrm>
+            <a:off x="7984765" y="2688336"/>
+            <a:ext cx="1005840" cy="457200"/>
+          </a:xfrm>
+          <a:prstGeom prst="rect">
+            <a:avLst/>
+          </a:prstGeom>
+          <a:noFill/>
+          <a:ln/>
+        </p:spPr>
+        <p:txBody>
+          <a:bodyPr wrap="square" lIns="0" tIns="0" rIns="0" bIns="0" rtlCol="0" anchor="ctr"/>
+          <a:lstStyle/>
+          <a:p>
+            <a:pPr indent="0" marL="0">
+              <a:buNone/>
+            </a:pPr>
+            <a:r>
+              <a:rPr lang="en-US" sz="750" dirty="0">
+                <a:solidFill>
+                  <a:srgbClr val="1A1A1A"/>
+                </a:solidFill>
+                <a:latin typeface="Arial" pitchFamily="34" charset="0"/>
+                <a:ea typeface="Arial" pitchFamily="34" charset="-122"/>
+                <a:cs typeface="Arial" pitchFamily="34" charset="-120"/>
+              </a:rPr>
+              <a:t>04/08</a:t>
+            </a:r>
+            <a:endParaRPr lang="en-US" sz="750" dirty="0"/>
+          </a:p>
+        </p:txBody>
+      </p:sp>
+      <p:sp>
+        <p:nvSpPr>
+          <p:cNvPr id="100" name="Shape 98"/>
           <p:cNvSpPr/>
           <p:nvPr/>
         </p:nvSpPr>
@@ -12927,7 +14095,7 @@
       </p:sp>
       <p:sp>
         <p:nvSpPr>
-          <p:cNvPr id="98" name="Text 96"/>
+          <p:cNvPr id="101" name="Text 99"/>
           <p:cNvSpPr/>
           <p:nvPr/>
         </p:nvSpPr>
@@ -12968,7 +14136,7 @@
       </p:sp>
       <p:sp>
         <p:nvSpPr>
-          <p:cNvPr id="99" name="Shape 97"/>
+          <p:cNvPr id="102" name="Shape 100"/>
           <p:cNvSpPr/>
           <p:nvPr/>
         </p:nvSpPr>
@@ -12993,14 +14161,14 @@
       </p:sp>
       <p:sp>
         <p:nvSpPr>
-          <p:cNvPr id="100" name="Shape 98"/>
-          <p:cNvSpPr/>
-          <p:nvPr/>
-        </p:nvSpPr>
-        <p:spPr>
-          <a:xfrm>
-            <a:off x="7256417" y="3278124"/>
-            <a:ext cx="1018903" cy="192024"/>
+          <p:cNvPr id="103" name="Shape 101"/>
+          <p:cNvSpPr/>
+          <p:nvPr/>
+        </p:nvSpPr>
+        <p:spPr>
+          <a:xfrm>
+            <a:off x="7630015" y="3278124"/>
+            <a:ext cx="536137" cy="192024"/>
           </a:xfrm>
           <a:prstGeom prst="rect">
             <a:avLst/>
@@ -13018,20 +14186,20 @@
       </p:sp>
       <p:sp>
         <p:nvSpPr>
-          <p:cNvPr id="101" name="Shape 99"/>
-          <p:cNvSpPr/>
-          <p:nvPr/>
-        </p:nvSpPr>
-        <p:spPr>
-          <a:xfrm>
-            <a:off x="8193024" y="3291840"/>
+          <p:cNvPr id="104" name="Shape 102"/>
+          <p:cNvSpPr/>
+          <p:nvPr/>
+        </p:nvSpPr>
+        <p:spPr>
+          <a:xfrm>
+            <a:off x="8083856" y="3291840"/>
             <a:ext cx="164592" cy="164592"/>
           </a:xfrm>
           <a:prstGeom prst="ellipse">
             <a:avLst/>
           </a:prstGeom>
           <a:solidFill>
-            <a:srgbClr val="9E9E9E"/>
+            <a:srgbClr val="4CAF50"/>
           </a:solidFill>
           <a:ln w="9525">
             <a:solidFill>
@@ -13043,13 +14211,13 @@
       </p:sp>
       <p:sp>
         <p:nvSpPr>
-          <p:cNvPr id="102" name="Text 100"/>
-          <p:cNvSpPr/>
-          <p:nvPr/>
-        </p:nvSpPr>
-        <p:spPr>
-          <a:xfrm>
-            <a:off x="8193024" y="3282696"/>
+          <p:cNvPr id="105" name="Text 103"/>
+          <p:cNvSpPr/>
+          <p:nvPr/>
+        </p:nvSpPr>
+        <p:spPr>
+          <a:xfrm>
+            <a:off x="8083856" y="3282696"/>
             <a:ext cx="164592" cy="164592"/>
           </a:xfrm>
           <a:prstGeom prst="rect">
@@ -13082,7 +14250,46 @@
       </p:sp>
       <p:sp>
         <p:nvSpPr>
-          <p:cNvPr id="103" name="Shape 101"/>
+          <p:cNvPr id="106" name="Text 104"/>
+          <p:cNvSpPr/>
+          <p:nvPr/>
+        </p:nvSpPr>
+        <p:spPr>
+          <a:xfrm>
+            <a:off x="8275880" y="3145536"/>
+            <a:ext cx="1005840" cy="457200"/>
+          </a:xfrm>
+          <a:prstGeom prst="rect">
+            <a:avLst/>
+          </a:prstGeom>
+          <a:noFill/>
+          <a:ln/>
+        </p:spPr>
+        <p:txBody>
+          <a:bodyPr wrap="square" lIns="0" tIns="0" rIns="0" bIns="0" rtlCol="0" anchor="ctr"/>
+          <a:lstStyle/>
+          <a:p>
+            <a:pPr indent="0" marL="0">
+              <a:buNone/>
+            </a:pPr>
+            <a:r>
+              <a:rPr lang="en-US" sz="750" dirty="0">
+                <a:solidFill>
+                  <a:srgbClr val="1A1A1A"/>
+                </a:solidFill>
+                <a:latin typeface="Arial" pitchFamily="34" charset="0"/>
+                <a:ea typeface="Arial" pitchFamily="34" charset="-122"/>
+                <a:cs typeface="Arial" pitchFamily="34" charset="-120"/>
+              </a:rPr>
+              <a:t>11/08</a:t>
+            </a:r>
+            <a:endParaRPr lang="en-US" sz="750" dirty="0"/>
+          </a:p>
+        </p:txBody>
+      </p:sp>
+      <p:sp>
+        <p:nvSpPr>
+          <p:cNvPr id="107" name="Shape 105"/>
           <p:cNvSpPr/>
           <p:nvPr/>
         </p:nvSpPr>
@@ -13107,7 +14314,7 @@
       </p:sp>
       <p:sp>
         <p:nvSpPr>
-          <p:cNvPr id="104" name="Text 102"/>
+          <p:cNvPr id="108" name="Text 106"/>
           <p:cNvSpPr/>
           <p:nvPr/>
         </p:nvSpPr>
@@ -13148,7 +14355,7 @@
       </p:sp>
       <p:sp>
         <p:nvSpPr>
-          <p:cNvPr id="105" name="Shape 103"/>
+          <p:cNvPr id="109" name="Shape 107"/>
           <p:cNvSpPr/>
           <p:nvPr/>
         </p:nvSpPr>
@@ -13173,14 +14380,14 @@
       </p:sp>
       <p:sp>
         <p:nvSpPr>
-          <p:cNvPr id="106" name="Shape 104"/>
-          <p:cNvSpPr/>
-          <p:nvPr/>
-        </p:nvSpPr>
-        <p:spPr>
-          <a:xfrm>
-            <a:off x="7256417" y="3735324"/>
-            <a:ext cx="1018903" cy="192024"/>
+          <p:cNvPr id="110" name="Shape 108"/>
+          <p:cNvSpPr/>
+          <p:nvPr/>
+        </p:nvSpPr>
+        <p:spPr>
+          <a:xfrm>
+            <a:off x="7630015" y="3735324"/>
+            <a:ext cx="354190" cy="192024"/>
           </a:xfrm>
           <a:prstGeom prst="rect">
             <a:avLst/>
@@ -13198,13 +14405,13 @@
       </p:sp>
       <p:sp>
         <p:nvSpPr>
-          <p:cNvPr id="107" name="Shape 105"/>
-          <p:cNvSpPr/>
-          <p:nvPr/>
-        </p:nvSpPr>
-        <p:spPr>
-          <a:xfrm>
-            <a:off x="8193024" y="3749040"/>
+          <p:cNvPr id="111" name="Shape 109"/>
+          <p:cNvSpPr/>
+          <p:nvPr/>
+        </p:nvSpPr>
+        <p:spPr>
+          <a:xfrm>
+            <a:off x="7901909" y="3749040"/>
             <a:ext cx="164592" cy="164592"/>
           </a:xfrm>
           <a:prstGeom prst="ellipse">
@@ -13223,13 +14430,13 @@
       </p:sp>
       <p:sp>
         <p:nvSpPr>
-          <p:cNvPr id="108" name="Text 106"/>
-          <p:cNvSpPr/>
-          <p:nvPr/>
-        </p:nvSpPr>
-        <p:spPr>
-          <a:xfrm>
-            <a:off x="8193024" y="3739896"/>
+          <p:cNvPr id="112" name="Text 110"/>
+          <p:cNvSpPr/>
+          <p:nvPr/>
+        </p:nvSpPr>
+        <p:spPr>
+          <a:xfrm>
+            <a:off x="7901909" y="3739896"/>
             <a:ext cx="164592" cy="164592"/>
           </a:xfrm>
           <a:prstGeom prst="rect">
@@ -13262,7 +14469,46 @@
       </p:sp>
       <p:sp>
         <p:nvSpPr>
-          <p:cNvPr id="109" name="Shape 107"/>
+          <p:cNvPr id="113" name="Text 111"/>
+          <p:cNvSpPr/>
+          <p:nvPr/>
+        </p:nvSpPr>
+        <p:spPr>
+          <a:xfrm>
+            <a:off x="8093933" y="3602736"/>
+            <a:ext cx="1005840" cy="457200"/>
+          </a:xfrm>
+          <a:prstGeom prst="rect">
+            <a:avLst/>
+          </a:prstGeom>
+          <a:noFill/>
+          <a:ln/>
+        </p:spPr>
+        <p:txBody>
+          <a:bodyPr wrap="square" lIns="0" tIns="0" rIns="0" bIns="0" rtlCol="0" anchor="ctr"/>
+          <a:lstStyle/>
+          <a:p>
+            <a:pPr indent="0" marL="0">
+              <a:buNone/>
+            </a:pPr>
+            <a:r>
+              <a:rPr lang="en-US" sz="750" dirty="0">
+                <a:solidFill>
+                  <a:srgbClr val="1A1A1A"/>
+                </a:solidFill>
+                <a:latin typeface="Arial" pitchFamily="34" charset="0"/>
+                <a:ea typeface="Arial" pitchFamily="34" charset="-122"/>
+                <a:cs typeface="Arial" pitchFamily="34" charset="-120"/>
+              </a:rPr>
+              <a:t>13/08</a:t>
+            </a:r>
+            <a:endParaRPr lang="en-US" sz="750" dirty="0"/>
+          </a:p>
+        </p:txBody>
+      </p:sp>
+      <p:sp>
+        <p:nvSpPr>
+          <p:cNvPr id="114" name="Shape 112"/>
           <p:cNvSpPr/>
           <p:nvPr/>
         </p:nvSpPr>
@@ -13287,7 +14533,7 @@
       </p:sp>
       <p:sp>
         <p:nvSpPr>
-          <p:cNvPr id="110" name="Text 108"/>
+          <p:cNvPr id="115" name="Text 113"/>
           <p:cNvSpPr/>
           <p:nvPr/>
         </p:nvSpPr>
@@ -13328,7 +14574,7 @@
       </p:sp>
       <p:sp>
         <p:nvSpPr>
-          <p:cNvPr id="111" name="Shape 109"/>
+          <p:cNvPr id="116" name="Shape 114"/>
           <p:cNvSpPr/>
           <p:nvPr/>
         </p:nvSpPr>
@@ -13353,14 +14599,14 @@
       </p:sp>
       <p:sp>
         <p:nvSpPr>
-          <p:cNvPr id="112" name="Shape 110"/>
-          <p:cNvSpPr/>
-          <p:nvPr/>
-        </p:nvSpPr>
-        <p:spPr>
-          <a:xfrm>
-            <a:off x="7256417" y="4192524"/>
-            <a:ext cx="1018903" cy="192024"/>
+          <p:cNvPr id="117" name="Shape 115"/>
+          <p:cNvSpPr/>
+          <p:nvPr/>
+        </p:nvSpPr>
+        <p:spPr>
+          <a:xfrm>
+            <a:off x="7630015" y="4192524"/>
+            <a:ext cx="245022" cy="192024"/>
           </a:xfrm>
           <a:prstGeom prst="rect">
             <a:avLst/>
@@ -13378,13 +14624,13 @@
       </p:sp>
       <p:sp>
         <p:nvSpPr>
-          <p:cNvPr id="113" name="Shape 111"/>
-          <p:cNvSpPr/>
-          <p:nvPr/>
-        </p:nvSpPr>
-        <p:spPr>
-          <a:xfrm>
-            <a:off x="8193024" y="4206240"/>
+          <p:cNvPr id="118" name="Shape 116"/>
+          <p:cNvSpPr/>
+          <p:nvPr/>
+        </p:nvSpPr>
+        <p:spPr>
+          <a:xfrm>
+            <a:off x="7792741" y="4206240"/>
             <a:ext cx="164592" cy="164592"/>
           </a:xfrm>
           <a:prstGeom prst="ellipse">
@@ -13403,13 +14649,13 @@
       </p:sp>
       <p:sp>
         <p:nvSpPr>
-          <p:cNvPr id="114" name="Text 112"/>
-          <p:cNvSpPr/>
-          <p:nvPr/>
-        </p:nvSpPr>
-        <p:spPr>
-          <a:xfrm>
-            <a:off x="8193024" y="4197096"/>
+          <p:cNvPr id="119" name="Text 117"/>
+          <p:cNvSpPr/>
+          <p:nvPr/>
+        </p:nvSpPr>
+        <p:spPr>
+          <a:xfrm>
+            <a:off x="7792741" y="4197096"/>
             <a:ext cx="164592" cy="164592"/>
           </a:xfrm>
           <a:prstGeom prst="rect">
@@ -13442,7 +14688,46 @@
       </p:sp>
       <p:sp>
         <p:nvSpPr>
-          <p:cNvPr id="115" name="Shape 113"/>
+          <p:cNvPr id="120" name="Text 118"/>
+          <p:cNvSpPr/>
+          <p:nvPr/>
+        </p:nvSpPr>
+        <p:spPr>
+          <a:xfrm>
+            <a:off x="7984765" y="4059936"/>
+            <a:ext cx="1005840" cy="457200"/>
+          </a:xfrm>
+          <a:prstGeom prst="rect">
+            <a:avLst/>
+          </a:prstGeom>
+          <a:noFill/>
+          <a:ln/>
+        </p:spPr>
+        <p:txBody>
+          <a:bodyPr wrap="square" lIns="0" tIns="0" rIns="0" bIns="0" rtlCol="0" anchor="ctr"/>
+          <a:lstStyle/>
+          <a:p>
+            <a:pPr indent="0" marL="0">
+              <a:buNone/>
+            </a:pPr>
+            <a:r>
+              <a:rPr lang="en-US" sz="750" dirty="0">
+                <a:solidFill>
+                  <a:srgbClr val="1A1A1A"/>
+                </a:solidFill>
+                <a:latin typeface="Arial" pitchFamily="34" charset="0"/>
+                <a:ea typeface="Arial" pitchFamily="34" charset="-122"/>
+                <a:cs typeface="Arial" pitchFamily="34" charset="-120"/>
+              </a:rPr>
+              <a:t>04/08</a:t>
+            </a:r>
+            <a:endParaRPr lang="en-US" sz="750" dirty="0"/>
+          </a:p>
+        </p:txBody>
+      </p:sp>
+      <p:sp>
+        <p:nvSpPr>
+          <p:cNvPr id="121" name="Shape 119"/>
           <p:cNvSpPr/>
           <p:nvPr/>
         </p:nvSpPr>
@@ -13467,7 +14752,7 @@
       </p:sp>
       <p:sp>
         <p:nvSpPr>
-          <p:cNvPr id="116" name="Text 114"/>
+          <p:cNvPr id="122" name="Text 120"/>
           <p:cNvSpPr/>
           <p:nvPr/>
         </p:nvSpPr>
@@ -13508,7 +14793,7 @@
       </p:sp>
       <p:sp>
         <p:nvSpPr>
-          <p:cNvPr id="117" name="Shape 115"/>
+          <p:cNvPr id="123" name="Shape 121"/>
           <p:cNvSpPr/>
           <p:nvPr/>
         </p:nvSpPr>
@@ -13533,14 +14818,14 @@
       </p:sp>
       <p:sp>
         <p:nvSpPr>
-          <p:cNvPr id="118" name="Shape 116"/>
-          <p:cNvSpPr/>
-          <p:nvPr/>
-        </p:nvSpPr>
-        <p:spPr>
-          <a:xfrm>
-            <a:off x="7256417" y="4649724"/>
-            <a:ext cx="1018903" cy="192024"/>
+          <p:cNvPr id="124" name="Shape 122"/>
+          <p:cNvSpPr/>
+          <p:nvPr/>
+        </p:nvSpPr>
+        <p:spPr>
+          <a:xfrm>
+            <a:off x="7630015" y="4649724"/>
+            <a:ext cx="536137" cy="192024"/>
           </a:xfrm>
           <a:prstGeom prst="rect">
             <a:avLst/>
@@ -13558,20 +14843,20 @@
       </p:sp>
       <p:sp>
         <p:nvSpPr>
-          <p:cNvPr id="119" name="Shape 117"/>
-          <p:cNvSpPr/>
-          <p:nvPr/>
-        </p:nvSpPr>
-        <p:spPr>
-          <a:xfrm>
-            <a:off x="8193024" y="4663440"/>
+          <p:cNvPr id="125" name="Shape 123"/>
+          <p:cNvSpPr/>
+          <p:nvPr/>
+        </p:nvSpPr>
+        <p:spPr>
+          <a:xfrm>
+            <a:off x="8083856" y="4663440"/>
             <a:ext cx="164592" cy="164592"/>
           </a:xfrm>
           <a:prstGeom prst="ellipse">
             <a:avLst/>
           </a:prstGeom>
           <a:solidFill>
-            <a:srgbClr val="9E9E9E"/>
+            <a:srgbClr val="4CAF50"/>
           </a:solidFill>
           <a:ln w="9525">
             <a:solidFill>
@@ -13583,13 +14868,13 @@
       </p:sp>
       <p:sp>
         <p:nvSpPr>
-          <p:cNvPr id="120" name="Text 118"/>
-          <p:cNvSpPr/>
-          <p:nvPr/>
-        </p:nvSpPr>
-        <p:spPr>
-          <a:xfrm>
-            <a:off x="8193024" y="4654296"/>
+          <p:cNvPr id="126" name="Text 124"/>
+          <p:cNvSpPr/>
+          <p:nvPr/>
+        </p:nvSpPr>
+        <p:spPr>
+          <a:xfrm>
+            <a:off x="8083856" y="4654296"/>
             <a:ext cx="164592" cy="164592"/>
           </a:xfrm>
           <a:prstGeom prst="rect">
@@ -13622,7 +14907,46 @@
       </p:sp>
       <p:sp>
         <p:nvSpPr>
-          <p:cNvPr id="121" name="Shape 119"/>
+          <p:cNvPr id="127" name="Text 125"/>
+          <p:cNvSpPr/>
+          <p:nvPr/>
+        </p:nvSpPr>
+        <p:spPr>
+          <a:xfrm>
+            <a:off x="8275880" y="4517136"/>
+            <a:ext cx="1005840" cy="457200"/>
+          </a:xfrm>
+          <a:prstGeom prst="rect">
+            <a:avLst/>
+          </a:prstGeom>
+          <a:noFill/>
+          <a:ln/>
+        </p:spPr>
+        <p:txBody>
+          <a:bodyPr wrap="square" lIns="0" tIns="0" rIns="0" bIns="0" rtlCol="0" anchor="ctr"/>
+          <a:lstStyle/>
+          <a:p>
+            <a:pPr indent="0" marL="0">
+              <a:buNone/>
+            </a:pPr>
+            <a:r>
+              <a:rPr lang="en-US" sz="750" dirty="0">
+                <a:solidFill>
+                  <a:srgbClr val="1A1A1A"/>
+                </a:solidFill>
+                <a:latin typeface="Arial" pitchFamily="34" charset="0"/>
+                <a:ea typeface="Arial" pitchFamily="34" charset="-122"/>
+                <a:cs typeface="Arial" pitchFamily="34" charset="-120"/>
+              </a:rPr>
+              <a:t>11/08</a:t>
+            </a:r>
+            <a:endParaRPr lang="en-US" sz="750" dirty="0"/>
+          </a:p>
+        </p:txBody>
+      </p:sp>
+      <p:sp>
+        <p:nvSpPr>
+          <p:cNvPr id="128" name="Shape 126"/>
           <p:cNvSpPr/>
           <p:nvPr/>
         </p:nvSpPr>
@@ -13647,7 +14971,7 @@
       </p:sp>
       <p:sp>
         <p:nvSpPr>
-          <p:cNvPr id="122" name="Text 120"/>
+          <p:cNvPr id="129" name="Text 127"/>
           <p:cNvSpPr/>
           <p:nvPr/>
         </p:nvSpPr>
@@ -13688,7 +15012,7 @@
       </p:sp>
       <p:sp>
         <p:nvSpPr>
-          <p:cNvPr id="123" name="Shape 121"/>
+          <p:cNvPr id="130" name="Shape 128"/>
           <p:cNvSpPr/>
           <p:nvPr/>
         </p:nvSpPr>
@@ -13713,14 +15037,14 @@
       </p:sp>
       <p:sp>
         <p:nvSpPr>
-          <p:cNvPr id="124" name="Shape 122"/>
-          <p:cNvSpPr/>
-          <p:nvPr/>
-        </p:nvSpPr>
-        <p:spPr>
-          <a:xfrm>
-            <a:off x="7256417" y="5106924"/>
-            <a:ext cx="1018903" cy="192024"/>
+          <p:cNvPr id="131" name="Shape 129"/>
+          <p:cNvSpPr/>
+          <p:nvPr/>
+        </p:nvSpPr>
+        <p:spPr>
+          <a:xfrm>
+            <a:off x="7630015" y="5106924"/>
+            <a:ext cx="354190" cy="192024"/>
           </a:xfrm>
           <a:prstGeom prst="rect">
             <a:avLst/>
@@ -13738,13 +15062,13 @@
       </p:sp>
       <p:sp>
         <p:nvSpPr>
-          <p:cNvPr id="125" name="Shape 123"/>
-          <p:cNvSpPr/>
-          <p:nvPr/>
-        </p:nvSpPr>
-        <p:spPr>
-          <a:xfrm>
-            <a:off x="8193024" y="5120640"/>
+          <p:cNvPr id="132" name="Shape 130"/>
+          <p:cNvSpPr/>
+          <p:nvPr/>
+        </p:nvSpPr>
+        <p:spPr>
+          <a:xfrm>
+            <a:off x="7901909" y="5120640"/>
             <a:ext cx="164592" cy="164592"/>
           </a:xfrm>
           <a:prstGeom prst="ellipse">
@@ -13763,13 +15087,13 @@
       </p:sp>
       <p:sp>
         <p:nvSpPr>
-          <p:cNvPr id="126" name="Text 124"/>
-          <p:cNvSpPr/>
-          <p:nvPr/>
-        </p:nvSpPr>
-        <p:spPr>
-          <a:xfrm>
-            <a:off x="8193024" y="5111496"/>
+          <p:cNvPr id="133" name="Text 131"/>
+          <p:cNvSpPr/>
+          <p:nvPr/>
+        </p:nvSpPr>
+        <p:spPr>
+          <a:xfrm>
+            <a:off x="7901909" y="5111496"/>
             <a:ext cx="164592" cy="164592"/>
           </a:xfrm>
           <a:prstGeom prst="rect">
@@ -13802,14 +15126,491 @@
       </p:sp>
       <p:sp>
         <p:nvSpPr>
-          <p:cNvPr id="127" name="Shape 125"/>
-          <p:cNvSpPr/>
-          <p:nvPr/>
-        </p:nvSpPr>
-        <p:spPr>
-          <a:xfrm>
-            <a:off x="8129762" y="1115568"/>
-            <a:ext cx="0" cy="4315968"/>
+          <p:cNvPr id="134" name="Text 132"/>
+          <p:cNvSpPr/>
+          <p:nvPr/>
+        </p:nvSpPr>
+        <p:spPr>
+          <a:xfrm>
+            <a:off x="8093933" y="4974336"/>
+            <a:ext cx="1005840" cy="457200"/>
+          </a:xfrm>
+          <a:prstGeom prst="rect">
+            <a:avLst/>
+          </a:prstGeom>
+          <a:noFill/>
+          <a:ln/>
+        </p:spPr>
+        <p:txBody>
+          <a:bodyPr wrap="square" lIns="0" tIns="0" rIns="0" bIns="0" rtlCol="0" anchor="ctr"/>
+          <a:lstStyle/>
+          <a:p>
+            <a:pPr indent="0" marL="0">
+              <a:buNone/>
+            </a:pPr>
+            <a:r>
+              <a:rPr lang="en-US" sz="750" dirty="0">
+                <a:solidFill>
+                  <a:srgbClr val="1A1A1A"/>
+                </a:solidFill>
+                <a:latin typeface="Arial" pitchFamily="34" charset="0"/>
+                <a:ea typeface="Arial" pitchFamily="34" charset="-122"/>
+                <a:cs typeface="Arial" pitchFamily="34" charset="-120"/>
+              </a:rPr>
+              <a:t>13/08</a:t>
+            </a:r>
+            <a:endParaRPr lang="en-US" sz="750" dirty="0"/>
+          </a:p>
+        </p:txBody>
+      </p:sp>
+      <p:sp>
+        <p:nvSpPr>
+          <p:cNvPr id="135" name="Shape 133"/>
+          <p:cNvSpPr/>
+          <p:nvPr/>
+        </p:nvSpPr>
+        <p:spPr>
+          <a:xfrm>
+            <a:off x="320040" y="5431536"/>
+            <a:ext cx="11521440" cy="457200"/>
+          </a:xfrm>
+          <a:prstGeom prst="rect">
+            <a:avLst/>
+          </a:prstGeom>
+          <a:solidFill>
+            <a:srgbClr val="FFFFFF"/>
+          </a:solidFill>
+          <a:ln w="6350">
+            <a:solidFill>
+              <a:srgbClr val="D9D9D9"/>
+            </a:solidFill>
+            <a:prstDash val="solid"/>
+          </a:ln>
+        </p:spPr>
+      </p:sp>
+      <p:sp>
+        <p:nvSpPr>
+          <p:cNvPr id="136" name="Text 134"/>
+          <p:cNvSpPr/>
+          <p:nvPr/>
+        </p:nvSpPr>
+        <p:spPr>
+          <a:xfrm>
+            <a:off x="393192" y="5431536"/>
+            <a:ext cx="3785616" cy="457200"/>
+          </a:xfrm>
+          <a:prstGeom prst="rect">
+            <a:avLst/>
+          </a:prstGeom>
+          <a:noFill/>
+          <a:ln/>
+        </p:spPr>
+        <p:txBody>
+          <a:bodyPr wrap="square" lIns="0" tIns="0" rIns="0" bIns="0" rtlCol="0" anchor="ctr">
+            <a:normAutofit/>
+          </a:bodyPr>
+          <a:lstStyle/>
+          <a:p>
+            <a:pPr indent="0" marL="0">
+              <a:buNone/>
+            </a:pPr>
+            <a:r>
+              <a:rPr lang="en-US" sz="900" b="1" dirty="0">
+                <a:solidFill>
+                  <a:srgbClr val="1B3B6F"/>
+                </a:solidFill>
+                <a:latin typeface="Arial" pitchFamily="34" charset="0"/>
+                <a:ea typeface="Arial" pitchFamily="34" charset="-122"/>
+                <a:cs typeface="Arial" pitchFamily="34" charset="-120"/>
+              </a:rPr>
+              <a:t>SP10 - [Proativo] OPORTUNIDADE | Atualização de Cadastro Existente no Locavia Antes da Geração do Contrato</a:t>
+            </a:r>
+            <a:endParaRPr lang="en-US" sz="900" dirty="0"/>
+          </a:p>
+        </p:txBody>
+      </p:sp>
+      <p:sp>
+        <p:nvSpPr>
+          <p:cNvPr id="137" name="Shape 135"/>
+          <p:cNvSpPr/>
+          <p:nvPr/>
+        </p:nvSpPr>
+        <p:spPr>
+          <a:xfrm>
+            <a:off x="4407408" y="5586984"/>
+            <a:ext cx="146304" cy="146304"/>
+          </a:xfrm>
+          <a:prstGeom prst="ellipse">
+            <a:avLst/>
+          </a:prstGeom>
+          <a:solidFill>
+            <a:srgbClr val="BFBFBF"/>
+          </a:solidFill>
+          <a:ln w="6350">
+            <a:solidFill>
+              <a:srgbClr val="FFFFFF"/>
+            </a:solidFill>
+            <a:prstDash val="solid"/>
+          </a:ln>
+        </p:spPr>
+      </p:sp>
+      <p:sp>
+        <p:nvSpPr>
+          <p:cNvPr id="138" name="Shape 136"/>
+          <p:cNvSpPr/>
+          <p:nvPr/>
+        </p:nvSpPr>
+        <p:spPr>
+          <a:xfrm>
+            <a:off x="8093373" y="5564124"/>
+            <a:ext cx="351764" cy="192024"/>
+          </a:xfrm>
+          <a:prstGeom prst="rect">
+            <a:avLst/>
+          </a:prstGeom>
+          <a:solidFill>
+            <a:srgbClr val="BFBFBF"/>
+          </a:solidFill>
+          <a:ln w="12700">
+            <a:solidFill>
+              <a:srgbClr val="BFBFBF"/>
+            </a:solidFill>
+            <a:prstDash val="solid"/>
+          </a:ln>
+        </p:spPr>
+      </p:sp>
+      <p:sp>
+        <p:nvSpPr>
+          <p:cNvPr id="139" name="Shape 137"/>
+          <p:cNvSpPr/>
+          <p:nvPr/>
+        </p:nvSpPr>
+        <p:spPr>
+          <a:xfrm>
+            <a:off x="8362841" y="5577840"/>
+            <a:ext cx="164592" cy="164592"/>
+          </a:xfrm>
+          <a:prstGeom prst="ellipse">
+            <a:avLst/>
+          </a:prstGeom>
+          <a:solidFill>
+            <a:srgbClr val="9E9E9E"/>
+          </a:solidFill>
+          <a:ln w="9525">
+            <a:solidFill>
+              <a:srgbClr val="FFFFFF"/>
+            </a:solidFill>
+            <a:prstDash val="solid"/>
+          </a:ln>
+        </p:spPr>
+      </p:sp>
+      <p:sp>
+        <p:nvSpPr>
+          <p:cNvPr id="140" name="Text 138"/>
+          <p:cNvSpPr/>
+          <p:nvPr/>
+        </p:nvSpPr>
+        <p:spPr>
+          <a:xfrm>
+            <a:off x="8362841" y="5568696"/>
+            <a:ext cx="164592" cy="164592"/>
+          </a:xfrm>
+          <a:prstGeom prst="rect">
+            <a:avLst/>
+          </a:prstGeom>
+          <a:noFill/>
+          <a:ln/>
+        </p:spPr>
+        <p:txBody>
+          <a:bodyPr wrap="square" lIns="0" tIns="0" rIns="0" bIns="0" rtlCol="0" anchor="ctr"/>
+          <a:lstStyle/>
+          <a:p>
+            <a:pPr algn="ctr" indent="0" marL="0">
+              <a:buNone/>
+            </a:pPr>
+            <a:r>
+              <a:rPr lang="en-US" sz="800" b="1" dirty="0">
+                <a:solidFill>
+                  <a:srgbClr val="FFFFFF"/>
+                </a:solidFill>
+                <a:latin typeface="Arial" pitchFamily="34" charset="0"/>
+                <a:ea typeface="Arial" pitchFamily="34" charset="-122"/>
+                <a:cs typeface="Arial" pitchFamily="34" charset="-120"/>
+              </a:rPr>
+              <a:t>✓</a:t>
+            </a:r>
+            <a:endParaRPr lang="en-US" sz="800" dirty="0"/>
+          </a:p>
+        </p:txBody>
+      </p:sp>
+      <p:sp>
+        <p:nvSpPr>
+          <p:cNvPr id="141" name="Text 139"/>
+          <p:cNvSpPr/>
+          <p:nvPr/>
+        </p:nvSpPr>
+        <p:spPr>
+          <a:xfrm>
+            <a:off x="8554865" y="5431536"/>
+            <a:ext cx="1005840" cy="457200"/>
+          </a:xfrm>
+          <a:prstGeom prst="rect">
+            <a:avLst/>
+          </a:prstGeom>
+          <a:noFill/>
+          <a:ln/>
+        </p:spPr>
+        <p:txBody>
+          <a:bodyPr wrap="square" lIns="0" tIns="0" rIns="0" bIns="0" rtlCol="0" anchor="ctr"/>
+          <a:lstStyle/>
+          <a:p>
+            <a:pPr indent="0" marL="0">
+              <a:buNone/>
+            </a:pPr>
+            <a:r>
+              <a:rPr lang="en-US" sz="750" dirty="0">
+                <a:solidFill>
+                  <a:srgbClr val="1A1A1A"/>
+                </a:solidFill>
+                <a:latin typeface="Arial" pitchFamily="34" charset="0"/>
+                <a:ea typeface="Arial" pitchFamily="34" charset="-122"/>
+                <a:cs typeface="Arial" pitchFamily="34" charset="-120"/>
+              </a:rPr>
+              <a:t>25/08</a:t>
+            </a:r>
+            <a:endParaRPr lang="en-US" sz="750" dirty="0"/>
+          </a:p>
+        </p:txBody>
+      </p:sp>
+      <p:sp>
+        <p:nvSpPr>
+          <p:cNvPr id="142" name="Shape 140"/>
+          <p:cNvSpPr/>
+          <p:nvPr/>
+        </p:nvSpPr>
+        <p:spPr>
+          <a:xfrm>
+            <a:off x="320040" y="5888736"/>
+            <a:ext cx="11521440" cy="457200"/>
+          </a:xfrm>
+          <a:prstGeom prst="rect">
+            <a:avLst/>
+          </a:prstGeom>
+          <a:solidFill>
+            <a:srgbClr val="F5F7FA"/>
+          </a:solidFill>
+          <a:ln w="6350">
+            <a:solidFill>
+              <a:srgbClr val="D9D9D9"/>
+            </a:solidFill>
+            <a:prstDash val="solid"/>
+          </a:ln>
+        </p:spPr>
+      </p:sp>
+      <p:sp>
+        <p:nvSpPr>
+          <p:cNvPr id="143" name="Text 141"/>
+          <p:cNvSpPr/>
+          <p:nvPr/>
+        </p:nvSpPr>
+        <p:spPr>
+          <a:xfrm>
+            <a:off x="393192" y="5888736"/>
+            <a:ext cx="3785616" cy="457200"/>
+          </a:xfrm>
+          <a:prstGeom prst="rect">
+            <a:avLst/>
+          </a:prstGeom>
+          <a:noFill/>
+          <a:ln/>
+        </p:spPr>
+        <p:txBody>
+          <a:bodyPr wrap="square" lIns="0" tIns="0" rIns="0" bIns="0" rtlCol="0" anchor="ctr">
+            <a:normAutofit/>
+          </a:bodyPr>
+          <a:lstStyle/>
+          <a:p>
+            <a:pPr indent="0" marL="0">
+              <a:buNone/>
+            </a:pPr>
+            <a:r>
+              <a:rPr lang="en-US" sz="900" b="1" dirty="0">
+                <a:solidFill>
+                  <a:srgbClr val="1B3B6F"/>
+                </a:solidFill>
+                <a:latin typeface="Arial" pitchFamily="34" charset="0"/>
+                <a:ea typeface="Arial" pitchFamily="34" charset="-122"/>
+                <a:cs typeface="Arial" pitchFamily="34" charset="-120"/>
+              </a:rPr>
+              <a:t>SP10 - [REFORMA] OPORTUNIDADE - Exposição de Campos Financeiros na Oportunidade Livre e Integração com Site, BRIM e LocaviaWeb</a:t>
+            </a:r>
+            <a:endParaRPr lang="en-US" sz="900" dirty="0"/>
+          </a:p>
+        </p:txBody>
+      </p:sp>
+      <p:sp>
+        <p:nvSpPr>
+          <p:cNvPr id="144" name="Shape 142"/>
+          <p:cNvSpPr/>
+          <p:nvPr/>
+        </p:nvSpPr>
+        <p:spPr>
+          <a:xfrm>
+            <a:off x="4407408" y="6044184"/>
+            <a:ext cx="146304" cy="146304"/>
+          </a:xfrm>
+          <a:prstGeom prst="ellipse">
+            <a:avLst/>
+          </a:prstGeom>
+          <a:solidFill>
+            <a:srgbClr val="70AD47"/>
+          </a:solidFill>
+          <a:ln w="6350">
+            <a:solidFill>
+              <a:srgbClr val="FFFFFF"/>
+            </a:solidFill>
+            <a:prstDash val="solid"/>
+          </a:ln>
+        </p:spPr>
+      </p:sp>
+      <p:sp>
+        <p:nvSpPr>
+          <p:cNvPr id="145" name="Shape 143"/>
+          <p:cNvSpPr/>
+          <p:nvPr/>
+        </p:nvSpPr>
+        <p:spPr>
+          <a:xfrm>
+            <a:off x="8093373" y="6021324"/>
+            <a:ext cx="351764" cy="192024"/>
+          </a:xfrm>
+          <a:prstGeom prst="rect">
+            <a:avLst/>
+          </a:prstGeom>
+          <a:solidFill>
+            <a:srgbClr val="BFBFBF"/>
+          </a:solidFill>
+          <a:ln w="12700">
+            <a:solidFill>
+              <a:srgbClr val="BFBFBF"/>
+            </a:solidFill>
+            <a:prstDash val="solid"/>
+          </a:ln>
+        </p:spPr>
+      </p:sp>
+      <p:sp>
+        <p:nvSpPr>
+          <p:cNvPr id="146" name="Shape 144"/>
+          <p:cNvSpPr/>
+          <p:nvPr/>
+        </p:nvSpPr>
+        <p:spPr>
+          <a:xfrm>
+            <a:off x="8362841" y="6035040"/>
+            <a:ext cx="164592" cy="164592"/>
+          </a:xfrm>
+          <a:prstGeom prst="ellipse">
+            <a:avLst/>
+          </a:prstGeom>
+          <a:solidFill>
+            <a:srgbClr val="9E9E9E"/>
+          </a:solidFill>
+          <a:ln w="9525">
+            <a:solidFill>
+              <a:srgbClr val="FFFFFF"/>
+            </a:solidFill>
+            <a:prstDash val="solid"/>
+          </a:ln>
+        </p:spPr>
+      </p:sp>
+      <p:sp>
+        <p:nvSpPr>
+          <p:cNvPr id="147" name="Text 145"/>
+          <p:cNvSpPr/>
+          <p:nvPr/>
+        </p:nvSpPr>
+        <p:spPr>
+          <a:xfrm>
+            <a:off x="8362841" y="6025896"/>
+            <a:ext cx="164592" cy="164592"/>
+          </a:xfrm>
+          <a:prstGeom prst="rect">
+            <a:avLst/>
+          </a:prstGeom>
+          <a:noFill/>
+          <a:ln/>
+        </p:spPr>
+        <p:txBody>
+          <a:bodyPr wrap="square" lIns="0" tIns="0" rIns="0" bIns="0" rtlCol="0" anchor="ctr"/>
+          <a:lstStyle/>
+          <a:p>
+            <a:pPr algn="ctr" indent="0" marL="0">
+              <a:buNone/>
+            </a:pPr>
+            <a:r>
+              <a:rPr lang="en-US" sz="800" b="1" dirty="0">
+                <a:solidFill>
+                  <a:srgbClr val="FFFFFF"/>
+                </a:solidFill>
+                <a:latin typeface="Arial" pitchFamily="34" charset="0"/>
+                <a:ea typeface="Arial" pitchFamily="34" charset="-122"/>
+                <a:cs typeface="Arial" pitchFamily="34" charset="-120"/>
+              </a:rPr>
+              <a:t>✓</a:t>
+            </a:r>
+            <a:endParaRPr lang="en-US" sz="800" dirty="0"/>
+          </a:p>
+        </p:txBody>
+      </p:sp>
+      <p:sp>
+        <p:nvSpPr>
+          <p:cNvPr id="148" name="Text 146"/>
+          <p:cNvSpPr/>
+          <p:nvPr/>
+        </p:nvSpPr>
+        <p:spPr>
+          <a:xfrm>
+            <a:off x="8554865" y="5888736"/>
+            <a:ext cx="1005840" cy="457200"/>
+          </a:xfrm>
+          <a:prstGeom prst="rect">
+            <a:avLst/>
+          </a:prstGeom>
+          <a:noFill/>
+          <a:ln/>
+        </p:spPr>
+        <p:txBody>
+          <a:bodyPr wrap="square" lIns="0" tIns="0" rIns="0" bIns="0" rtlCol="0" anchor="ctr"/>
+          <a:lstStyle/>
+          <a:p>
+            <a:pPr indent="0" marL="0">
+              <a:buNone/>
+            </a:pPr>
+            <a:r>
+              <a:rPr lang="en-US" sz="750" dirty="0">
+                <a:solidFill>
+                  <a:srgbClr val="1A1A1A"/>
+                </a:solidFill>
+                <a:latin typeface="Arial" pitchFamily="34" charset="0"/>
+                <a:ea typeface="Arial" pitchFamily="34" charset="-122"/>
+                <a:cs typeface="Arial" pitchFamily="34" charset="-120"/>
+              </a:rPr>
+              <a:t>25/08</a:t>
+            </a:r>
+            <a:endParaRPr lang="en-US" sz="750" dirty="0"/>
+          </a:p>
+        </p:txBody>
+      </p:sp>
+      <p:sp>
+        <p:nvSpPr>
+          <p:cNvPr id="149" name="Shape 147"/>
+          <p:cNvSpPr/>
+          <p:nvPr/>
+        </p:nvSpPr>
+        <p:spPr>
+          <a:xfrm>
+            <a:off x="8202541" y="1115568"/>
+            <a:ext cx="0" cy="5230368"/>
           </a:xfrm>
           <a:prstGeom prst="line">
             <a:avLst/>
@@ -13825,13 +15626,13 @@
       </p:sp>
       <p:sp>
         <p:nvSpPr>
-          <p:cNvPr id="128" name="Shape 126"/>
-          <p:cNvSpPr/>
-          <p:nvPr/>
-        </p:nvSpPr>
-        <p:spPr>
-          <a:xfrm>
-            <a:off x="8093186" y="5394960"/>
+          <p:cNvPr id="150" name="Shape 148"/>
+          <p:cNvSpPr/>
+          <p:nvPr/>
+        </p:nvSpPr>
+        <p:spPr>
+          <a:xfrm>
+            <a:off x="8165965" y="6309360"/>
             <a:ext cx="73152" cy="73152"/>
           </a:xfrm>
           <a:prstGeom prst="ellipse">
@@ -13850,14 +15651,2836 @@
       </p:sp>
       <p:sp>
         <p:nvSpPr>
-          <p:cNvPr id="129" name="Shape 127"/>
+          <p:cNvPr id="151" name="Shape 149"/>
           <p:cNvSpPr/>
           <p:nvPr/>
         </p:nvSpPr>
         <p:spPr>
           <a:xfrm>
             <a:off x="320040" y="1115568"/>
-            <a:ext cx="11521440" cy="4315968"/>
+            <a:ext cx="11521440" cy="5230368"/>
+          </a:xfrm>
+          <a:prstGeom prst="rect">
+            <a:avLst/>
+          </a:prstGeom>
+          <a:ln w="12700">
+            <a:solidFill>
+              <a:srgbClr val="1B3B6F"/>
+            </a:solidFill>
+            <a:prstDash val="solid"/>
+          </a:ln>
+        </p:spPr>
+      </p:sp>
+    </p:spTree>
+  </p:cSld>
+  <p:clrMapOvr>
+    <a:masterClrMapping/>
+  </p:clrMapOvr>
+</p:sld>
+</file>
+
+<file path=ppt/slides/slide4.xml><?xml version="1.0" encoding="utf-8"?>
+<p:sld xmlns:a="http://schemas.openxmlformats.org/drawingml/2006/main" xmlns:r="http://schemas.openxmlformats.org/officeDocument/2006/relationships" xmlns:p="http://schemas.openxmlformats.org/presentationml/2006/main">
+  <p:cSld name="Slide 4">
+    <p:bg>
+      <p:bgPr>
+        <a:solidFill>
+          <a:srgbClr val="FFFFFF"/>
+        </a:solidFill>
+      </p:bgPr>
+    </p:bg>
+    <p:spTree>
+      <p:nvGrpSpPr>
+        <p:cNvPr id="1" name=""/>
+        <p:cNvGrpSpPr/>
+        <p:nvPr/>
+      </p:nvGrpSpPr>
+      <p:grpSpPr>
+        <a:xfrm>
+          <a:off x="0" y="0"/>
+          <a:ext cx="0" cy="0"/>
+          <a:chOff x="0" y="0"/>
+          <a:chExt cx="0" cy="0"/>
+        </a:xfrm>
+      </p:grpSpPr>
+      <p:sp>
+        <p:nvSpPr>
+          <p:cNvPr id="2" name="Shape 0"/>
+          <p:cNvSpPr/>
+          <p:nvPr/>
+        </p:nvSpPr>
+        <p:spPr>
+          <a:xfrm>
+            <a:off x="320040" y="256032"/>
+            <a:ext cx="146304" cy="146304"/>
+          </a:xfrm>
+          <a:prstGeom prst="ellipse">
+            <a:avLst/>
+          </a:prstGeom>
+          <a:solidFill>
+            <a:srgbClr val="FFFFFF"/>
+          </a:solidFill>
+          <a:ln w="15875">
+            <a:solidFill>
+              <a:srgbClr val="1B3B6F"/>
+            </a:solidFill>
+            <a:prstDash val="solid"/>
+          </a:ln>
+        </p:spPr>
+      </p:sp>
+      <p:sp>
+        <p:nvSpPr>
+          <p:cNvPr id="3" name="Shape 1"/>
+          <p:cNvSpPr/>
+          <p:nvPr/>
+        </p:nvSpPr>
+        <p:spPr>
+          <a:xfrm>
+            <a:off x="521208" y="256032"/>
+            <a:ext cx="146304" cy="146304"/>
+          </a:xfrm>
+          <a:prstGeom prst="ellipse">
+            <a:avLst/>
+          </a:prstGeom>
+          <a:solidFill>
+            <a:srgbClr val="FFFFFF"/>
+          </a:solidFill>
+          <a:ln w="15875">
+            <a:solidFill>
+              <a:srgbClr val="1B3B6F"/>
+            </a:solidFill>
+            <a:prstDash val="solid"/>
+          </a:ln>
+        </p:spPr>
+      </p:sp>
+      <p:sp>
+        <p:nvSpPr>
+          <p:cNvPr id="4" name="Shape 2"/>
+          <p:cNvSpPr/>
+          <p:nvPr/>
+        </p:nvSpPr>
+        <p:spPr>
+          <a:xfrm>
+            <a:off x="722376" y="256032"/>
+            <a:ext cx="146304" cy="146304"/>
+          </a:xfrm>
+          <a:prstGeom prst="ellipse">
+            <a:avLst/>
+          </a:prstGeom>
+          <a:solidFill>
+            <a:srgbClr val="FFFFFF"/>
+          </a:solidFill>
+          <a:ln w="15875">
+            <a:solidFill>
+              <a:srgbClr val="1B3B6F"/>
+            </a:solidFill>
+            <a:prstDash val="solid"/>
+          </a:ln>
+        </p:spPr>
+      </p:sp>
+      <p:sp>
+        <p:nvSpPr>
+          <p:cNvPr id="5" name="Shape 3"/>
+          <p:cNvSpPr/>
+          <p:nvPr/>
+        </p:nvSpPr>
+        <p:spPr>
+          <a:xfrm>
+            <a:off x="923544" y="256032"/>
+            <a:ext cx="146304" cy="146304"/>
+          </a:xfrm>
+          <a:prstGeom prst="ellipse">
+            <a:avLst/>
+          </a:prstGeom>
+          <a:solidFill>
+            <a:srgbClr val="FFFFFF"/>
+          </a:solidFill>
+          <a:ln w="15875">
+            <a:solidFill>
+              <a:srgbClr val="1B3B6F"/>
+            </a:solidFill>
+            <a:prstDash val="solid"/>
+          </a:ln>
+        </p:spPr>
+      </p:sp>
+      <p:sp>
+        <p:nvSpPr>
+          <p:cNvPr id="6" name="Text 4"/>
+          <p:cNvSpPr/>
+          <p:nvPr/>
+        </p:nvSpPr>
+        <p:spPr>
+          <a:xfrm>
+            <a:off x="1197864" y="146304"/>
+            <a:ext cx="8595360" cy="365760"/>
+          </a:xfrm>
+          <a:prstGeom prst="rect">
+            <a:avLst/>
+          </a:prstGeom>
+          <a:noFill/>
+          <a:ln/>
+        </p:spPr>
+        <p:txBody>
+          <a:bodyPr wrap="square" lIns="0" tIns="0" rIns="0" bIns="0" rtlCol="0" anchor="ctr">
+            <a:normAutofit/>
+          </a:bodyPr>
+          <a:lstStyle/>
+          <a:p>
+            <a:pPr indent="0" marL="0">
+              <a:buNone/>
+            </a:pPr>
+            <a:r>
+              <a:rPr lang="en-US" sz="1500" b="1" dirty="0">
+                <a:solidFill>
+                  <a:srgbClr val="1B3B6F"/>
+                </a:solidFill>
+                <a:latin typeface="Arial" pitchFamily="34" charset="0"/>
+                <a:ea typeface="Arial" pitchFamily="34" charset="-122"/>
+                <a:cs typeface="Arial" pitchFamily="34" charset="-120"/>
+              </a:rPr>
+              <a:t>[Squad Vendas] – </a:t>
+            </a:r>
+            <a:pPr indent="0" marL="0">
+              <a:buNone/>
+            </a:pPr>
+            <a:r>
+              <a:rPr lang="en-US" sz="1500" b="1" dirty="0">
+                <a:solidFill>
+                  <a:srgbClr val="1B3B6F"/>
+                </a:solidFill>
+                <a:latin typeface="Arial" pitchFamily="34" charset="0"/>
+                <a:ea typeface="Arial" pitchFamily="34" charset="-122"/>
+                <a:cs typeface="Arial" pitchFamily="34" charset="-120"/>
+              </a:rPr>
+              <a:t>Roadmap de Projetos e Melhorias Funil de Vendas - Livre (4/4)</a:t>
+            </a:r>
+            <a:endParaRPr lang="en-US" sz="1500" dirty="0"/>
+          </a:p>
+        </p:txBody>
+      </p:sp>
+      <p:sp>
+        <p:nvSpPr>
+          <p:cNvPr id="7" name="Text 5"/>
+          <p:cNvSpPr/>
+          <p:nvPr/>
+        </p:nvSpPr>
+        <p:spPr>
+          <a:xfrm>
+            <a:off x="10195560" y="146304"/>
+            <a:ext cx="1645920" cy="274320"/>
+          </a:xfrm>
+          <a:prstGeom prst="rect">
+            <a:avLst/>
+          </a:prstGeom>
+          <a:noFill/>
+          <a:ln/>
+        </p:spPr>
+        <p:txBody>
+          <a:bodyPr wrap="square" lIns="0" tIns="0" rIns="0" bIns="0" rtlCol="0" anchor="ctr"/>
+          <a:lstStyle/>
+          <a:p>
+            <a:pPr algn="r" indent="0" marL="0">
+              <a:buNone/>
+            </a:pPr>
+            <a:r>
+              <a:rPr lang="en-US" sz="1000" dirty="0">
+                <a:solidFill>
+                  <a:srgbClr val="616161"/>
+                </a:solidFill>
+                <a:latin typeface="Arial" pitchFamily="34" charset="0"/>
+                <a:ea typeface="Arial" pitchFamily="34" charset="-122"/>
+                <a:cs typeface="Arial" pitchFamily="34" charset="-120"/>
+              </a:rPr>
+              <a:t>Atualizado em 13/08</a:t>
+            </a:r>
+            <a:endParaRPr lang="en-US" sz="1000" dirty="0"/>
+          </a:p>
+        </p:txBody>
+      </p:sp>
+      <p:sp>
+        <p:nvSpPr>
+          <p:cNvPr id="8" name="Text 6"/>
+          <p:cNvSpPr/>
+          <p:nvPr/>
+        </p:nvSpPr>
+        <p:spPr>
+          <a:xfrm>
+            <a:off x="320040" y="530352"/>
+            <a:ext cx="1188720" cy="201168"/>
+          </a:xfrm>
+          <a:prstGeom prst="rect">
+            <a:avLst/>
+          </a:prstGeom>
+          <a:noFill/>
+          <a:ln/>
+        </p:spPr>
+        <p:txBody>
+          <a:bodyPr wrap="square" lIns="0" tIns="0" rIns="0" bIns="0" rtlCol="0" anchor="ctr"/>
+          <a:lstStyle/>
+          <a:p>
+            <a:pPr indent="0" marL="0">
+              <a:buNone/>
+            </a:pPr>
+            <a:r>
+              <a:rPr lang="en-US" sz="1000" b="1" dirty="0">
+                <a:solidFill>
+                  <a:srgbClr val="1B3B6F"/>
+                </a:solidFill>
+                <a:latin typeface="Arial" pitchFamily="34" charset="0"/>
+                <a:ea typeface="Arial" pitchFamily="34" charset="-122"/>
+                <a:cs typeface="Arial" pitchFamily="34" charset="-120"/>
+              </a:rPr>
+              <a:t>Status – Fase</a:t>
+            </a:r>
+            <a:endParaRPr lang="en-US" sz="1000" dirty="0"/>
+          </a:p>
+        </p:txBody>
+      </p:sp>
+      <p:sp>
+        <p:nvSpPr>
+          <p:cNvPr id="9" name="Shape 7"/>
+          <p:cNvSpPr/>
+          <p:nvPr/>
+        </p:nvSpPr>
+        <p:spPr>
+          <a:xfrm>
+            <a:off x="320040" y="676656"/>
+            <a:ext cx="137160" cy="137160"/>
+          </a:xfrm>
+          <a:prstGeom prst="ellipse">
+            <a:avLst/>
+          </a:prstGeom>
+          <a:solidFill>
+            <a:srgbClr val="BFBFBF"/>
+          </a:solidFill>
+          <a:ln w="6350">
+            <a:solidFill>
+              <a:srgbClr val="FFFFFF"/>
+            </a:solidFill>
+            <a:prstDash val="solid"/>
+          </a:ln>
+        </p:spPr>
+      </p:sp>
+      <p:sp>
+        <p:nvSpPr>
+          <p:cNvPr id="10" name="Text 8"/>
+          <p:cNvSpPr/>
+          <p:nvPr/>
+        </p:nvSpPr>
+        <p:spPr>
+          <a:xfrm>
+            <a:off x="475488" y="649224"/>
+            <a:ext cx="858073" cy="201168"/>
+          </a:xfrm>
+          <a:prstGeom prst="rect">
+            <a:avLst/>
+          </a:prstGeom>
+          <a:noFill/>
+          <a:ln/>
+        </p:spPr>
+        <p:txBody>
+          <a:bodyPr wrap="square" lIns="0" tIns="0" rIns="0" bIns="0" rtlCol="0" anchor="ctr"/>
+          <a:lstStyle/>
+          <a:p>
+            <a:pPr indent="0" marL="0">
+              <a:buNone/>
+            </a:pPr>
+            <a:r>
+              <a:rPr lang="en-US" sz="850" dirty="0">
+                <a:solidFill>
+                  <a:srgbClr val="1A1A1A"/>
+                </a:solidFill>
+                <a:latin typeface="Arial" pitchFamily="34" charset="0"/>
+                <a:ea typeface="Arial" pitchFamily="34" charset="-122"/>
+                <a:cs typeface="Arial" pitchFamily="34" charset="-120"/>
+              </a:rPr>
+              <a:t>Não iniciado</a:t>
+            </a:r>
+            <a:endParaRPr lang="en-US" sz="850" dirty="0"/>
+          </a:p>
+        </p:txBody>
+      </p:sp>
+      <p:sp>
+        <p:nvSpPr>
+          <p:cNvPr id="11" name="Shape 9"/>
+          <p:cNvSpPr/>
+          <p:nvPr/>
+        </p:nvSpPr>
+        <p:spPr>
+          <a:xfrm>
+            <a:off x="1443289" y="676656"/>
+            <a:ext cx="137160" cy="137160"/>
+          </a:xfrm>
+          <a:prstGeom prst="ellipse">
+            <a:avLst/>
+          </a:prstGeom>
+          <a:solidFill>
+            <a:srgbClr val="70AD47"/>
+          </a:solidFill>
+          <a:ln w="6350">
+            <a:solidFill>
+              <a:srgbClr val="FFFFFF"/>
+            </a:solidFill>
+            <a:prstDash val="solid"/>
+          </a:ln>
+        </p:spPr>
+      </p:sp>
+      <p:sp>
+        <p:nvSpPr>
+          <p:cNvPr id="12" name="Text 10"/>
+          <p:cNvSpPr/>
+          <p:nvPr/>
+        </p:nvSpPr>
+        <p:spPr>
+          <a:xfrm>
+            <a:off x="1598737" y="649224"/>
+            <a:ext cx="572049" cy="201168"/>
+          </a:xfrm>
+          <a:prstGeom prst="rect">
+            <a:avLst/>
+          </a:prstGeom>
+          <a:noFill/>
+          <a:ln/>
+        </p:spPr>
+        <p:txBody>
+          <a:bodyPr wrap="square" lIns="0" tIns="0" rIns="0" bIns="0" rtlCol="0" anchor="ctr"/>
+          <a:lstStyle/>
+          <a:p>
+            <a:pPr indent="0" marL="0">
+              <a:buNone/>
+            </a:pPr>
+            <a:r>
+              <a:rPr lang="en-US" sz="850" dirty="0">
+                <a:solidFill>
+                  <a:srgbClr val="1A1A1A"/>
+                </a:solidFill>
+                <a:latin typeface="Arial" pitchFamily="34" charset="0"/>
+                <a:ea typeface="Arial" pitchFamily="34" charset="-122"/>
+                <a:cs typeface="Arial" pitchFamily="34" charset="-120"/>
+              </a:rPr>
+              <a:t>No prazo</a:t>
+            </a:r>
+            <a:endParaRPr lang="en-US" sz="850" dirty="0"/>
+          </a:p>
+        </p:txBody>
+      </p:sp>
+      <p:sp>
+        <p:nvSpPr>
+          <p:cNvPr id="13" name="Shape 11"/>
+          <p:cNvSpPr/>
+          <p:nvPr/>
+        </p:nvSpPr>
+        <p:spPr>
+          <a:xfrm>
+            <a:off x="2280514" y="676656"/>
+            <a:ext cx="137160" cy="137160"/>
+          </a:xfrm>
+          <a:prstGeom prst="ellipse">
+            <a:avLst/>
+          </a:prstGeom>
+          <a:solidFill>
+            <a:srgbClr val="FFC000"/>
+          </a:solidFill>
+          <a:ln w="6350">
+            <a:solidFill>
+              <a:srgbClr val="FFFFFF"/>
+            </a:solidFill>
+            <a:prstDash val="solid"/>
+          </a:ln>
+        </p:spPr>
+      </p:sp>
+      <p:sp>
+        <p:nvSpPr>
+          <p:cNvPr id="14" name="Text 12"/>
+          <p:cNvSpPr/>
+          <p:nvPr/>
+        </p:nvSpPr>
+        <p:spPr>
+          <a:xfrm>
+            <a:off x="2435962" y="649224"/>
+            <a:ext cx="1072591" cy="201168"/>
+          </a:xfrm>
+          <a:prstGeom prst="rect">
+            <a:avLst/>
+          </a:prstGeom>
+          <a:noFill/>
+          <a:ln/>
+        </p:spPr>
+        <p:txBody>
+          <a:bodyPr wrap="square" lIns="0" tIns="0" rIns="0" bIns="0" rtlCol="0" anchor="ctr"/>
+          <a:lstStyle/>
+          <a:p>
+            <a:pPr indent="0" marL="0">
+              <a:buNone/>
+            </a:pPr>
+            <a:r>
+              <a:rPr lang="en-US" sz="850" dirty="0">
+                <a:solidFill>
+                  <a:srgbClr val="1A1A1A"/>
+                </a:solidFill>
+                <a:latin typeface="Arial" pitchFamily="34" charset="0"/>
+                <a:ea typeface="Arial" pitchFamily="34" charset="-122"/>
+                <a:cs typeface="Arial" pitchFamily="34" charset="-120"/>
+              </a:rPr>
+              <a:t>Risco de atraso</a:t>
+            </a:r>
+            <a:endParaRPr lang="en-US" sz="850" dirty="0"/>
+          </a:p>
+        </p:txBody>
+      </p:sp>
+      <p:sp>
+        <p:nvSpPr>
+          <p:cNvPr id="15" name="Shape 13"/>
+          <p:cNvSpPr/>
+          <p:nvPr/>
+        </p:nvSpPr>
+        <p:spPr>
+          <a:xfrm>
+            <a:off x="3618281" y="676656"/>
+            <a:ext cx="137160" cy="137160"/>
+          </a:xfrm>
+          <a:prstGeom prst="ellipse">
+            <a:avLst/>
+          </a:prstGeom>
+          <a:solidFill>
+            <a:srgbClr val="C00000"/>
+          </a:solidFill>
+          <a:ln w="6350">
+            <a:solidFill>
+              <a:srgbClr val="FFFFFF"/>
+            </a:solidFill>
+            <a:prstDash val="solid"/>
+          </a:ln>
+        </p:spPr>
+      </p:sp>
+      <p:sp>
+        <p:nvSpPr>
+          <p:cNvPr id="16" name="Text 14"/>
+          <p:cNvSpPr/>
+          <p:nvPr/>
+        </p:nvSpPr>
+        <p:spPr>
+          <a:xfrm>
+            <a:off x="3773729" y="649224"/>
+            <a:ext cx="429036" cy="201168"/>
+          </a:xfrm>
+          <a:prstGeom prst="rect">
+            <a:avLst/>
+          </a:prstGeom>
+          <a:noFill/>
+          <a:ln/>
+        </p:spPr>
+        <p:txBody>
+          <a:bodyPr wrap="square" lIns="0" tIns="0" rIns="0" bIns="0" rtlCol="0" anchor="ctr"/>
+          <a:lstStyle/>
+          <a:p>
+            <a:pPr indent="0" marL="0">
+              <a:buNone/>
+            </a:pPr>
+            <a:r>
+              <a:rPr lang="en-US" sz="850" dirty="0">
+                <a:solidFill>
+                  <a:srgbClr val="1A1A1A"/>
+                </a:solidFill>
+                <a:latin typeface="Arial" pitchFamily="34" charset="0"/>
+                <a:ea typeface="Arial" pitchFamily="34" charset="-122"/>
+                <a:cs typeface="Arial" pitchFamily="34" charset="-120"/>
+              </a:rPr>
+              <a:t>Atraso</a:t>
+            </a:r>
+            <a:endParaRPr lang="en-US" sz="850" dirty="0"/>
+          </a:p>
+        </p:txBody>
+      </p:sp>
+      <p:sp>
+        <p:nvSpPr>
+          <p:cNvPr id="17" name="Shape 15"/>
+          <p:cNvSpPr/>
+          <p:nvPr/>
+        </p:nvSpPr>
+        <p:spPr>
+          <a:xfrm>
+            <a:off x="4312493" y="676656"/>
+            <a:ext cx="137160" cy="137160"/>
+          </a:xfrm>
+          <a:prstGeom prst="ellipse">
+            <a:avLst/>
+          </a:prstGeom>
+          <a:solidFill>
+            <a:srgbClr val="E97132"/>
+          </a:solidFill>
+          <a:ln w="6350">
+            <a:solidFill>
+              <a:srgbClr val="FFFFFF"/>
+            </a:solidFill>
+            <a:prstDash val="solid"/>
+          </a:ln>
+        </p:spPr>
+      </p:sp>
+      <p:sp>
+        <p:nvSpPr>
+          <p:cNvPr id="18" name="Text 16"/>
+          <p:cNvSpPr/>
+          <p:nvPr/>
+        </p:nvSpPr>
+        <p:spPr>
+          <a:xfrm>
+            <a:off x="4467941" y="649224"/>
+            <a:ext cx="500543" cy="201168"/>
+          </a:xfrm>
+          <a:prstGeom prst="rect">
+            <a:avLst/>
+          </a:prstGeom>
+          <a:noFill/>
+          <a:ln/>
+        </p:spPr>
+        <p:txBody>
+          <a:bodyPr wrap="square" lIns="0" tIns="0" rIns="0" bIns="0" rtlCol="0" anchor="ctr"/>
+          <a:lstStyle/>
+          <a:p>
+            <a:pPr indent="0" marL="0">
+              <a:buNone/>
+            </a:pPr>
+            <a:r>
+              <a:rPr lang="en-US" sz="850" dirty="0">
+                <a:solidFill>
+                  <a:srgbClr val="1A1A1A"/>
+                </a:solidFill>
+                <a:latin typeface="Arial" pitchFamily="34" charset="0"/>
+                <a:ea typeface="Arial" pitchFamily="34" charset="-122"/>
+                <a:cs typeface="Arial" pitchFamily="34" charset="-120"/>
+              </a:rPr>
+              <a:t>Pausado</a:t>
+            </a:r>
+            <a:endParaRPr lang="en-US" sz="850" dirty="0"/>
+          </a:p>
+        </p:txBody>
+      </p:sp>
+      <p:sp>
+        <p:nvSpPr>
+          <p:cNvPr id="19" name="Text 17"/>
+          <p:cNvSpPr/>
+          <p:nvPr/>
+        </p:nvSpPr>
+        <p:spPr>
+          <a:xfrm>
+            <a:off x="5215372" y="530352"/>
+            <a:ext cx="1417320" cy="201168"/>
+          </a:xfrm>
+          <a:prstGeom prst="rect">
+            <a:avLst/>
+          </a:prstGeom>
+          <a:noFill/>
+          <a:ln/>
+        </p:spPr>
+        <p:txBody>
+          <a:bodyPr wrap="square" lIns="0" tIns="0" rIns="0" bIns="0" rtlCol="0" anchor="ctr"/>
+          <a:lstStyle/>
+          <a:p>
+            <a:pPr indent="0" marL="0">
+              <a:buNone/>
+            </a:pPr>
+            <a:r>
+              <a:rPr lang="en-US" sz="1000" b="1" dirty="0">
+                <a:solidFill>
+                  <a:srgbClr val="1B3B6F"/>
+                </a:solidFill>
+                <a:latin typeface="Arial" pitchFamily="34" charset="0"/>
+                <a:ea typeface="Arial" pitchFamily="34" charset="-122"/>
+                <a:cs typeface="Arial" pitchFamily="34" charset="-120"/>
+              </a:rPr>
+              <a:t>Status – Entregas</a:t>
+            </a:r>
+            <a:endParaRPr lang="en-US" sz="1000" dirty="0"/>
+          </a:p>
+        </p:txBody>
+      </p:sp>
+      <p:sp>
+        <p:nvSpPr>
+          <p:cNvPr id="20" name="Shape 18"/>
+          <p:cNvSpPr/>
+          <p:nvPr/>
+        </p:nvSpPr>
+        <p:spPr>
+          <a:xfrm rot="5400000">
+            <a:off x="5215372" y="667512"/>
+            <a:ext cx="137160" cy="137160"/>
+          </a:xfrm>
+          <a:prstGeom prst="triangle">
+            <a:avLst/>
+          </a:prstGeom>
+          <a:solidFill>
+            <a:srgbClr val="1B3B6F"/>
+          </a:solidFill>
+          <a:ln w="12700">
+            <a:solidFill>
+              <a:srgbClr val="1B3B6F"/>
+            </a:solidFill>
+            <a:prstDash val="solid"/>
+          </a:ln>
+        </p:spPr>
+      </p:sp>
+      <p:sp>
+        <p:nvSpPr>
+          <p:cNvPr id="21" name="Text 19"/>
+          <p:cNvSpPr/>
+          <p:nvPr/>
+        </p:nvSpPr>
+        <p:spPr>
+          <a:xfrm>
+            <a:off x="5379964" y="649224"/>
+            <a:ext cx="429036" cy="201168"/>
+          </a:xfrm>
+          <a:prstGeom prst="rect">
+            <a:avLst/>
+          </a:prstGeom>
+          <a:noFill/>
+          <a:ln/>
+        </p:spPr>
+        <p:txBody>
+          <a:bodyPr wrap="square" lIns="0" tIns="0" rIns="0" bIns="0" rtlCol="0" anchor="ctr"/>
+          <a:lstStyle/>
+          <a:p>
+            <a:pPr indent="0" marL="0">
+              <a:buNone/>
+            </a:pPr>
+            <a:r>
+              <a:rPr lang="en-US" sz="850" dirty="0">
+                <a:solidFill>
+                  <a:srgbClr val="1A1A1A"/>
+                </a:solidFill>
+                <a:latin typeface="Arial" pitchFamily="34" charset="0"/>
+                <a:ea typeface="Arial" pitchFamily="34" charset="-122"/>
+                <a:cs typeface="Arial" pitchFamily="34" charset="-120"/>
+              </a:rPr>
+              <a:t>Início</a:t>
+            </a:r>
+            <a:endParaRPr lang="en-US" sz="850" dirty="0"/>
+          </a:p>
+        </p:txBody>
+      </p:sp>
+      <p:sp>
+        <p:nvSpPr>
+          <p:cNvPr id="22" name="Shape 20"/>
+          <p:cNvSpPr/>
+          <p:nvPr/>
+        </p:nvSpPr>
+        <p:spPr>
+          <a:xfrm>
+            <a:off x="5918728" y="667512"/>
+            <a:ext cx="155448" cy="155448"/>
+          </a:xfrm>
+          <a:prstGeom prst="ellipse">
+            <a:avLst/>
+          </a:prstGeom>
+          <a:solidFill>
+            <a:srgbClr val="9E9E9E"/>
+          </a:solidFill>
+          <a:ln w="9525">
+            <a:solidFill>
+              <a:srgbClr val="FFFFFF"/>
+            </a:solidFill>
+            <a:prstDash val="solid"/>
+          </a:ln>
+        </p:spPr>
+      </p:sp>
+      <p:sp>
+        <p:nvSpPr>
+          <p:cNvPr id="23" name="Text 21"/>
+          <p:cNvSpPr/>
+          <p:nvPr/>
+        </p:nvSpPr>
+        <p:spPr>
+          <a:xfrm>
+            <a:off x="5918728" y="653796"/>
+            <a:ext cx="155448" cy="155448"/>
+          </a:xfrm>
+          <a:prstGeom prst="rect">
+            <a:avLst/>
+          </a:prstGeom>
+          <a:noFill/>
+          <a:ln/>
+        </p:spPr>
+        <p:txBody>
+          <a:bodyPr wrap="square" lIns="0" tIns="0" rIns="0" bIns="0" rtlCol="0" anchor="ctr"/>
+          <a:lstStyle/>
+          <a:p>
+            <a:pPr algn="ctr" indent="0" marL="0">
+              <a:buNone/>
+            </a:pPr>
+            <a:r>
+              <a:rPr lang="en-US" sz="800" b="1" dirty="0">
+                <a:solidFill>
+                  <a:srgbClr val="FFFFFF"/>
+                </a:solidFill>
+                <a:latin typeface="Arial" pitchFamily="34" charset="0"/>
+                <a:ea typeface="Arial" pitchFamily="34" charset="-122"/>
+                <a:cs typeface="Arial" pitchFamily="34" charset="-120"/>
+              </a:rPr>
+              <a:t>✓</a:t>
+            </a:r>
+            <a:endParaRPr lang="en-US" sz="800" dirty="0"/>
+          </a:p>
+        </p:txBody>
+      </p:sp>
+      <p:sp>
+        <p:nvSpPr>
+          <p:cNvPr id="24" name="Text 22"/>
+          <p:cNvSpPr/>
+          <p:nvPr/>
+        </p:nvSpPr>
+        <p:spPr>
+          <a:xfrm>
+            <a:off x="6092464" y="630936"/>
+            <a:ext cx="572049" cy="274320"/>
+          </a:xfrm>
+          <a:prstGeom prst="rect">
+            <a:avLst/>
+          </a:prstGeom>
+          <a:noFill/>
+          <a:ln/>
+        </p:spPr>
+        <p:txBody>
+          <a:bodyPr wrap="square" lIns="0" tIns="0" rIns="0" bIns="0" rtlCol="0" anchor="ctr"/>
+          <a:lstStyle/>
+          <a:p>
+            <a:pPr indent="0" marL="0">
+              <a:buNone/>
+            </a:pPr>
+            <a:r>
+              <a:rPr lang="en-US" sz="850" dirty="0">
+                <a:solidFill>
+                  <a:srgbClr val="1A1A1A"/>
+                </a:solidFill>
+                <a:latin typeface="Arial" pitchFamily="34" charset="0"/>
+                <a:ea typeface="Arial" pitchFamily="34" charset="-122"/>
+                <a:cs typeface="Arial" pitchFamily="34" charset="-120"/>
+              </a:rPr>
+              <a:t>Previsão</a:t>
+            </a:r>
+            <a:endParaRPr lang="en-US" sz="850" dirty="0"/>
+          </a:p>
+        </p:txBody>
+      </p:sp>
+      <p:sp>
+        <p:nvSpPr>
+          <p:cNvPr id="25" name="Shape 23"/>
+          <p:cNvSpPr/>
+          <p:nvPr/>
+        </p:nvSpPr>
+        <p:spPr>
+          <a:xfrm>
+            <a:off x="6774241" y="667512"/>
+            <a:ext cx="155448" cy="155448"/>
+          </a:xfrm>
+          <a:prstGeom prst="ellipse">
+            <a:avLst/>
+          </a:prstGeom>
+          <a:solidFill>
+            <a:srgbClr val="4CAF50"/>
+          </a:solidFill>
+          <a:ln w="9525">
+            <a:solidFill>
+              <a:srgbClr val="FFFFFF"/>
+            </a:solidFill>
+            <a:prstDash val="solid"/>
+          </a:ln>
+        </p:spPr>
+      </p:sp>
+      <p:sp>
+        <p:nvSpPr>
+          <p:cNvPr id="26" name="Text 24"/>
+          <p:cNvSpPr/>
+          <p:nvPr/>
+        </p:nvSpPr>
+        <p:spPr>
+          <a:xfrm>
+            <a:off x="6774241" y="653796"/>
+            <a:ext cx="155448" cy="155448"/>
+          </a:xfrm>
+          <a:prstGeom prst="rect">
+            <a:avLst/>
+          </a:prstGeom>
+          <a:noFill/>
+          <a:ln/>
+        </p:spPr>
+        <p:txBody>
+          <a:bodyPr wrap="square" lIns="0" tIns="0" rIns="0" bIns="0" rtlCol="0" anchor="ctr"/>
+          <a:lstStyle/>
+          <a:p>
+            <a:pPr algn="ctr" indent="0" marL="0">
+              <a:buNone/>
+            </a:pPr>
+            <a:r>
+              <a:rPr lang="en-US" sz="800" b="1" dirty="0">
+                <a:solidFill>
+                  <a:srgbClr val="FFFFFF"/>
+                </a:solidFill>
+                <a:latin typeface="Arial" pitchFamily="34" charset="0"/>
+                <a:ea typeface="Arial" pitchFamily="34" charset="-122"/>
+                <a:cs typeface="Arial" pitchFamily="34" charset="-120"/>
+              </a:rPr>
+              <a:t>✓</a:t>
+            </a:r>
+            <a:endParaRPr lang="en-US" sz="800" dirty="0"/>
+          </a:p>
+        </p:txBody>
+      </p:sp>
+      <p:sp>
+        <p:nvSpPr>
+          <p:cNvPr id="27" name="Text 25"/>
+          <p:cNvSpPr/>
+          <p:nvPr/>
+        </p:nvSpPr>
+        <p:spPr>
+          <a:xfrm>
+            <a:off x="6947977" y="630936"/>
+            <a:ext cx="1287109" cy="274320"/>
+          </a:xfrm>
+          <a:prstGeom prst="rect">
+            <a:avLst/>
+          </a:prstGeom>
+          <a:noFill/>
+          <a:ln/>
+        </p:spPr>
+        <p:txBody>
+          <a:bodyPr wrap="square" lIns="0" tIns="0" rIns="0" bIns="0" rtlCol="0" anchor="ctr"/>
+          <a:lstStyle/>
+          <a:p>
+            <a:pPr indent="0" marL="0">
+              <a:buNone/>
+            </a:pPr>
+            <a:r>
+              <a:rPr lang="en-US" sz="850" dirty="0">
+                <a:solidFill>
+                  <a:srgbClr val="1A1A1A"/>
+                </a:solidFill>
+                <a:latin typeface="Arial" pitchFamily="34" charset="0"/>
+                <a:ea typeface="Arial" pitchFamily="34" charset="-122"/>
+                <a:cs typeface="Arial" pitchFamily="34" charset="-120"/>
+              </a:rPr>
+              <a:t>Concluída no prazo</a:t>
+            </a:r>
+            <a:endParaRPr lang="en-US" sz="850" dirty="0"/>
+          </a:p>
+        </p:txBody>
+      </p:sp>
+      <p:sp>
+        <p:nvSpPr>
+          <p:cNvPr id="28" name="Shape 26"/>
+          <p:cNvSpPr/>
+          <p:nvPr/>
+        </p:nvSpPr>
+        <p:spPr>
+          <a:xfrm>
+            <a:off x="8344814" y="667512"/>
+            <a:ext cx="155448" cy="155448"/>
+          </a:xfrm>
+          <a:prstGeom prst="ellipse">
+            <a:avLst/>
+          </a:prstGeom>
+          <a:solidFill>
+            <a:srgbClr val="E67E22"/>
+          </a:solidFill>
+          <a:ln w="9525">
+            <a:solidFill>
+              <a:srgbClr val="FFFFFF"/>
+            </a:solidFill>
+            <a:prstDash val="solid"/>
+          </a:ln>
+        </p:spPr>
+      </p:sp>
+      <p:sp>
+        <p:nvSpPr>
+          <p:cNvPr id="29" name="Text 27"/>
+          <p:cNvSpPr/>
+          <p:nvPr/>
+        </p:nvSpPr>
+        <p:spPr>
+          <a:xfrm>
+            <a:off x="8344814" y="653796"/>
+            <a:ext cx="155448" cy="155448"/>
+          </a:xfrm>
+          <a:prstGeom prst="rect">
+            <a:avLst/>
+          </a:prstGeom>
+          <a:noFill/>
+          <a:ln/>
+        </p:spPr>
+        <p:txBody>
+          <a:bodyPr wrap="square" lIns="0" tIns="0" rIns="0" bIns="0" rtlCol="0" anchor="ctr"/>
+          <a:lstStyle/>
+          <a:p>
+            <a:pPr algn="ctr" indent="0" marL="0">
+              <a:buNone/>
+            </a:pPr>
+            <a:r>
+              <a:rPr lang="en-US" sz="800" b="1" dirty="0">
+                <a:solidFill>
+                  <a:srgbClr val="FFFFFF"/>
+                </a:solidFill>
+                <a:latin typeface="Arial" pitchFamily="34" charset="0"/>
+                <a:ea typeface="Arial" pitchFamily="34" charset="-122"/>
+                <a:cs typeface="Arial" pitchFamily="34" charset="-120"/>
+              </a:rPr>
+              <a:t>✓</a:t>
+            </a:r>
+            <a:endParaRPr lang="en-US" sz="800" dirty="0"/>
+          </a:p>
+        </p:txBody>
+      </p:sp>
+      <p:sp>
+        <p:nvSpPr>
+          <p:cNvPr id="30" name="Text 28"/>
+          <p:cNvSpPr/>
+          <p:nvPr/>
+        </p:nvSpPr>
+        <p:spPr>
+          <a:xfrm>
+            <a:off x="8518550" y="630936"/>
+            <a:ext cx="1430122" cy="274320"/>
+          </a:xfrm>
+          <a:prstGeom prst="rect">
+            <a:avLst/>
+          </a:prstGeom>
+          <a:noFill/>
+          <a:ln/>
+        </p:spPr>
+        <p:txBody>
+          <a:bodyPr wrap="square" lIns="0" tIns="0" rIns="0" bIns="0" rtlCol="0" anchor="ctr"/>
+          <a:lstStyle/>
+          <a:p>
+            <a:pPr indent="0" marL="0">
+              <a:buNone/>
+            </a:pPr>
+            <a:r>
+              <a:rPr lang="en-US" sz="850" dirty="0">
+                <a:solidFill>
+                  <a:srgbClr val="1A1A1A"/>
+                </a:solidFill>
+                <a:latin typeface="Arial" pitchFamily="34" charset="0"/>
+                <a:ea typeface="Arial" pitchFamily="34" charset="-122"/>
+                <a:cs typeface="Arial" pitchFamily="34" charset="-120"/>
+              </a:rPr>
+              <a:t>Concluída com atraso</a:t>
+            </a:r>
+            <a:endParaRPr lang="en-US" sz="850" dirty="0"/>
+          </a:p>
+        </p:txBody>
+      </p:sp>
+      <p:sp>
+        <p:nvSpPr>
+          <p:cNvPr id="31" name="Shape 29"/>
+          <p:cNvSpPr/>
+          <p:nvPr/>
+        </p:nvSpPr>
+        <p:spPr>
+          <a:xfrm>
+            <a:off x="320040" y="1115568"/>
+            <a:ext cx="3931920" cy="658368"/>
+          </a:xfrm>
+          <a:prstGeom prst="rect">
+            <a:avLst/>
+          </a:prstGeom>
+          <a:solidFill>
+            <a:srgbClr val="1B3B6F"/>
+          </a:solidFill>
+          <a:ln w="6350">
+            <a:solidFill>
+              <a:srgbClr val="1B3B6F"/>
+            </a:solidFill>
+            <a:prstDash val="solid"/>
+          </a:ln>
+        </p:spPr>
+      </p:sp>
+      <p:sp>
+        <p:nvSpPr>
+          <p:cNvPr id="32" name="Text 30"/>
+          <p:cNvSpPr/>
+          <p:nvPr/>
+        </p:nvSpPr>
+        <p:spPr>
+          <a:xfrm>
+            <a:off x="411480" y="1115568"/>
+            <a:ext cx="3749040" cy="658368"/>
+          </a:xfrm>
+          <a:prstGeom prst="rect">
+            <a:avLst/>
+          </a:prstGeom>
+          <a:noFill/>
+          <a:ln/>
+        </p:spPr>
+        <p:txBody>
+          <a:bodyPr wrap="square" lIns="0" tIns="0" rIns="0" bIns="0" rtlCol="0" anchor="ctr"/>
+          <a:lstStyle/>
+          <a:p>
+            <a:pPr indent="0" marL="0">
+              <a:buNone/>
+            </a:pPr>
+            <a:r>
+              <a:rPr lang="en-US" sz="1000" b="1" dirty="0">
+                <a:solidFill>
+                  <a:srgbClr val="FFFFFF"/>
+                </a:solidFill>
+                <a:latin typeface="Arial" pitchFamily="34" charset="0"/>
+                <a:ea typeface="Arial" pitchFamily="34" charset="-122"/>
+                <a:cs typeface="Arial" pitchFamily="34" charset="-120"/>
+              </a:rPr>
+              <a:t>Entrega/Fase</a:t>
+            </a:r>
+            <a:endParaRPr lang="en-US" sz="1000" dirty="0"/>
+          </a:p>
+        </p:txBody>
+      </p:sp>
+      <p:sp>
+        <p:nvSpPr>
+          <p:cNvPr id="33" name="Shape 31"/>
+          <p:cNvSpPr/>
+          <p:nvPr/>
+        </p:nvSpPr>
+        <p:spPr>
+          <a:xfrm>
+            <a:off x="4251960" y="1115568"/>
+            <a:ext cx="457200" cy="658368"/>
+          </a:xfrm>
+          <a:prstGeom prst="rect">
+            <a:avLst/>
+          </a:prstGeom>
+          <a:solidFill>
+            <a:srgbClr val="1B3B6F"/>
+          </a:solidFill>
+          <a:ln w="6350">
+            <a:solidFill>
+              <a:srgbClr val="1B3B6F"/>
+            </a:solidFill>
+            <a:prstDash val="solid"/>
+          </a:ln>
+        </p:spPr>
+      </p:sp>
+      <p:sp>
+        <p:nvSpPr>
+          <p:cNvPr id="34" name="Text 32"/>
+          <p:cNvSpPr/>
+          <p:nvPr/>
+        </p:nvSpPr>
+        <p:spPr>
+          <a:xfrm>
+            <a:off x="4251960" y="1115568"/>
+            <a:ext cx="457200" cy="658368"/>
+          </a:xfrm>
+          <a:prstGeom prst="rect">
+            <a:avLst/>
+          </a:prstGeom>
+          <a:noFill/>
+          <a:ln/>
+        </p:spPr>
+        <p:txBody>
+          <a:bodyPr wrap="square" lIns="0" tIns="0" rIns="0" bIns="0" rtlCol="0" anchor="ctr"/>
+          <a:lstStyle/>
+          <a:p>
+            <a:pPr algn="ctr" indent="0" marL="0">
+              <a:buNone/>
+            </a:pPr>
+            <a:r>
+              <a:rPr lang="en-US" sz="900" b="1" dirty="0">
+                <a:solidFill>
+                  <a:srgbClr val="FFFFFF"/>
+                </a:solidFill>
+                <a:latin typeface="Arial" pitchFamily="34" charset="0"/>
+                <a:ea typeface="Arial" pitchFamily="34" charset="-122"/>
+                <a:cs typeface="Arial" pitchFamily="34" charset="-120"/>
+              </a:rPr>
+              <a:t>Status</a:t>
+            </a:r>
+            <a:endParaRPr lang="en-US" sz="900" dirty="0"/>
+          </a:p>
+        </p:txBody>
+      </p:sp>
+      <p:sp>
+        <p:nvSpPr>
+          <p:cNvPr id="35" name="Shape 33"/>
+          <p:cNvSpPr/>
+          <p:nvPr/>
+        </p:nvSpPr>
+        <p:spPr>
+          <a:xfrm>
+            <a:off x="4709160" y="1115568"/>
+            <a:ext cx="7132320" cy="219456"/>
+          </a:xfrm>
+          <a:prstGeom prst="rect">
+            <a:avLst/>
+          </a:prstGeom>
+          <a:solidFill>
+            <a:srgbClr val="0F2545"/>
+          </a:solidFill>
+          <a:ln w="6350">
+            <a:solidFill>
+              <a:srgbClr val="0F2545"/>
+            </a:solidFill>
+            <a:prstDash val="solid"/>
+          </a:ln>
+        </p:spPr>
+      </p:sp>
+      <p:sp>
+        <p:nvSpPr>
+          <p:cNvPr id="36" name="Text 34"/>
+          <p:cNvSpPr/>
+          <p:nvPr/>
+        </p:nvSpPr>
+        <p:spPr>
+          <a:xfrm>
+            <a:off x="4709160" y="1115568"/>
+            <a:ext cx="7132320" cy="219456"/>
+          </a:xfrm>
+          <a:prstGeom prst="rect">
+            <a:avLst/>
+          </a:prstGeom>
+          <a:noFill/>
+          <a:ln/>
+        </p:spPr>
+        <p:txBody>
+          <a:bodyPr wrap="square" lIns="0" tIns="0" rIns="0" bIns="0" rtlCol="0" anchor="ctr"/>
+          <a:lstStyle/>
+          <a:p>
+            <a:pPr algn="ctr" indent="0" marL="0">
+              <a:buNone/>
+            </a:pPr>
+            <a:r>
+              <a:rPr lang="en-US" sz="900" b="1" dirty="0">
+                <a:solidFill>
+                  <a:srgbClr val="FFFFFF"/>
+                </a:solidFill>
+                <a:latin typeface="Arial" pitchFamily="34" charset="0"/>
+                <a:ea typeface="Arial" pitchFamily="34" charset="-122"/>
+                <a:cs typeface="Arial" pitchFamily="34" charset="-120"/>
+              </a:rPr>
+              <a:t>2026</a:t>
+            </a:r>
+            <a:endParaRPr lang="en-US" sz="900" dirty="0"/>
+          </a:p>
+        </p:txBody>
+      </p:sp>
+      <p:sp>
+        <p:nvSpPr>
+          <p:cNvPr id="37" name="Shape 35"/>
+          <p:cNvSpPr/>
+          <p:nvPr/>
+        </p:nvSpPr>
+        <p:spPr>
+          <a:xfrm>
+            <a:off x="4709160" y="1335024"/>
+            <a:ext cx="1018903" cy="237744"/>
+          </a:xfrm>
+          <a:prstGeom prst="rect">
+            <a:avLst/>
+          </a:prstGeom>
+          <a:solidFill>
+            <a:srgbClr val="1B3B6F"/>
+          </a:solidFill>
+          <a:ln w="9525">
+            <a:solidFill>
+              <a:srgbClr val="FFFFFF"/>
+            </a:solidFill>
+            <a:prstDash val="solid"/>
+          </a:ln>
+        </p:spPr>
+      </p:sp>
+      <p:sp>
+        <p:nvSpPr>
+          <p:cNvPr id="38" name="Text 36"/>
+          <p:cNvSpPr/>
+          <p:nvPr/>
+        </p:nvSpPr>
+        <p:spPr>
+          <a:xfrm>
+            <a:off x="4709160" y="1335024"/>
+            <a:ext cx="1018903" cy="237744"/>
+          </a:xfrm>
+          <a:prstGeom prst="rect">
+            <a:avLst/>
+          </a:prstGeom>
+          <a:noFill/>
+          <a:ln/>
+        </p:spPr>
+        <p:txBody>
+          <a:bodyPr wrap="square" lIns="0" tIns="0" rIns="0" bIns="0" rtlCol="0" anchor="ctr"/>
+          <a:lstStyle/>
+          <a:p>
+            <a:pPr algn="ctr" indent="0" marL="0">
+              <a:buNone/>
+            </a:pPr>
+            <a:r>
+              <a:rPr lang="en-US" sz="1000" b="1" dirty="0">
+                <a:solidFill>
+                  <a:srgbClr val="FFFFFF"/>
+                </a:solidFill>
+                <a:latin typeface="Arial" pitchFamily="34" charset="0"/>
+                <a:ea typeface="Arial" pitchFamily="34" charset="-122"/>
+                <a:cs typeface="Arial" pitchFamily="34" charset="-120"/>
+              </a:rPr>
+              <a:t>Maio</a:t>
+            </a:r>
+            <a:endParaRPr lang="en-US" sz="1000" dirty="0"/>
+          </a:p>
+        </p:txBody>
+      </p:sp>
+      <p:sp>
+        <p:nvSpPr>
+          <p:cNvPr id="39" name="Shape 37"/>
+          <p:cNvSpPr/>
+          <p:nvPr/>
+        </p:nvSpPr>
+        <p:spPr>
+          <a:xfrm>
+            <a:off x="5728063" y="1335024"/>
+            <a:ext cx="1018903" cy="237744"/>
+          </a:xfrm>
+          <a:prstGeom prst="rect">
+            <a:avLst/>
+          </a:prstGeom>
+          <a:solidFill>
+            <a:srgbClr val="1B3B6F"/>
+          </a:solidFill>
+          <a:ln w="9525">
+            <a:solidFill>
+              <a:srgbClr val="FFFFFF"/>
+            </a:solidFill>
+            <a:prstDash val="solid"/>
+          </a:ln>
+        </p:spPr>
+      </p:sp>
+      <p:sp>
+        <p:nvSpPr>
+          <p:cNvPr id="40" name="Text 38"/>
+          <p:cNvSpPr/>
+          <p:nvPr/>
+        </p:nvSpPr>
+        <p:spPr>
+          <a:xfrm>
+            <a:off x="5728063" y="1335024"/>
+            <a:ext cx="1018903" cy="237744"/>
+          </a:xfrm>
+          <a:prstGeom prst="rect">
+            <a:avLst/>
+          </a:prstGeom>
+          <a:noFill/>
+          <a:ln/>
+        </p:spPr>
+        <p:txBody>
+          <a:bodyPr wrap="square" lIns="0" tIns="0" rIns="0" bIns="0" rtlCol="0" anchor="ctr"/>
+          <a:lstStyle/>
+          <a:p>
+            <a:pPr algn="ctr" indent="0" marL="0">
+              <a:buNone/>
+            </a:pPr>
+            <a:r>
+              <a:rPr lang="en-US" sz="1000" b="1" dirty="0">
+                <a:solidFill>
+                  <a:srgbClr val="FFFFFF"/>
+                </a:solidFill>
+                <a:latin typeface="Arial" pitchFamily="34" charset="0"/>
+                <a:ea typeface="Arial" pitchFamily="34" charset="-122"/>
+                <a:cs typeface="Arial" pitchFamily="34" charset="-120"/>
+              </a:rPr>
+              <a:t>Junho</a:t>
+            </a:r>
+            <a:endParaRPr lang="en-US" sz="1000" dirty="0"/>
+          </a:p>
+        </p:txBody>
+      </p:sp>
+      <p:sp>
+        <p:nvSpPr>
+          <p:cNvPr id="41" name="Shape 39"/>
+          <p:cNvSpPr/>
+          <p:nvPr/>
+        </p:nvSpPr>
+        <p:spPr>
+          <a:xfrm>
+            <a:off x="6746966" y="1335024"/>
+            <a:ext cx="1018903" cy="237744"/>
+          </a:xfrm>
+          <a:prstGeom prst="rect">
+            <a:avLst/>
+          </a:prstGeom>
+          <a:solidFill>
+            <a:srgbClr val="1B3B6F"/>
+          </a:solidFill>
+          <a:ln w="9525">
+            <a:solidFill>
+              <a:srgbClr val="FFFFFF"/>
+            </a:solidFill>
+            <a:prstDash val="solid"/>
+          </a:ln>
+        </p:spPr>
+      </p:sp>
+      <p:sp>
+        <p:nvSpPr>
+          <p:cNvPr id="42" name="Text 40"/>
+          <p:cNvSpPr/>
+          <p:nvPr/>
+        </p:nvSpPr>
+        <p:spPr>
+          <a:xfrm>
+            <a:off x="6746966" y="1335024"/>
+            <a:ext cx="1018903" cy="237744"/>
+          </a:xfrm>
+          <a:prstGeom prst="rect">
+            <a:avLst/>
+          </a:prstGeom>
+          <a:noFill/>
+          <a:ln/>
+        </p:spPr>
+        <p:txBody>
+          <a:bodyPr wrap="square" lIns="0" tIns="0" rIns="0" bIns="0" rtlCol="0" anchor="ctr"/>
+          <a:lstStyle/>
+          <a:p>
+            <a:pPr algn="ctr" indent="0" marL="0">
+              <a:buNone/>
+            </a:pPr>
+            <a:r>
+              <a:rPr lang="en-US" sz="1000" b="1" dirty="0">
+                <a:solidFill>
+                  <a:srgbClr val="FFFFFF"/>
+                </a:solidFill>
+                <a:latin typeface="Arial" pitchFamily="34" charset="0"/>
+                <a:ea typeface="Arial" pitchFamily="34" charset="-122"/>
+                <a:cs typeface="Arial" pitchFamily="34" charset="-120"/>
+              </a:rPr>
+              <a:t>Julho</a:t>
+            </a:r>
+            <a:endParaRPr lang="en-US" sz="1000" dirty="0"/>
+          </a:p>
+        </p:txBody>
+      </p:sp>
+      <p:sp>
+        <p:nvSpPr>
+          <p:cNvPr id="43" name="Shape 41"/>
+          <p:cNvSpPr/>
+          <p:nvPr/>
+        </p:nvSpPr>
+        <p:spPr>
+          <a:xfrm>
+            <a:off x="7765869" y="1335024"/>
+            <a:ext cx="1018903" cy="237744"/>
+          </a:xfrm>
+          <a:prstGeom prst="rect">
+            <a:avLst/>
+          </a:prstGeom>
+          <a:solidFill>
+            <a:srgbClr val="1B3B6F"/>
+          </a:solidFill>
+          <a:ln w="9525">
+            <a:solidFill>
+              <a:srgbClr val="FFFFFF"/>
+            </a:solidFill>
+            <a:prstDash val="solid"/>
+          </a:ln>
+        </p:spPr>
+      </p:sp>
+      <p:sp>
+        <p:nvSpPr>
+          <p:cNvPr id="44" name="Text 42"/>
+          <p:cNvSpPr/>
+          <p:nvPr/>
+        </p:nvSpPr>
+        <p:spPr>
+          <a:xfrm>
+            <a:off x="7765869" y="1335024"/>
+            <a:ext cx="1018903" cy="237744"/>
+          </a:xfrm>
+          <a:prstGeom prst="rect">
+            <a:avLst/>
+          </a:prstGeom>
+          <a:noFill/>
+          <a:ln/>
+        </p:spPr>
+        <p:txBody>
+          <a:bodyPr wrap="square" lIns="0" tIns="0" rIns="0" bIns="0" rtlCol="0" anchor="ctr"/>
+          <a:lstStyle/>
+          <a:p>
+            <a:pPr algn="ctr" indent="0" marL="0">
+              <a:buNone/>
+            </a:pPr>
+            <a:r>
+              <a:rPr lang="en-US" sz="1000" b="1" dirty="0">
+                <a:solidFill>
+                  <a:srgbClr val="FFFFFF"/>
+                </a:solidFill>
+                <a:latin typeface="Arial" pitchFamily="34" charset="0"/>
+                <a:ea typeface="Arial" pitchFamily="34" charset="-122"/>
+                <a:cs typeface="Arial" pitchFamily="34" charset="-120"/>
+              </a:rPr>
+              <a:t>Agosto</a:t>
+            </a:r>
+            <a:endParaRPr lang="en-US" sz="1000" dirty="0"/>
+          </a:p>
+        </p:txBody>
+      </p:sp>
+      <p:sp>
+        <p:nvSpPr>
+          <p:cNvPr id="45" name="Shape 43"/>
+          <p:cNvSpPr/>
+          <p:nvPr/>
+        </p:nvSpPr>
+        <p:spPr>
+          <a:xfrm>
+            <a:off x="8784771" y="1335024"/>
+            <a:ext cx="1018903" cy="237744"/>
+          </a:xfrm>
+          <a:prstGeom prst="rect">
+            <a:avLst/>
+          </a:prstGeom>
+          <a:solidFill>
+            <a:srgbClr val="1B3B6F"/>
+          </a:solidFill>
+          <a:ln w="9525">
+            <a:solidFill>
+              <a:srgbClr val="FFFFFF"/>
+            </a:solidFill>
+            <a:prstDash val="solid"/>
+          </a:ln>
+        </p:spPr>
+      </p:sp>
+      <p:sp>
+        <p:nvSpPr>
+          <p:cNvPr id="46" name="Text 44"/>
+          <p:cNvSpPr/>
+          <p:nvPr/>
+        </p:nvSpPr>
+        <p:spPr>
+          <a:xfrm>
+            <a:off x="8784771" y="1335024"/>
+            <a:ext cx="1018903" cy="237744"/>
+          </a:xfrm>
+          <a:prstGeom prst="rect">
+            <a:avLst/>
+          </a:prstGeom>
+          <a:noFill/>
+          <a:ln/>
+        </p:spPr>
+        <p:txBody>
+          <a:bodyPr wrap="square" lIns="0" tIns="0" rIns="0" bIns="0" rtlCol="0" anchor="ctr"/>
+          <a:lstStyle/>
+          <a:p>
+            <a:pPr algn="ctr" indent="0" marL="0">
+              <a:buNone/>
+            </a:pPr>
+            <a:r>
+              <a:rPr lang="en-US" sz="1000" b="1" dirty="0">
+                <a:solidFill>
+                  <a:srgbClr val="FFFFFF"/>
+                </a:solidFill>
+                <a:latin typeface="Arial" pitchFamily="34" charset="0"/>
+                <a:ea typeface="Arial" pitchFamily="34" charset="-122"/>
+                <a:cs typeface="Arial" pitchFamily="34" charset="-120"/>
+              </a:rPr>
+              <a:t>Setembro</a:t>
+            </a:r>
+            <a:endParaRPr lang="en-US" sz="1000" dirty="0"/>
+          </a:p>
+        </p:txBody>
+      </p:sp>
+      <p:sp>
+        <p:nvSpPr>
+          <p:cNvPr id="47" name="Shape 45"/>
+          <p:cNvSpPr/>
+          <p:nvPr/>
+        </p:nvSpPr>
+        <p:spPr>
+          <a:xfrm>
+            <a:off x="9803674" y="1335024"/>
+            <a:ext cx="1018903" cy="237744"/>
+          </a:xfrm>
+          <a:prstGeom prst="rect">
+            <a:avLst/>
+          </a:prstGeom>
+          <a:solidFill>
+            <a:srgbClr val="1B3B6F"/>
+          </a:solidFill>
+          <a:ln w="9525">
+            <a:solidFill>
+              <a:srgbClr val="FFFFFF"/>
+            </a:solidFill>
+            <a:prstDash val="solid"/>
+          </a:ln>
+        </p:spPr>
+      </p:sp>
+      <p:sp>
+        <p:nvSpPr>
+          <p:cNvPr id="48" name="Text 46"/>
+          <p:cNvSpPr/>
+          <p:nvPr/>
+        </p:nvSpPr>
+        <p:spPr>
+          <a:xfrm>
+            <a:off x="9803674" y="1335024"/>
+            <a:ext cx="1018903" cy="237744"/>
+          </a:xfrm>
+          <a:prstGeom prst="rect">
+            <a:avLst/>
+          </a:prstGeom>
+          <a:noFill/>
+          <a:ln/>
+        </p:spPr>
+        <p:txBody>
+          <a:bodyPr wrap="square" lIns="0" tIns="0" rIns="0" bIns="0" rtlCol="0" anchor="ctr"/>
+          <a:lstStyle/>
+          <a:p>
+            <a:pPr algn="ctr" indent="0" marL="0">
+              <a:buNone/>
+            </a:pPr>
+            <a:r>
+              <a:rPr lang="en-US" sz="1000" b="1" dirty="0">
+                <a:solidFill>
+                  <a:srgbClr val="FFFFFF"/>
+                </a:solidFill>
+                <a:latin typeface="Arial" pitchFamily="34" charset="0"/>
+                <a:ea typeface="Arial" pitchFamily="34" charset="-122"/>
+                <a:cs typeface="Arial" pitchFamily="34" charset="-120"/>
+              </a:rPr>
+              <a:t>Outubro</a:t>
+            </a:r>
+            <a:endParaRPr lang="en-US" sz="1000" dirty="0"/>
+          </a:p>
+        </p:txBody>
+      </p:sp>
+      <p:sp>
+        <p:nvSpPr>
+          <p:cNvPr id="49" name="Shape 47"/>
+          <p:cNvSpPr/>
+          <p:nvPr/>
+        </p:nvSpPr>
+        <p:spPr>
+          <a:xfrm>
+            <a:off x="10822577" y="1335024"/>
+            <a:ext cx="1018903" cy="237744"/>
+          </a:xfrm>
+          <a:prstGeom prst="rect">
+            <a:avLst/>
+          </a:prstGeom>
+          <a:solidFill>
+            <a:srgbClr val="1B3B6F"/>
+          </a:solidFill>
+          <a:ln w="9525">
+            <a:solidFill>
+              <a:srgbClr val="FFFFFF"/>
+            </a:solidFill>
+            <a:prstDash val="solid"/>
+          </a:ln>
+        </p:spPr>
+      </p:sp>
+      <p:sp>
+        <p:nvSpPr>
+          <p:cNvPr id="50" name="Text 48"/>
+          <p:cNvSpPr/>
+          <p:nvPr/>
+        </p:nvSpPr>
+        <p:spPr>
+          <a:xfrm>
+            <a:off x="10822577" y="1335024"/>
+            <a:ext cx="1018903" cy="237744"/>
+          </a:xfrm>
+          <a:prstGeom prst="rect">
+            <a:avLst/>
+          </a:prstGeom>
+          <a:noFill/>
+          <a:ln/>
+        </p:spPr>
+        <p:txBody>
+          <a:bodyPr wrap="square" lIns="0" tIns="0" rIns="0" bIns="0" rtlCol="0" anchor="ctr"/>
+          <a:lstStyle/>
+          <a:p>
+            <a:pPr algn="ctr" indent="0" marL="0">
+              <a:buNone/>
+            </a:pPr>
+            <a:r>
+              <a:rPr lang="en-US" sz="1000" b="1" dirty="0">
+                <a:solidFill>
+                  <a:srgbClr val="FFFFFF"/>
+                </a:solidFill>
+                <a:latin typeface="Arial" pitchFamily="34" charset="0"/>
+                <a:ea typeface="Arial" pitchFamily="34" charset="-122"/>
+                <a:cs typeface="Arial" pitchFamily="34" charset="-120"/>
+              </a:rPr>
+              <a:t>Novembro</a:t>
+            </a:r>
+            <a:endParaRPr lang="en-US" sz="1000" dirty="0"/>
+          </a:p>
+        </p:txBody>
+      </p:sp>
+      <p:sp>
+        <p:nvSpPr>
+          <p:cNvPr id="51" name="Shape 49"/>
+          <p:cNvSpPr/>
+          <p:nvPr/>
+        </p:nvSpPr>
+        <p:spPr>
+          <a:xfrm>
+            <a:off x="4709160" y="1572768"/>
+            <a:ext cx="509451" cy="201168"/>
+          </a:xfrm>
+          <a:prstGeom prst="rect">
+            <a:avLst/>
+          </a:prstGeom>
+          <a:solidFill>
+            <a:srgbClr val="1B3B6F"/>
+          </a:solidFill>
+          <a:ln w="6350">
+            <a:solidFill>
+              <a:srgbClr val="FFFFFF"/>
+            </a:solidFill>
+            <a:prstDash val="solid"/>
+          </a:ln>
+        </p:spPr>
+      </p:sp>
+      <p:sp>
+        <p:nvSpPr>
+          <p:cNvPr id="52" name="Text 50"/>
+          <p:cNvSpPr/>
+          <p:nvPr/>
+        </p:nvSpPr>
+        <p:spPr>
+          <a:xfrm>
+            <a:off x="4709160" y="1572768"/>
+            <a:ext cx="509451" cy="201168"/>
+          </a:xfrm>
+          <a:prstGeom prst="rect">
+            <a:avLst/>
+          </a:prstGeom>
+          <a:noFill/>
+          <a:ln/>
+        </p:spPr>
+        <p:txBody>
+          <a:bodyPr wrap="square" lIns="0" tIns="0" rIns="0" bIns="0" rtlCol="0" anchor="ctr"/>
+          <a:lstStyle/>
+          <a:p>
+            <a:pPr algn="ctr" indent="0" marL="0">
+              <a:buNone/>
+            </a:pPr>
+            <a:r>
+              <a:rPr lang="en-US" sz="700" dirty="0">
+                <a:solidFill>
+                  <a:srgbClr val="E0E0E0"/>
+                </a:solidFill>
+                <a:latin typeface="Arial" pitchFamily="34" charset="0"/>
+                <a:ea typeface="Arial" pitchFamily="34" charset="-122"/>
+                <a:cs typeface="Arial" pitchFamily="34" charset="-120"/>
+              </a:rPr>
+              <a:t>1-15</a:t>
+            </a:r>
+            <a:endParaRPr lang="en-US" sz="700" dirty="0"/>
+          </a:p>
+        </p:txBody>
+      </p:sp>
+      <p:sp>
+        <p:nvSpPr>
+          <p:cNvPr id="53" name="Shape 51"/>
+          <p:cNvSpPr/>
+          <p:nvPr/>
+        </p:nvSpPr>
+        <p:spPr>
+          <a:xfrm>
+            <a:off x="5218611" y="1572768"/>
+            <a:ext cx="509451" cy="201168"/>
+          </a:xfrm>
+          <a:prstGeom prst="rect">
+            <a:avLst/>
+          </a:prstGeom>
+          <a:solidFill>
+            <a:srgbClr val="1B3B6F"/>
+          </a:solidFill>
+          <a:ln w="6350">
+            <a:solidFill>
+              <a:srgbClr val="FFFFFF"/>
+            </a:solidFill>
+            <a:prstDash val="solid"/>
+          </a:ln>
+        </p:spPr>
+      </p:sp>
+      <p:sp>
+        <p:nvSpPr>
+          <p:cNvPr id="54" name="Text 52"/>
+          <p:cNvSpPr/>
+          <p:nvPr/>
+        </p:nvSpPr>
+        <p:spPr>
+          <a:xfrm>
+            <a:off x="5218611" y="1572768"/>
+            <a:ext cx="509451" cy="201168"/>
+          </a:xfrm>
+          <a:prstGeom prst="rect">
+            <a:avLst/>
+          </a:prstGeom>
+          <a:noFill/>
+          <a:ln/>
+        </p:spPr>
+        <p:txBody>
+          <a:bodyPr wrap="square" lIns="0" tIns="0" rIns="0" bIns="0" rtlCol="0" anchor="ctr"/>
+          <a:lstStyle/>
+          <a:p>
+            <a:pPr algn="ctr" indent="0" marL="0">
+              <a:buNone/>
+            </a:pPr>
+            <a:r>
+              <a:rPr lang="en-US" sz="700" dirty="0">
+                <a:solidFill>
+                  <a:srgbClr val="E0E0E0"/>
+                </a:solidFill>
+                <a:latin typeface="Arial" pitchFamily="34" charset="0"/>
+                <a:ea typeface="Arial" pitchFamily="34" charset="-122"/>
+                <a:cs typeface="Arial" pitchFamily="34" charset="-120"/>
+              </a:rPr>
+              <a:t>16-31</a:t>
+            </a:r>
+            <a:endParaRPr lang="en-US" sz="700" dirty="0"/>
+          </a:p>
+        </p:txBody>
+      </p:sp>
+      <p:sp>
+        <p:nvSpPr>
+          <p:cNvPr id="55" name="Shape 53"/>
+          <p:cNvSpPr/>
+          <p:nvPr/>
+        </p:nvSpPr>
+        <p:spPr>
+          <a:xfrm>
+            <a:off x="5728063" y="1572768"/>
+            <a:ext cx="509451" cy="201168"/>
+          </a:xfrm>
+          <a:prstGeom prst="rect">
+            <a:avLst/>
+          </a:prstGeom>
+          <a:solidFill>
+            <a:srgbClr val="1B3B6F"/>
+          </a:solidFill>
+          <a:ln w="6350">
+            <a:solidFill>
+              <a:srgbClr val="FFFFFF"/>
+            </a:solidFill>
+            <a:prstDash val="solid"/>
+          </a:ln>
+        </p:spPr>
+      </p:sp>
+      <p:sp>
+        <p:nvSpPr>
+          <p:cNvPr id="56" name="Text 54"/>
+          <p:cNvSpPr/>
+          <p:nvPr/>
+        </p:nvSpPr>
+        <p:spPr>
+          <a:xfrm>
+            <a:off x="5728063" y="1572768"/>
+            <a:ext cx="509451" cy="201168"/>
+          </a:xfrm>
+          <a:prstGeom prst="rect">
+            <a:avLst/>
+          </a:prstGeom>
+          <a:noFill/>
+          <a:ln/>
+        </p:spPr>
+        <p:txBody>
+          <a:bodyPr wrap="square" lIns="0" tIns="0" rIns="0" bIns="0" rtlCol="0" anchor="ctr"/>
+          <a:lstStyle/>
+          <a:p>
+            <a:pPr algn="ctr" indent="0" marL="0">
+              <a:buNone/>
+            </a:pPr>
+            <a:r>
+              <a:rPr lang="en-US" sz="700" dirty="0">
+                <a:solidFill>
+                  <a:srgbClr val="E0E0E0"/>
+                </a:solidFill>
+                <a:latin typeface="Arial" pitchFamily="34" charset="0"/>
+                <a:ea typeface="Arial" pitchFamily="34" charset="-122"/>
+                <a:cs typeface="Arial" pitchFamily="34" charset="-120"/>
+              </a:rPr>
+              <a:t>1-15</a:t>
+            </a:r>
+            <a:endParaRPr lang="en-US" sz="700" dirty="0"/>
+          </a:p>
+        </p:txBody>
+      </p:sp>
+      <p:sp>
+        <p:nvSpPr>
+          <p:cNvPr id="57" name="Shape 55"/>
+          <p:cNvSpPr/>
+          <p:nvPr/>
+        </p:nvSpPr>
+        <p:spPr>
+          <a:xfrm>
+            <a:off x="6237514" y="1572768"/>
+            <a:ext cx="509451" cy="201168"/>
+          </a:xfrm>
+          <a:prstGeom prst="rect">
+            <a:avLst/>
+          </a:prstGeom>
+          <a:solidFill>
+            <a:srgbClr val="1B3B6F"/>
+          </a:solidFill>
+          <a:ln w="6350">
+            <a:solidFill>
+              <a:srgbClr val="FFFFFF"/>
+            </a:solidFill>
+            <a:prstDash val="solid"/>
+          </a:ln>
+        </p:spPr>
+      </p:sp>
+      <p:sp>
+        <p:nvSpPr>
+          <p:cNvPr id="58" name="Text 56"/>
+          <p:cNvSpPr/>
+          <p:nvPr/>
+        </p:nvSpPr>
+        <p:spPr>
+          <a:xfrm>
+            <a:off x="6237514" y="1572768"/>
+            <a:ext cx="509451" cy="201168"/>
+          </a:xfrm>
+          <a:prstGeom prst="rect">
+            <a:avLst/>
+          </a:prstGeom>
+          <a:noFill/>
+          <a:ln/>
+        </p:spPr>
+        <p:txBody>
+          <a:bodyPr wrap="square" lIns="0" tIns="0" rIns="0" bIns="0" rtlCol="0" anchor="ctr"/>
+          <a:lstStyle/>
+          <a:p>
+            <a:pPr algn="ctr" indent="0" marL="0">
+              <a:buNone/>
+            </a:pPr>
+            <a:r>
+              <a:rPr lang="en-US" sz="700" dirty="0">
+                <a:solidFill>
+                  <a:srgbClr val="E0E0E0"/>
+                </a:solidFill>
+                <a:latin typeface="Arial" pitchFamily="34" charset="0"/>
+                <a:ea typeface="Arial" pitchFamily="34" charset="-122"/>
+                <a:cs typeface="Arial" pitchFamily="34" charset="-120"/>
+              </a:rPr>
+              <a:t>16-30</a:t>
+            </a:r>
+            <a:endParaRPr lang="en-US" sz="700" dirty="0"/>
+          </a:p>
+        </p:txBody>
+      </p:sp>
+      <p:sp>
+        <p:nvSpPr>
+          <p:cNvPr id="59" name="Shape 57"/>
+          <p:cNvSpPr/>
+          <p:nvPr/>
+        </p:nvSpPr>
+        <p:spPr>
+          <a:xfrm>
+            <a:off x="6746966" y="1572768"/>
+            <a:ext cx="509451" cy="201168"/>
+          </a:xfrm>
+          <a:prstGeom prst="rect">
+            <a:avLst/>
+          </a:prstGeom>
+          <a:solidFill>
+            <a:srgbClr val="1B3B6F"/>
+          </a:solidFill>
+          <a:ln w="6350">
+            <a:solidFill>
+              <a:srgbClr val="FFFFFF"/>
+            </a:solidFill>
+            <a:prstDash val="solid"/>
+          </a:ln>
+        </p:spPr>
+      </p:sp>
+      <p:sp>
+        <p:nvSpPr>
+          <p:cNvPr id="60" name="Text 58"/>
+          <p:cNvSpPr/>
+          <p:nvPr/>
+        </p:nvSpPr>
+        <p:spPr>
+          <a:xfrm>
+            <a:off x="6746966" y="1572768"/>
+            <a:ext cx="509451" cy="201168"/>
+          </a:xfrm>
+          <a:prstGeom prst="rect">
+            <a:avLst/>
+          </a:prstGeom>
+          <a:noFill/>
+          <a:ln/>
+        </p:spPr>
+        <p:txBody>
+          <a:bodyPr wrap="square" lIns="0" tIns="0" rIns="0" bIns="0" rtlCol="0" anchor="ctr"/>
+          <a:lstStyle/>
+          <a:p>
+            <a:pPr algn="ctr" indent="0" marL="0">
+              <a:buNone/>
+            </a:pPr>
+            <a:r>
+              <a:rPr lang="en-US" sz="700" dirty="0">
+                <a:solidFill>
+                  <a:srgbClr val="E0E0E0"/>
+                </a:solidFill>
+                <a:latin typeface="Arial" pitchFamily="34" charset="0"/>
+                <a:ea typeface="Arial" pitchFamily="34" charset="-122"/>
+                <a:cs typeface="Arial" pitchFamily="34" charset="-120"/>
+              </a:rPr>
+              <a:t>1-15</a:t>
+            </a:r>
+            <a:endParaRPr lang="en-US" sz="700" dirty="0"/>
+          </a:p>
+        </p:txBody>
+      </p:sp>
+      <p:sp>
+        <p:nvSpPr>
+          <p:cNvPr id="61" name="Shape 59"/>
+          <p:cNvSpPr/>
+          <p:nvPr/>
+        </p:nvSpPr>
+        <p:spPr>
+          <a:xfrm>
+            <a:off x="7256417" y="1572768"/>
+            <a:ext cx="509451" cy="201168"/>
+          </a:xfrm>
+          <a:prstGeom prst="rect">
+            <a:avLst/>
+          </a:prstGeom>
+          <a:solidFill>
+            <a:srgbClr val="1B3B6F"/>
+          </a:solidFill>
+          <a:ln w="6350">
+            <a:solidFill>
+              <a:srgbClr val="FFFFFF"/>
+            </a:solidFill>
+            <a:prstDash val="solid"/>
+          </a:ln>
+        </p:spPr>
+      </p:sp>
+      <p:sp>
+        <p:nvSpPr>
+          <p:cNvPr id="62" name="Text 60"/>
+          <p:cNvSpPr/>
+          <p:nvPr/>
+        </p:nvSpPr>
+        <p:spPr>
+          <a:xfrm>
+            <a:off x="7256417" y="1572768"/>
+            <a:ext cx="509451" cy="201168"/>
+          </a:xfrm>
+          <a:prstGeom prst="rect">
+            <a:avLst/>
+          </a:prstGeom>
+          <a:noFill/>
+          <a:ln/>
+        </p:spPr>
+        <p:txBody>
+          <a:bodyPr wrap="square" lIns="0" tIns="0" rIns="0" bIns="0" rtlCol="0" anchor="ctr"/>
+          <a:lstStyle/>
+          <a:p>
+            <a:pPr algn="ctr" indent="0" marL="0">
+              <a:buNone/>
+            </a:pPr>
+            <a:r>
+              <a:rPr lang="en-US" sz="700" dirty="0">
+                <a:solidFill>
+                  <a:srgbClr val="E0E0E0"/>
+                </a:solidFill>
+                <a:latin typeface="Arial" pitchFamily="34" charset="0"/>
+                <a:ea typeface="Arial" pitchFamily="34" charset="-122"/>
+                <a:cs typeface="Arial" pitchFamily="34" charset="-120"/>
+              </a:rPr>
+              <a:t>16-31</a:t>
+            </a:r>
+            <a:endParaRPr lang="en-US" sz="700" dirty="0"/>
+          </a:p>
+        </p:txBody>
+      </p:sp>
+      <p:sp>
+        <p:nvSpPr>
+          <p:cNvPr id="63" name="Shape 61"/>
+          <p:cNvSpPr/>
+          <p:nvPr/>
+        </p:nvSpPr>
+        <p:spPr>
+          <a:xfrm>
+            <a:off x="7765869" y="1572768"/>
+            <a:ext cx="509451" cy="201168"/>
+          </a:xfrm>
+          <a:prstGeom prst="rect">
+            <a:avLst/>
+          </a:prstGeom>
+          <a:solidFill>
+            <a:srgbClr val="1B3B6F"/>
+          </a:solidFill>
+          <a:ln w="6350">
+            <a:solidFill>
+              <a:srgbClr val="FFFFFF"/>
+            </a:solidFill>
+            <a:prstDash val="solid"/>
+          </a:ln>
+        </p:spPr>
+      </p:sp>
+      <p:sp>
+        <p:nvSpPr>
+          <p:cNvPr id="64" name="Text 62"/>
+          <p:cNvSpPr/>
+          <p:nvPr/>
+        </p:nvSpPr>
+        <p:spPr>
+          <a:xfrm>
+            <a:off x="7765869" y="1572768"/>
+            <a:ext cx="509451" cy="201168"/>
+          </a:xfrm>
+          <a:prstGeom prst="rect">
+            <a:avLst/>
+          </a:prstGeom>
+          <a:noFill/>
+          <a:ln/>
+        </p:spPr>
+        <p:txBody>
+          <a:bodyPr wrap="square" lIns="0" tIns="0" rIns="0" bIns="0" rtlCol="0" anchor="ctr"/>
+          <a:lstStyle/>
+          <a:p>
+            <a:pPr algn="ctr" indent="0" marL="0">
+              <a:buNone/>
+            </a:pPr>
+            <a:r>
+              <a:rPr lang="en-US" sz="700" dirty="0">
+                <a:solidFill>
+                  <a:srgbClr val="E0E0E0"/>
+                </a:solidFill>
+                <a:latin typeface="Arial" pitchFamily="34" charset="0"/>
+                <a:ea typeface="Arial" pitchFamily="34" charset="-122"/>
+                <a:cs typeface="Arial" pitchFamily="34" charset="-120"/>
+              </a:rPr>
+              <a:t>1-15</a:t>
+            </a:r>
+            <a:endParaRPr lang="en-US" sz="700" dirty="0"/>
+          </a:p>
+        </p:txBody>
+      </p:sp>
+      <p:sp>
+        <p:nvSpPr>
+          <p:cNvPr id="65" name="Shape 63"/>
+          <p:cNvSpPr/>
+          <p:nvPr/>
+        </p:nvSpPr>
+        <p:spPr>
+          <a:xfrm>
+            <a:off x="8275320" y="1572768"/>
+            <a:ext cx="509451" cy="201168"/>
+          </a:xfrm>
+          <a:prstGeom prst="rect">
+            <a:avLst/>
+          </a:prstGeom>
+          <a:solidFill>
+            <a:srgbClr val="1B3B6F"/>
+          </a:solidFill>
+          <a:ln w="6350">
+            <a:solidFill>
+              <a:srgbClr val="FFFFFF"/>
+            </a:solidFill>
+            <a:prstDash val="solid"/>
+          </a:ln>
+        </p:spPr>
+      </p:sp>
+      <p:sp>
+        <p:nvSpPr>
+          <p:cNvPr id="66" name="Text 64"/>
+          <p:cNvSpPr/>
+          <p:nvPr/>
+        </p:nvSpPr>
+        <p:spPr>
+          <a:xfrm>
+            <a:off x="8275320" y="1572768"/>
+            <a:ext cx="509451" cy="201168"/>
+          </a:xfrm>
+          <a:prstGeom prst="rect">
+            <a:avLst/>
+          </a:prstGeom>
+          <a:noFill/>
+          <a:ln/>
+        </p:spPr>
+        <p:txBody>
+          <a:bodyPr wrap="square" lIns="0" tIns="0" rIns="0" bIns="0" rtlCol="0" anchor="ctr"/>
+          <a:lstStyle/>
+          <a:p>
+            <a:pPr algn="ctr" indent="0" marL="0">
+              <a:buNone/>
+            </a:pPr>
+            <a:r>
+              <a:rPr lang="en-US" sz="700" dirty="0">
+                <a:solidFill>
+                  <a:srgbClr val="E0E0E0"/>
+                </a:solidFill>
+                <a:latin typeface="Arial" pitchFamily="34" charset="0"/>
+                <a:ea typeface="Arial" pitchFamily="34" charset="-122"/>
+                <a:cs typeface="Arial" pitchFamily="34" charset="-120"/>
+              </a:rPr>
+              <a:t>16-31</a:t>
+            </a:r>
+            <a:endParaRPr lang="en-US" sz="700" dirty="0"/>
+          </a:p>
+        </p:txBody>
+      </p:sp>
+      <p:sp>
+        <p:nvSpPr>
+          <p:cNvPr id="67" name="Shape 65"/>
+          <p:cNvSpPr/>
+          <p:nvPr/>
+        </p:nvSpPr>
+        <p:spPr>
+          <a:xfrm>
+            <a:off x="8784771" y="1572768"/>
+            <a:ext cx="509451" cy="201168"/>
+          </a:xfrm>
+          <a:prstGeom prst="rect">
+            <a:avLst/>
+          </a:prstGeom>
+          <a:solidFill>
+            <a:srgbClr val="1B3B6F"/>
+          </a:solidFill>
+          <a:ln w="6350">
+            <a:solidFill>
+              <a:srgbClr val="FFFFFF"/>
+            </a:solidFill>
+            <a:prstDash val="solid"/>
+          </a:ln>
+        </p:spPr>
+      </p:sp>
+      <p:sp>
+        <p:nvSpPr>
+          <p:cNvPr id="68" name="Text 66"/>
+          <p:cNvSpPr/>
+          <p:nvPr/>
+        </p:nvSpPr>
+        <p:spPr>
+          <a:xfrm>
+            <a:off x="8784771" y="1572768"/>
+            <a:ext cx="509451" cy="201168"/>
+          </a:xfrm>
+          <a:prstGeom prst="rect">
+            <a:avLst/>
+          </a:prstGeom>
+          <a:noFill/>
+          <a:ln/>
+        </p:spPr>
+        <p:txBody>
+          <a:bodyPr wrap="square" lIns="0" tIns="0" rIns="0" bIns="0" rtlCol="0" anchor="ctr"/>
+          <a:lstStyle/>
+          <a:p>
+            <a:pPr algn="ctr" indent="0" marL="0">
+              <a:buNone/>
+            </a:pPr>
+            <a:r>
+              <a:rPr lang="en-US" sz="700" dirty="0">
+                <a:solidFill>
+                  <a:srgbClr val="E0E0E0"/>
+                </a:solidFill>
+                <a:latin typeface="Arial" pitchFamily="34" charset="0"/>
+                <a:ea typeface="Arial" pitchFamily="34" charset="-122"/>
+                <a:cs typeface="Arial" pitchFamily="34" charset="-120"/>
+              </a:rPr>
+              <a:t>1-15</a:t>
+            </a:r>
+            <a:endParaRPr lang="en-US" sz="700" dirty="0"/>
+          </a:p>
+        </p:txBody>
+      </p:sp>
+      <p:sp>
+        <p:nvSpPr>
+          <p:cNvPr id="69" name="Shape 67"/>
+          <p:cNvSpPr/>
+          <p:nvPr/>
+        </p:nvSpPr>
+        <p:spPr>
+          <a:xfrm>
+            <a:off x="9294223" y="1572768"/>
+            <a:ext cx="509451" cy="201168"/>
+          </a:xfrm>
+          <a:prstGeom prst="rect">
+            <a:avLst/>
+          </a:prstGeom>
+          <a:solidFill>
+            <a:srgbClr val="1B3B6F"/>
+          </a:solidFill>
+          <a:ln w="6350">
+            <a:solidFill>
+              <a:srgbClr val="FFFFFF"/>
+            </a:solidFill>
+            <a:prstDash val="solid"/>
+          </a:ln>
+        </p:spPr>
+      </p:sp>
+      <p:sp>
+        <p:nvSpPr>
+          <p:cNvPr id="70" name="Text 68"/>
+          <p:cNvSpPr/>
+          <p:nvPr/>
+        </p:nvSpPr>
+        <p:spPr>
+          <a:xfrm>
+            <a:off x="9294223" y="1572768"/>
+            <a:ext cx="509451" cy="201168"/>
+          </a:xfrm>
+          <a:prstGeom prst="rect">
+            <a:avLst/>
+          </a:prstGeom>
+          <a:noFill/>
+          <a:ln/>
+        </p:spPr>
+        <p:txBody>
+          <a:bodyPr wrap="square" lIns="0" tIns="0" rIns="0" bIns="0" rtlCol="0" anchor="ctr"/>
+          <a:lstStyle/>
+          <a:p>
+            <a:pPr algn="ctr" indent="0" marL="0">
+              <a:buNone/>
+            </a:pPr>
+            <a:r>
+              <a:rPr lang="en-US" sz="700" dirty="0">
+                <a:solidFill>
+                  <a:srgbClr val="E0E0E0"/>
+                </a:solidFill>
+                <a:latin typeface="Arial" pitchFamily="34" charset="0"/>
+                <a:ea typeface="Arial" pitchFamily="34" charset="-122"/>
+                <a:cs typeface="Arial" pitchFamily="34" charset="-120"/>
+              </a:rPr>
+              <a:t>16-30</a:t>
+            </a:r>
+            <a:endParaRPr lang="en-US" sz="700" dirty="0"/>
+          </a:p>
+        </p:txBody>
+      </p:sp>
+      <p:sp>
+        <p:nvSpPr>
+          <p:cNvPr id="71" name="Shape 69"/>
+          <p:cNvSpPr/>
+          <p:nvPr/>
+        </p:nvSpPr>
+        <p:spPr>
+          <a:xfrm>
+            <a:off x="9803674" y="1572768"/>
+            <a:ext cx="509451" cy="201168"/>
+          </a:xfrm>
+          <a:prstGeom prst="rect">
+            <a:avLst/>
+          </a:prstGeom>
+          <a:solidFill>
+            <a:srgbClr val="1B3B6F"/>
+          </a:solidFill>
+          <a:ln w="6350">
+            <a:solidFill>
+              <a:srgbClr val="FFFFFF"/>
+            </a:solidFill>
+            <a:prstDash val="solid"/>
+          </a:ln>
+        </p:spPr>
+      </p:sp>
+      <p:sp>
+        <p:nvSpPr>
+          <p:cNvPr id="72" name="Text 70"/>
+          <p:cNvSpPr/>
+          <p:nvPr/>
+        </p:nvSpPr>
+        <p:spPr>
+          <a:xfrm>
+            <a:off x="9803674" y="1572768"/>
+            <a:ext cx="509451" cy="201168"/>
+          </a:xfrm>
+          <a:prstGeom prst="rect">
+            <a:avLst/>
+          </a:prstGeom>
+          <a:noFill/>
+          <a:ln/>
+        </p:spPr>
+        <p:txBody>
+          <a:bodyPr wrap="square" lIns="0" tIns="0" rIns="0" bIns="0" rtlCol="0" anchor="ctr"/>
+          <a:lstStyle/>
+          <a:p>
+            <a:pPr algn="ctr" indent="0" marL="0">
+              <a:buNone/>
+            </a:pPr>
+            <a:r>
+              <a:rPr lang="en-US" sz="700" dirty="0">
+                <a:solidFill>
+                  <a:srgbClr val="E0E0E0"/>
+                </a:solidFill>
+                <a:latin typeface="Arial" pitchFamily="34" charset="0"/>
+                <a:ea typeface="Arial" pitchFamily="34" charset="-122"/>
+                <a:cs typeface="Arial" pitchFamily="34" charset="-120"/>
+              </a:rPr>
+              <a:t>1-15</a:t>
+            </a:r>
+            <a:endParaRPr lang="en-US" sz="700" dirty="0"/>
+          </a:p>
+        </p:txBody>
+      </p:sp>
+      <p:sp>
+        <p:nvSpPr>
+          <p:cNvPr id="73" name="Shape 71"/>
+          <p:cNvSpPr/>
+          <p:nvPr/>
+        </p:nvSpPr>
+        <p:spPr>
+          <a:xfrm>
+            <a:off x="10313126" y="1572768"/>
+            <a:ext cx="509451" cy="201168"/>
+          </a:xfrm>
+          <a:prstGeom prst="rect">
+            <a:avLst/>
+          </a:prstGeom>
+          <a:solidFill>
+            <a:srgbClr val="1B3B6F"/>
+          </a:solidFill>
+          <a:ln w="6350">
+            <a:solidFill>
+              <a:srgbClr val="FFFFFF"/>
+            </a:solidFill>
+            <a:prstDash val="solid"/>
+          </a:ln>
+        </p:spPr>
+      </p:sp>
+      <p:sp>
+        <p:nvSpPr>
+          <p:cNvPr id="74" name="Text 72"/>
+          <p:cNvSpPr/>
+          <p:nvPr/>
+        </p:nvSpPr>
+        <p:spPr>
+          <a:xfrm>
+            <a:off x="10313126" y="1572768"/>
+            <a:ext cx="509451" cy="201168"/>
+          </a:xfrm>
+          <a:prstGeom prst="rect">
+            <a:avLst/>
+          </a:prstGeom>
+          <a:noFill/>
+          <a:ln/>
+        </p:spPr>
+        <p:txBody>
+          <a:bodyPr wrap="square" lIns="0" tIns="0" rIns="0" bIns="0" rtlCol="0" anchor="ctr"/>
+          <a:lstStyle/>
+          <a:p>
+            <a:pPr algn="ctr" indent="0" marL="0">
+              <a:buNone/>
+            </a:pPr>
+            <a:r>
+              <a:rPr lang="en-US" sz="700" dirty="0">
+                <a:solidFill>
+                  <a:srgbClr val="E0E0E0"/>
+                </a:solidFill>
+                <a:latin typeface="Arial" pitchFamily="34" charset="0"/>
+                <a:ea typeface="Arial" pitchFamily="34" charset="-122"/>
+                <a:cs typeface="Arial" pitchFamily="34" charset="-120"/>
+              </a:rPr>
+              <a:t>16-31</a:t>
+            </a:r>
+            <a:endParaRPr lang="en-US" sz="700" dirty="0"/>
+          </a:p>
+        </p:txBody>
+      </p:sp>
+      <p:sp>
+        <p:nvSpPr>
+          <p:cNvPr id="75" name="Shape 73"/>
+          <p:cNvSpPr/>
+          <p:nvPr/>
+        </p:nvSpPr>
+        <p:spPr>
+          <a:xfrm>
+            <a:off x="10822577" y="1572768"/>
+            <a:ext cx="509451" cy="201168"/>
+          </a:xfrm>
+          <a:prstGeom prst="rect">
+            <a:avLst/>
+          </a:prstGeom>
+          <a:solidFill>
+            <a:srgbClr val="1B3B6F"/>
+          </a:solidFill>
+          <a:ln w="6350">
+            <a:solidFill>
+              <a:srgbClr val="FFFFFF"/>
+            </a:solidFill>
+            <a:prstDash val="solid"/>
+          </a:ln>
+        </p:spPr>
+      </p:sp>
+      <p:sp>
+        <p:nvSpPr>
+          <p:cNvPr id="76" name="Text 74"/>
+          <p:cNvSpPr/>
+          <p:nvPr/>
+        </p:nvSpPr>
+        <p:spPr>
+          <a:xfrm>
+            <a:off x="10822577" y="1572768"/>
+            <a:ext cx="509451" cy="201168"/>
+          </a:xfrm>
+          <a:prstGeom prst="rect">
+            <a:avLst/>
+          </a:prstGeom>
+          <a:noFill/>
+          <a:ln/>
+        </p:spPr>
+        <p:txBody>
+          <a:bodyPr wrap="square" lIns="0" tIns="0" rIns="0" bIns="0" rtlCol="0" anchor="ctr"/>
+          <a:lstStyle/>
+          <a:p>
+            <a:pPr algn="ctr" indent="0" marL="0">
+              <a:buNone/>
+            </a:pPr>
+            <a:r>
+              <a:rPr lang="en-US" sz="700" dirty="0">
+                <a:solidFill>
+                  <a:srgbClr val="E0E0E0"/>
+                </a:solidFill>
+                <a:latin typeface="Arial" pitchFamily="34" charset="0"/>
+                <a:ea typeface="Arial" pitchFamily="34" charset="-122"/>
+                <a:cs typeface="Arial" pitchFamily="34" charset="-120"/>
+              </a:rPr>
+              <a:t>1-15</a:t>
+            </a:r>
+            <a:endParaRPr lang="en-US" sz="700" dirty="0"/>
+          </a:p>
+        </p:txBody>
+      </p:sp>
+      <p:sp>
+        <p:nvSpPr>
+          <p:cNvPr id="77" name="Shape 75"/>
+          <p:cNvSpPr/>
+          <p:nvPr/>
+        </p:nvSpPr>
+        <p:spPr>
+          <a:xfrm>
+            <a:off x="11332029" y="1572768"/>
+            <a:ext cx="509451" cy="201168"/>
+          </a:xfrm>
+          <a:prstGeom prst="rect">
+            <a:avLst/>
+          </a:prstGeom>
+          <a:solidFill>
+            <a:srgbClr val="1B3B6F"/>
+          </a:solidFill>
+          <a:ln w="6350">
+            <a:solidFill>
+              <a:srgbClr val="FFFFFF"/>
+            </a:solidFill>
+            <a:prstDash val="solid"/>
+          </a:ln>
+        </p:spPr>
+      </p:sp>
+      <p:sp>
+        <p:nvSpPr>
+          <p:cNvPr id="78" name="Text 76"/>
+          <p:cNvSpPr/>
+          <p:nvPr/>
+        </p:nvSpPr>
+        <p:spPr>
+          <a:xfrm>
+            <a:off x="11332029" y="1572768"/>
+            <a:ext cx="509451" cy="201168"/>
+          </a:xfrm>
+          <a:prstGeom prst="rect">
+            <a:avLst/>
+          </a:prstGeom>
+          <a:noFill/>
+          <a:ln/>
+        </p:spPr>
+        <p:txBody>
+          <a:bodyPr wrap="square" lIns="0" tIns="0" rIns="0" bIns="0" rtlCol="0" anchor="ctr"/>
+          <a:lstStyle/>
+          <a:p>
+            <a:pPr algn="ctr" indent="0" marL="0">
+              <a:buNone/>
+            </a:pPr>
+            <a:r>
+              <a:rPr lang="en-US" sz="700" dirty="0">
+                <a:solidFill>
+                  <a:srgbClr val="E0E0E0"/>
+                </a:solidFill>
+                <a:latin typeface="Arial" pitchFamily="34" charset="0"/>
+                <a:ea typeface="Arial" pitchFamily="34" charset="-122"/>
+                <a:cs typeface="Arial" pitchFamily="34" charset="-120"/>
+              </a:rPr>
+              <a:t>16-30</a:t>
+            </a:r>
+            <a:endParaRPr lang="en-US" sz="700" dirty="0"/>
+          </a:p>
+        </p:txBody>
+      </p:sp>
+      <p:sp>
+        <p:nvSpPr>
+          <p:cNvPr id="79" name="Shape 77"/>
+          <p:cNvSpPr/>
+          <p:nvPr/>
+        </p:nvSpPr>
+        <p:spPr>
+          <a:xfrm>
+            <a:off x="320040" y="1773936"/>
+            <a:ext cx="11521440" cy="457200"/>
+          </a:xfrm>
+          <a:prstGeom prst="rect">
+            <a:avLst/>
+          </a:prstGeom>
+          <a:solidFill>
+            <a:srgbClr val="FFFFFF"/>
+          </a:solidFill>
+          <a:ln w="6350">
+            <a:solidFill>
+              <a:srgbClr val="D9D9D9"/>
+            </a:solidFill>
+            <a:prstDash val="solid"/>
+          </a:ln>
+        </p:spPr>
+      </p:sp>
+      <p:sp>
+        <p:nvSpPr>
+          <p:cNvPr id="80" name="Text 78"/>
+          <p:cNvSpPr/>
+          <p:nvPr/>
+        </p:nvSpPr>
+        <p:spPr>
+          <a:xfrm>
+            <a:off x="393192" y="1773936"/>
+            <a:ext cx="3785616" cy="457200"/>
+          </a:xfrm>
+          <a:prstGeom prst="rect">
+            <a:avLst/>
+          </a:prstGeom>
+          <a:noFill/>
+          <a:ln/>
+        </p:spPr>
+        <p:txBody>
+          <a:bodyPr wrap="square" lIns="0" tIns="0" rIns="0" bIns="0" rtlCol="0" anchor="ctr">
+            <a:normAutofit/>
+          </a:bodyPr>
+          <a:lstStyle/>
+          <a:p>
+            <a:pPr indent="0" marL="0">
+              <a:buNone/>
+            </a:pPr>
+            <a:r>
+              <a:rPr lang="en-US" sz="900" b="1" dirty="0">
+                <a:solidFill>
+                  <a:srgbClr val="1B3B6F"/>
+                </a:solidFill>
+                <a:latin typeface="Arial" pitchFamily="34" charset="0"/>
+                <a:ea typeface="Arial" pitchFamily="34" charset="-122"/>
+                <a:cs typeface="Arial" pitchFamily="34" charset="-120"/>
+              </a:rPr>
+              <a:t>SP10 - CONTRATO / OPORTUNIDADE | Desenvolver alteração no método de Data e Hora da Assinatura de Contrato</a:t>
+            </a:r>
+            <a:endParaRPr lang="en-US" sz="900" dirty="0"/>
+          </a:p>
+        </p:txBody>
+      </p:sp>
+      <p:sp>
+        <p:nvSpPr>
+          <p:cNvPr id="81" name="Shape 79"/>
+          <p:cNvSpPr/>
+          <p:nvPr/>
+        </p:nvSpPr>
+        <p:spPr>
+          <a:xfrm>
+            <a:off x="4407408" y="1929384"/>
+            <a:ext cx="146304" cy="146304"/>
+          </a:xfrm>
+          <a:prstGeom prst="ellipse">
+            <a:avLst/>
+          </a:prstGeom>
+          <a:solidFill>
+            <a:srgbClr val="70AD47"/>
+          </a:solidFill>
+          <a:ln w="6350">
+            <a:solidFill>
+              <a:srgbClr val="FFFFFF"/>
+            </a:solidFill>
+            <a:prstDash val="solid"/>
+          </a:ln>
+        </p:spPr>
+      </p:sp>
+      <p:sp>
+        <p:nvSpPr>
+          <p:cNvPr id="82" name="Shape 80"/>
+          <p:cNvSpPr/>
+          <p:nvPr/>
+        </p:nvSpPr>
+        <p:spPr>
+          <a:xfrm>
+            <a:off x="8093373" y="1906524"/>
+            <a:ext cx="351764" cy="192024"/>
+          </a:xfrm>
+          <a:prstGeom prst="rect">
+            <a:avLst/>
+          </a:prstGeom>
+          <a:solidFill>
+            <a:srgbClr val="BFBFBF"/>
+          </a:solidFill>
+          <a:ln w="12700">
+            <a:solidFill>
+              <a:srgbClr val="BFBFBF"/>
+            </a:solidFill>
+            <a:prstDash val="solid"/>
+          </a:ln>
+        </p:spPr>
+      </p:sp>
+      <p:sp>
+        <p:nvSpPr>
+          <p:cNvPr id="83" name="Shape 81"/>
+          <p:cNvSpPr/>
+          <p:nvPr/>
+        </p:nvSpPr>
+        <p:spPr>
+          <a:xfrm>
+            <a:off x="8362841" y="1920240"/>
+            <a:ext cx="164592" cy="164592"/>
+          </a:xfrm>
+          <a:prstGeom prst="ellipse">
+            <a:avLst/>
+          </a:prstGeom>
+          <a:solidFill>
+            <a:srgbClr val="9E9E9E"/>
+          </a:solidFill>
+          <a:ln w="9525">
+            <a:solidFill>
+              <a:srgbClr val="FFFFFF"/>
+            </a:solidFill>
+            <a:prstDash val="solid"/>
+          </a:ln>
+        </p:spPr>
+      </p:sp>
+      <p:sp>
+        <p:nvSpPr>
+          <p:cNvPr id="84" name="Text 82"/>
+          <p:cNvSpPr/>
+          <p:nvPr/>
+        </p:nvSpPr>
+        <p:spPr>
+          <a:xfrm>
+            <a:off x="8362841" y="1911096"/>
+            <a:ext cx="164592" cy="164592"/>
+          </a:xfrm>
+          <a:prstGeom prst="rect">
+            <a:avLst/>
+          </a:prstGeom>
+          <a:noFill/>
+          <a:ln/>
+        </p:spPr>
+        <p:txBody>
+          <a:bodyPr wrap="square" lIns="0" tIns="0" rIns="0" bIns="0" rtlCol="0" anchor="ctr"/>
+          <a:lstStyle/>
+          <a:p>
+            <a:pPr algn="ctr" indent="0" marL="0">
+              <a:buNone/>
+            </a:pPr>
+            <a:r>
+              <a:rPr lang="en-US" sz="800" b="1" dirty="0">
+                <a:solidFill>
+                  <a:srgbClr val="FFFFFF"/>
+                </a:solidFill>
+                <a:latin typeface="Arial" pitchFamily="34" charset="0"/>
+                <a:ea typeface="Arial" pitchFamily="34" charset="-122"/>
+                <a:cs typeface="Arial" pitchFamily="34" charset="-120"/>
+              </a:rPr>
+              <a:t>✓</a:t>
+            </a:r>
+            <a:endParaRPr lang="en-US" sz="800" dirty="0"/>
+          </a:p>
+        </p:txBody>
+      </p:sp>
+      <p:sp>
+        <p:nvSpPr>
+          <p:cNvPr id="85" name="Text 83"/>
+          <p:cNvSpPr/>
+          <p:nvPr/>
+        </p:nvSpPr>
+        <p:spPr>
+          <a:xfrm>
+            <a:off x="8554865" y="1773936"/>
+            <a:ext cx="1005840" cy="457200"/>
+          </a:xfrm>
+          <a:prstGeom prst="rect">
+            <a:avLst/>
+          </a:prstGeom>
+          <a:noFill/>
+          <a:ln/>
+        </p:spPr>
+        <p:txBody>
+          <a:bodyPr wrap="square" lIns="0" tIns="0" rIns="0" bIns="0" rtlCol="0" anchor="ctr"/>
+          <a:lstStyle/>
+          <a:p>
+            <a:pPr indent="0" marL="0">
+              <a:buNone/>
+            </a:pPr>
+            <a:r>
+              <a:rPr lang="en-US" sz="750" dirty="0">
+                <a:solidFill>
+                  <a:srgbClr val="1A1A1A"/>
+                </a:solidFill>
+                <a:latin typeface="Arial" pitchFamily="34" charset="0"/>
+                <a:ea typeface="Arial" pitchFamily="34" charset="-122"/>
+                <a:cs typeface="Arial" pitchFamily="34" charset="-120"/>
+              </a:rPr>
+              <a:t>25/08</a:t>
+            </a:r>
+            <a:endParaRPr lang="en-US" sz="750" dirty="0"/>
+          </a:p>
+        </p:txBody>
+      </p:sp>
+      <p:sp>
+        <p:nvSpPr>
+          <p:cNvPr id="86" name="Shape 84"/>
+          <p:cNvSpPr/>
+          <p:nvPr/>
+        </p:nvSpPr>
+        <p:spPr>
+          <a:xfrm>
+            <a:off x="8202541" y="1115568"/>
+            <a:ext cx="0" cy="1115568"/>
+          </a:xfrm>
+          <a:prstGeom prst="line">
+            <a:avLst/>
+          </a:prstGeom>
+          <a:noFill/>
+          <a:ln w="19050">
+            <a:solidFill>
+              <a:srgbClr val="E53935"/>
+            </a:solidFill>
+            <a:prstDash val="dash"/>
+          </a:ln>
+        </p:spPr>
+      </p:sp>
+      <p:sp>
+        <p:nvSpPr>
+          <p:cNvPr id="87" name="Shape 85"/>
+          <p:cNvSpPr/>
+          <p:nvPr/>
+        </p:nvSpPr>
+        <p:spPr>
+          <a:xfrm>
+            <a:off x="8165965" y="2194560"/>
+            <a:ext cx="73152" cy="73152"/>
+          </a:xfrm>
+          <a:prstGeom prst="ellipse">
+            <a:avLst/>
+          </a:prstGeom>
+          <a:solidFill>
+            <a:srgbClr val="E53935"/>
+          </a:solidFill>
+          <a:ln w="12700">
+            <a:solidFill>
+              <a:srgbClr val="E53935"/>
+            </a:solidFill>
+            <a:prstDash val="solid"/>
+          </a:ln>
+        </p:spPr>
+      </p:sp>
+      <p:sp>
+        <p:nvSpPr>
+          <p:cNvPr id="88" name="Shape 86"/>
+          <p:cNvSpPr/>
+          <p:nvPr/>
+        </p:nvSpPr>
+        <p:spPr>
+          <a:xfrm>
+            <a:off x="320040" y="1115568"/>
+            <a:ext cx="11521440" cy="1115568"/>
           </a:xfrm>
           <a:prstGeom prst="rect">
             <a:avLst/>
